--- a/contra_ppo_presentation.pptx
+++ b/contra_ppo_presentation.pptx
@@ -5,7 +5,7 @@
     <p:sldMasterId id="2147483648" r:id="rId1"/>
   </p:sldMasterIdLst>
   <p:notesMasterIdLst>
-    <p:notesMasterId r:id="rId17"/>
+    <p:notesMasterId r:id="rId19"/>
   </p:notesMasterIdLst>
   <p:sldIdLst>
     <p:sldId id="256" r:id="rId6"/>
@@ -19,25 +19,27 @@
     <p:sldId id="264" r:id="rId14"/>
     <p:sldId id="265" r:id="rId15"/>
     <p:sldId id="266" r:id="rId16"/>
+    <p:sldId id="267" r:id="rId17"/>
+    <p:sldId id="268" r:id="rId18"/>
   </p:sldIdLst>
   <p:sldSz cx="18288000" cy="10287000"/>
   <p:notesSz cx="6858000" cy="9144000"/>
   <p:embeddedFontLst>
     <p:embeddedFont>
       <p:font typeface="Cambria Bold" charset="1" panose="02040803050406030204"/>
-      <p:regular r:id="rId20"/>
+      <p:regular r:id="rId22"/>
     </p:embeddedFont>
     <p:embeddedFont>
       <p:font typeface="Calibri (MS)" charset="1" panose="020F0502020204030204"/>
-      <p:regular r:id="rId21"/>
+      <p:regular r:id="rId23"/>
     </p:embeddedFont>
     <p:embeddedFont>
       <p:font typeface="Calibri (MS) Bold" charset="1" panose="020F0702030404030204"/>
-      <p:regular r:id="rId22"/>
+      <p:regular r:id="rId24"/>
     </p:embeddedFont>
     <p:embeddedFont>
       <p:font typeface="Calibri (MS) Italics" charset="1" panose="020F05020202040A0204"/>
-      <p:regular r:id="rId25"/>
+      <p:regular r:id="rId27"/>
     </p:embeddedFont>
   </p:embeddedFontLst>
   <p:defaultTextStyle>
@@ -915,6 +917,432 @@
 </file>
 
 <file path=ppt/notesSlides/notesSlide11.xml><?xml version="1.0" encoding="utf-8"?>
+<p:notes xmlns:p="http://schemas.openxmlformats.org/presentationml/2006/main" xmlns:a="http://schemas.openxmlformats.org/drawingml/2006/main">
+  <p:cSld>
+    <p:spTree xmlns:r="http://schemas.openxmlformats.org/officeDocument/2006/relationships">
+      <p:nvGrpSpPr>
+        <p:cNvPr id="1" name=""/>
+        <p:cNvGrpSpPr/>
+        <p:nvPr/>
+      </p:nvGrpSpPr>
+      <p:grpSpPr>
+        <a:xfrm>
+          <a:off x="0" y="0"/>
+          <a:ext cx="0" cy="0"/>
+          <a:chOff x="0" y="0"/>
+          <a:chExt cx="0" cy="0"/>
+        </a:xfrm>
+      </p:grpSpPr>
+      <p:sp>
+        <p:nvSpPr>
+          <p:cNvPr id="2" name="Header Placeholder 1"/>
+          <p:cNvSpPr>
+            <a:spLocks noGrp="1"/>
+          </p:cNvSpPr>
+          <p:nvPr>
+            <p:ph type="hdr" sz="quarter"/>
+          </p:nvPr>
+        </p:nvSpPr>
+        <p:spPr>
+          <a:xfrm>
+            <a:off x="0" y="0"/>
+            <a:ext cx="3962400" cy="342900"/>
+          </a:xfrm>
+          <a:prstGeom prst="rect">
+            <a:avLst/>
+          </a:prstGeom>
+        </p:spPr>
+        <p:txBody>
+          <a:bodyPr vert="horz" lIns="91440" tIns="45720" rIns="91440" bIns="45720" rtlCol="0"/>
+          <a:lstStyle>
+            <a:lvl1pPr algn="l">
+              <a:defRPr sz="1200"/>
+            </a:lvl1pPr>
+          </a:lstStyle>
+          <a:p/>
+        </p:txBody>
+      </p:sp>
+      <p:sp>
+        <p:nvSpPr>
+          <p:cNvPr id="3" name="Date Placeholder 2"/>
+          <p:cNvSpPr>
+            <a:spLocks noGrp="1"/>
+          </p:cNvSpPr>
+          <p:nvPr>
+            <p:ph type="dt" idx="1"/>
+          </p:nvPr>
+        </p:nvSpPr>
+        <p:spPr>
+          <a:xfrm>
+            <a:off x="5180013" y="0"/>
+            <a:ext cx="3962400" cy="342900"/>
+          </a:xfrm>
+          <a:prstGeom prst="rect">
+            <a:avLst/>
+          </a:prstGeom>
+        </p:spPr>
+        <p:txBody>
+          <a:bodyPr vert="horz" lIns="91440" tIns="45720" rIns="91440" bIns="45720" rtlCol="0"/>
+          <a:lstStyle>
+            <a:lvl1pPr algn="r">
+              <a:defRPr sz="1200"/>
+            </a:lvl1pPr>
+          </a:lstStyle>
+          <a:p>
+            <a:r id="{B7268E1E-0E44-426D-905E-8AD9B19D2182}" type="datetimeFigureOut">
+              <a:rPr lang="cs-CZ" smtClean="0"/>
+              <a:t>1.7.2013</a:t>
+            </a:r>
+          </a:p>
+        </p:txBody>
+      </p:sp>
+      <p:sp>
+        <p:nvSpPr>
+          <p:cNvPr id="4" name="Slide Image Placeholder 3"/>
+          <p:cNvSpPr>
+            <a:spLocks noGrp="1" noRot="1" noChangeAspect="1"/>
+          </p:cNvSpPr>
+          <p:nvPr>
+            <p:ph type="sldImg" idx="2"/>
+          </p:nvPr>
+        </p:nvSpPr>
+        <p:spPr>
+          <a:xfrm>
+            <a:off x="2857500" y="512763"/>
+            <a:ext cx="3429000" cy="2566987"/>
+          </a:xfrm>
+          <a:prstGeom prst="rect">
+            <a:avLst/>
+          </a:prstGeom>
+          <a:noFill/>
+          <a:ln w="12700">
+            <a:solidFill>
+              <a:prstClr val="black"/>
+            </a:solidFill>
+          </a:ln>
+        </p:spPr>
+        <p:txBody>
+          <a:bodyPr vert="horz" lIns="91440" tIns="45720" rIns="91440" bIns="45720" rtlCol="0" anchor="ctr"/>
+          <a:lstStyle/>
+          <a:p/>
+        </p:txBody>
+      </p:sp>
+      <p:sp>
+        <p:nvSpPr>
+          <p:cNvPr id="5" name="Notes Placeholder 4"/>
+          <p:cNvSpPr>
+            <a:spLocks noGrp="1"/>
+          </p:cNvSpPr>
+          <p:nvPr>
+            <p:ph type="body" sz="quarter" idx="3"/>
+          </p:nvPr>
+        </p:nvSpPr>
+        <p:spPr>
+          <a:xfrm>
+            <a:off x="914400" y="3251200"/>
+            <a:ext cx="7315200" cy="3081338"/>
+          </a:xfrm>
+          <a:prstGeom prst="rect">
+            <a:avLst/>
+          </a:prstGeom>
+        </p:spPr>
+        <p:txBody>
+          <a:bodyPr vert="horz" lIns="91440" tIns="45720" rIns="91440" bIns="45720" rtlCol="0"/>
+          <a:lstStyle/>
+          <a:p>
+            <a:r>
+              <a:rPr lang="en-US"/>
+              <a:t>&lt;number&gt;</a:t>
+            </a:r>
+            <a:endParaRPr lang="en-US" smtClean="0"/>
+          </a:p>
+        </p:txBody>
+      </p:sp>
+      <p:sp>
+        <p:nvSpPr>
+          <p:cNvPr id="6" name="Footer Placeholder 5"/>
+          <p:cNvSpPr>
+            <a:spLocks noGrp="1"/>
+          </p:cNvSpPr>
+          <p:nvPr>
+            <p:ph type="ftr" sz="quarter" idx="4"/>
+          </p:nvPr>
+        </p:nvSpPr>
+        <p:spPr>
+          <a:xfrm>
+            <a:off x="0" y="6502400"/>
+            <a:ext cx="3962400" cy="341313"/>
+          </a:xfrm>
+          <a:prstGeom prst="rect">
+            <a:avLst/>
+          </a:prstGeom>
+        </p:spPr>
+        <p:txBody>
+          <a:bodyPr vert="horz" lIns="91440" tIns="45720" rIns="91440" bIns="45720" rtlCol="0" anchor="b"/>
+          <a:lstStyle>
+            <a:lvl1pPr algn="l">
+              <a:defRPr sz="1200"/>
+            </a:lvl1pPr>
+          </a:lstStyle>
+          <a:p/>
+        </p:txBody>
+      </p:sp>
+      <p:sp>
+        <p:nvSpPr>
+          <p:cNvPr id="7" name="Slide Number Placeholder 6"/>
+          <p:cNvSpPr>
+            <a:spLocks noGrp="1"/>
+          </p:cNvSpPr>
+          <p:nvPr>
+            <p:ph type="sldNum" sz="quarter" idx="5"/>
+          </p:nvPr>
+        </p:nvSpPr>
+        <p:spPr>
+          <a:xfrm>
+            <a:off x="5180013" y="6502400"/>
+            <a:ext cx="3962400" cy="341313"/>
+          </a:xfrm>
+          <a:prstGeom prst="rect">
+            <a:avLst/>
+          </a:prstGeom>
+        </p:spPr>
+        <p:txBody>
+          <a:bodyPr vert="horz" lIns="91440" tIns="45720" rIns="91440" bIns="45720" rtlCol="0" anchor="b"/>
+          <a:lstStyle>
+            <a:lvl1pPr algn="r">
+              <a:defRPr sz="1200"/>
+            </a:lvl1pPr>
+          </a:lstStyle>
+          <a:p>
+            <a:r id="{871B2431-D351-4C6E-A3CF-9DFAC0E3E050}" type="slidenum">
+              <a:rPr lang="cs-CZ" smtClean="0"/>
+              <a:t>‹#›</a:t>
+            </a:r>
+          </a:p>
+        </p:txBody>
+      </p:sp>
+    </p:spTree>
+  </p:cSld>
+  <p:clrMapOvr>
+    <a:masterClrMapping/>
+  </p:clrMapOvr>
+</p:notes>
+</file>
+
+<file path=ppt/notesSlides/notesSlide12.xml><?xml version="1.0" encoding="utf-8"?>
+<p:notes xmlns:p="http://schemas.openxmlformats.org/presentationml/2006/main" xmlns:a="http://schemas.openxmlformats.org/drawingml/2006/main">
+  <p:cSld>
+    <p:spTree xmlns:r="http://schemas.openxmlformats.org/officeDocument/2006/relationships">
+      <p:nvGrpSpPr>
+        <p:cNvPr id="1" name=""/>
+        <p:cNvGrpSpPr/>
+        <p:nvPr/>
+      </p:nvGrpSpPr>
+      <p:grpSpPr>
+        <a:xfrm>
+          <a:off x="0" y="0"/>
+          <a:ext cx="0" cy="0"/>
+          <a:chOff x="0" y="0"/>
+          <a:chExt cx="0" cy="0"/>
+        </a:xfrm>
+      </p:grpSpPr>
+      <p:sp>
+        <p:nvSpPr>
+          <p:cNvPr id="2" name="Header Placeholder 1"/>
+          <p:cNvSpPr>
+            <a:spLocks noGrp="1"/>
+          </p:cNvSpPr>
+          <p:nvPr>
+            <p:ph type="hdr" sz="quarter"/>
+          </p:nvPr>
+        </p:nvSpPr>
+        <p:spPr>
+          <a:xfrm>
+            <a:off x="0" y="0"/>
+            <a:ext cx="3962400" cy="342900"/>
+          </a:xfrm>
+          <a:prstGeom prst="rect">
+            <a:avLst/>
+          </a:prstGeom>
+        </p:spPr>
+        <p:txBody>
+          <a:bodyPr vert="horz" lIns="91440" tIns="45720" rIns="91440" bIns="45720" rtlCol="0"/>
+          <a:lstStyle>
+            <a:lvl1pPr algn="l">
+              <a:defRPr sz="1200"/>
+            </a:lvl1pPr>
+          </a:lstStyle>
+          <a:p/>
+        </p:txBody>
+      </p:sp>
+      <p:sp>
+        <p:nvSpPr>
+          <p:cNvPr id="3" name="Date Placeholder 2"/>
+          <p:cNvSpPr>
+            <a:spLocks noGrp="1"/>
+          </p:cNvSpPr>
+          <p:nvPr>
+            <p:ph type="dt" idx="1"/>
+          </p:nvPr>
+        </p:nvSpPr>
+        <p:spPr>
+          <a:xfrm>
+            <a:off x="5180013" y="0"/>
+            <a:ext cx="3962400" cy="342900"/>
+          </a:xfrm>
+          <a:prstGeom prst="rect">
+            <a:avLst/>
+          </a:prstGeom>
+        </p:spPr>
+        <p:txBody>
+          <a:bodyPr vert="horz" lIns="91440" tIns="45720" rIns="91440" bIns="45720" rtlCol="0"/>
+          <a:lstStyle>
+            <a:lvl1pPr algn="r">
+              <a:defRPr sz="1200"/>
+            </a:lvl1pPr>
+          </a:lstStyle>
+          <a:p>
+            <a:r id="{B7268E1E-0E44-426D-905E-8AD9B19D2182}" type="datetimeFigureOut">
+              <a:rPr lang="cs-CZ" smtClean="0"/>
+              <a:t>1.7.2013</a:t>
+            </a:r>
+          </a:p>
+        </p:txBody>
+      </p:sp>
+      <p:sp>
+        <p:nvSpPr>
+          <p:cNvPr id="4" name="Slide Image Placeholder 3"/>
+          <p:cNvSpPr>
+            <a:spLocks noGrp="1" noRot="1" noChangeAspect="1"/>
+          </p:cNvSpPr>
+          <p:nvPr>
+            <p:ph type="sldImg" idx="2"/>
+          </p:nvPr>
+        </p:nvSpPr>
+        <p:spPr>
+          <a:xfrm>
+            <a:off x="2857500" y="512763"/>
+            <a:ext cx="3429000" cy="2566987"/>
+          </a:xfrm>
+          <a:prstGeom prst="rect">
+            <a:avLst/>
+          </a:prstGeom>
+          <a:noFill/>
+          <a:ln w="12700">
+            <a:solidFill>
+              <a:prstClr val="black"/>
+            </a:solidFill>
+          </a:ln>
+        </p:spPr>
+        <p:txBody>
+          <a:bodyPr vert="horz" lIns="91440" tIns="45720" rIns="91440" bIns="45720" rtlCol="0" anchor="ctr"/>
+          <a:lstStyle/>
+          <a:p/>
+        </p:txBody>
+      </p:sp>
+      <p:sp>
+        <p:nvSpPr>
+          <p:cNvPr id="5" name="Notes Placeholder 4"/>
+          <p:cNvSpPr>
+            <a:spLocks noGrp="1"/>
+          </p:cNvSpPr>
+          <p:nvPr>
+            <p:ph type="body" sz="quarter" idx="3"/>
+          </p:nvPr>
+        </p:nvSpPr>
+        <p:spPr>
+          <a:xfrm>
+            <a:off x="914400" y="3251200"/>
+            <a:ext cx="7315200" cy="3081338"/>
+          </a:xfrm>
+          <a:prstGeom prst="rect">
+            <a:avLst/>
+          </a:prstGeom>
+        </p:spPr>
+        <p:txBody>
+          <a:bodyPr vert="horz" lIns="91440" tIns="45720" rIns="91440" bIns="45720" rtlCol="0"/>
+          <a:lstStyle/>
+          <a:p>
+            <a:r>
+              <a:rPr lang="en-US"/>
+              <a:t>&lt;number&gt;</a:t>
+            </a:r>
+            <a:endParaRPr lang="en-US" smtClean="0"/>
+          </a:p>
+        </p:txBody>
+      </p:sp>
+      <p:sp>
+        <p:nvSpPr>
+          <p:cNvPr id="6" name="Footer Placeholder 5"/>
+          <p:cNvSpPr>
+            <a:spLocks noGrp="1"/>
+          </p:cNvSpPr>
+          <p:nvPr>
+            <p:ph type="ftr" sz="quarter" idx="4"/>
+          </p:nvPr>
+        </p:nvSpPr>
+        <p:spPr>
+          <a:xfrm>
+            <a:off x="0" y="6502400"/>
+            <a:ext cx="3962400" cy="341313"/>
+          </a:xfrm>
+          <a:prstGeom prst="rect">
+            <a:avLst/>
+          </a:prstGeom>
+        </p:spPr>
+        <p:txBody>
+          <a:bodyPr vert="horz" lIns="91440" tIns="45720" rIns="91440" bIns="45720" rtlCol="0" anchor="b"/>
+          <a:lstStyle>
+            <a:lvl1pPr algn="l">
+              <a:defRPr sz="1200"/>
+            </a:lvl1pPr>
+          </a:lstStyle>
+          <a:p/>
+        </p:txBody>
+      </p:sp>
+      <p:sp>
+        <p:nvSpPr>
+          <p:cNvPr id="7" name="Slide Number Placeholder 6"/>
+          <p:cNvSpPr>
+            <a:spLocks noGrp="1"/>
+          </p:cNvSpPr>
+          <p:nvPr>
+            <p:ph type="sldNum" sz="quarter" idx="5"/>
+          </p:nvPr>
+        </p:nvSpPr>
+        <p:spPr>
+          <a:xfrm>
+            <a:off x="5180013" y="6502400"/>
+            <a:ext cx="3962400" cy="341313"/>
+          </a:xfrm>
+          <a:prstGeom prst="rect">
+            <a:avLst/>
+          </a:prstGeom>
+        </p:spPr>
+        <p:txBody>
+          <a:bodyPr vert="horz" lIns="91440" tIns="45720" rIns="91440" bIns="45720" rtlCol="0" anchor="b"/>
+          <a:lstStyle>
+            <a:lvl1pPr algn="r">
+              <a:defRPr sz="1200"/>
+            </a:lvl1pPr>
+          </a:lstStyle>
+          <a:p>
+            <a:r id="{871B2431-D351-4C6E-A3CF-9DFAC0E3E050}" type="slidenum">
+              <a:rPr lang="cs-CZ" smtClean="0"/>
+              <a:t>‹#›</a:t>
+            </a:r>
+          </a:p>
+        </p:txBody>
+      </p:sp>
+    </p:spTree>
+  </p:cSld>
+  <p:clrMapOvr>
+    <a:masterClrMapping/>
+  </p:clrMapOvr>
+</p:notes>
+</file>
+
+<file path=ppt/notesSlides/notesSlide13.xml><?xml version="1.0" encoding="utf-8"?>
 <p:notes xmlns:p="http://schemas.openxmlformats.org/presentationml/2006/main" xmlns:a="http://schemas.openxmlformats.org/drawingml/2006/main">
   <p:cSld>
     <p:spTree xmlns:r="http://schemas.openxmlformats.org/officeDocument/2006/relationships">
@@ -7428,7 +7856,7 @@
                   <a:cs typeface="Calibri (MS) Bold"/>
                   <a:sym typeface="Calibri (MS) Bold"/>
                 </a:rPr>
-                <a:t>CONCLUSION</a:t>
+                <a:t>RESULTS</a:t>
               </a:r>
             </a:p>
           </p:txBody>
@@ -7442,10 +7870,10 @@
         </p:nvGrpSpPr>
         <p:grpSpPr>
           <a:xfrm rot="0">
-            <a:off x="822960" y="850497"/>
-            <a:ext cx="15910017" cy="959577"/>
+            <a:off x="659359" y="-14254"/>
+            <a:ext cx="10858846" cy="3303594"/>
             <a:chOff x="0" y="0"/>
-            <a:chExt cx="21213356" cy="1279436"/>
+            <a:chExt cx="14478462" cy="4404792"/>
           </a:xfrm>
         </p:grpSpPr>
         <p:sp>
@@ -7457,7 +7885,7 @@
           <p:spPr>
             <a:xfrm flipH="false" flipV="false" rot="0">
               <a:off x="0" y="0"/>
-              <a:ext cx="21213359" cy="1279440"/>
+              <a:ext cx="14478465" cy="4404795"/>
             </a:xfrm>
             <a:custGeom>
               <a:avLst/>
@@ -7466,18 +7894,18 @@
               <a:cxnLst/>
               <a:rect r="r" b="b" t="t" l="l"/>
               <a:pathLst>
-                <a:path h="1279440" w="21213359">
+                <a:path h="4404795" w="14478465">
                   <a:moveTo>
                     <a:pt x="0" y="0"/>
                   </a:moveTo>
                   <a:lnTo>
-                    <a:pt x="21213359" y="0"/>
-                  </a:lnTo>
-                  <a:lnTo>
-                    <a:pt x="21213359" y="1279440"/>
-                  </a:lnTo>
-                  <a:lnTo>
-                    <a:pt x="0" y="1279440"/>
+                    <a:pt x="14478465" y="0"/>
+                  </a:lnTo>
+                  <a:lnTo>
+                    <a:pt x="14478465" y="4404795"/>
+                  </a:lnTo>
+                  <a:lnTo>
+                    <a:pt x="0" y="4404795"/>
                   </a:lnTo>
                   <a:close/>
                 </a:path>
@@ -7488,7 +7916,7 @@
                 <a:alphaModFix amt="0"/>
               </a:blip>
               <a:stretch>
-                <a:fillRect l="0" t="-273065" r="0" b="-273065"/>
+                <a:fillRect l="0" t="-79316" r="-46516" b="-8362"/>
               </a:stretch>
             </a:blipFill>
           </p:spPr>
@@ -7502,7 +7930,7 @@
           <p:spPr>
             <a:xfrm>
               <a:off x="0" y="-19050"/>
-              <a:ext cx="21213356" cy="1298486"/>
+              <a:ext cx="14478462" cy="4423842"/>
             </a:xfrm>
             <a:prstGeom prst="rect">
               <a:avLst/>
@@ -7527,7 +7955,7 @@
                   <a:cs typeface="Cambria Bold"/>
                   <a:sym typeface="Cambria Bold"/>
                 </a:rPr>
-                <a:t>Results achieved &amp; directions for improvement</a:t>
+                <a:t>Compare each steps training</a:t>
               </a:r>
             </a:p>
           </p:txBody>
@@ -7541,10 +7969,10 @@
         </p:nvGrpSpPr>
         <p:grpSpPr>
           <a:xfrm rot="0">
-            <a:off x="822960" y="2400300"/>
-            <a:ext cx="8091897" cy="6308817"/>
+            <a:off x="822960" y="11921576"/>
+            <a:ext cx="3908517" cy="342357"/>
             <a:chOff x="0" y="0"/>
-            <a:chExt cx="10789196" cy="8411756"/>
+            <a:chExt cx="5211356" cy="456476"/>
           </a:xfrm>
         </p:grpSpPr>
         <p:sp>
@@ -7556,7 +7984,7 @@
           <p:spPr>
             <a:xfrm flipH="false" flipV="false" rot="0">
               <a:off x="0" y="0"/>
-              <a:ext cx="10789286" cy="8411845"/>
+              <a:ext cx="5211360" cy="456480"/>
             </a:xfrm>
             <a:custGeom>
               <a:avLst/>
@@ -7565,73 +7993,97 @@
               <a:cxnLst/>
               <a:rect r="r" b="b" t="t" l="l"/>
               <a:pathLst>
-                <a:path h="8411845" w="10789286">
+                <a:path h="456480" w="5211360">
                   <a:moveTo>
-                    <a:pt x="0" y="146304"/>
+                    <a:pt x="0" y="0"/>
                   </a:moveTo>
-                  <a:cubicBezTo>
-                    <a:pt x="0" y="65532"/>
-                    <a:pt x="65532" y="0"/>
-                    <a:pt x="146304" y="0"/>
-                  </a:cubicBezTo>
-                  <a:lnTo>
-                    <a:pt x="10642981" y="0"/>
-                  </a:lnTo>
-                  <a:cubicBezTo>
-                    <a:pt x="10723753" y="0"/>
-                    <a:pt x="10789286" y="65532"/>
-                    <a:pt x="10789286" y="146304"/>
-                  </a:cubicBezTo>
-                  <a:lnTo>
-                    <a:pt x="10789286" y="8265541"/>
-                  </a:lnTo>
-                  <a:cubicBezTo>
-                    <a:pt x="10789286" y="8346313"/>
-                    <a:pt x="10723753" y="8411845"/>
-                    <a:pt x="10642981" y="8411845"/>
-                  </a:cubicBezTo>
-                  <a:lnTo>
-                    <a:pt x="146304" y="8411845"/>
-                  </a:lnTo>
-                  <a:cubicBezTo>
-                    <a:pt x="65532" y="8411718"/>
-                    <a:pt x="0" y="8346313"/>
-                    <a:pt x="0" y="8265541"/>
-                  </a:cubicBezTo>
+                  <a:lnTo>
+                    <a:pt x="5211360" y="0"/>
+                  </a:lnTo>
+                  <a:lnTo>
+                    <a:pt x="5211360" y="456480"/>
+                  </a:lnTo>
+                  <a:lnTo>
+                    <a:pt x="0" y="456480"/>
+                  </a:lnTo>
                   <a:close/>
                 </a:path>
               </a:pathLst>
             </a:custGeom>
-            <a:solidFill>
-              <a:srgbClr val="16213E"/>
-            </a:solidFill>
-          </p:spPr>
+            <a:blipFill>
+              <a:blip r:embed="rId3">
+                <a:alphaModFix amt="0"/>
+              </a:blip>
+              <a:stretch>
+                <a:fillRect l="0" t="-172449" r="0" b="-172448"/>
+              </a:stretch>
+            </a:blipFill>
+          </p:spPr>
+        </p:sp>
+        <p:sp>
+          <p:nvSpPr>
+            <p:cNvPr name="TextBox 10" id="10"/>
+            <p:cNvSpPr txBox="true"/>
+            <p:nvPr/>
+          </p:nvSpPr>
+          <p:spPr>
+            <a:xfrm>
+              <a:off x="0" y="-38100"/>
+              <a:ext cx="5211356" cy="494576"/>
+            </a:xfrm>
+            <a:prstGeom prst="rect">
+              <a:avLst/>
+            </a:prstGeom>
+          </p:spPr>
+          <p:txBody>
+            <a:bodyPr anchor="ctr" rtlCol="false" tIns="0" lIns="0" bIns="0" rIns="0"/>
+            <a:lstStyle/>
+            <a:p>
+              <a:pPr algn="ctr">
+                <a:lnSpc>
+                  <a:spcPts val="1709"/>
+                </a:lnSpc>
+              </a:pPr>
+              <a:r>
+                <a:rPr lang="en-US" sz="1425" spc="-1">
+                  <a:solidFill>
+                    <a:srgbClr val="9AA6C1"/>
+                  </a:solidFill>
+                  <a:latin typeface="Calibri (MS)"/>
+                  <a:ea typeface="Calibri (MS)"/>
+                  <a:cs typeface="Calibri (MS)"/>
+                  <a:sym typeface="Calibri (MS)"/>
+                </a:rPr>
+                <a:t>~1M steps</a:t>
+              </a:r>
+            </a:p>
+          </p:txBody>
         </p:sp>
       </p:grpSp>
       <p:grpSp>
         <p:nvGrpSpPr>
-          <p:cNvPr name="Group 10" id="10"/>
+          <p:cNvPr name="Group 11" id="11"/>
           <p:cNvGrpSpPr/>
           <p:nvPr/>
         </p:nvGrpSpPr>
         <p:grpSpPr>
           <a:xfrm rot="0">
-            <a:off x="1234440" y="2743200"/>
-            <a:ext cx="1096737" cy="1096737"/>
+            <a:off x="5074920" y="11921576"/>
+            <a:ext cx="3908517" cy="342357"/>
             <a:chOff x="0" y="0"/>
-            <a:chExt cx="1462316" cy="1462316"/>
+            <a:chExt cx="5211356" cy="456476"/>
           </a:xfrm>
         </p:grpSpPr>
         <p:sp>
           <p:nvSpPr>
-            <p:cNvPr name="Freeform 11" id="11"/>
+            <p:cNvPr name="Freeform 12" id="12"/>
             <p:cNvSpPr/>
             <p:nvPr/>
           </p:nvSpPr>
           <p:spPr>
             <a:xfrm flipH="false" flipV="false" rot="0">
               <a:off x="0" y="0"/>
-              <a:ext cx="1462278" cy="1462278"/>
+              <a:ext cx="5211360" cy="456480"/>
             </a:xfrm>
             <a:custGeom>
               <a:avLst/>
@@ -7640,99 +8092,71 @@
               <a:cxnLst/>
               <a:rect r="r" b="b" t="t" l="l"/>
               <a:pathLst>
-                <a:path h="1462278" w="1462278">
-                  <a:moveTo>
-                    <a:pt x="0" y="731139"/>
-                  </a:moveTo>
-                  <a:cubicBezTo>
-                    <a:pt x="0" y="327406"/>
-                    <a:pt x="327406" y="0"/>
-                    <a:pt x="731139" y="0"/>
-                  </a:cubicBezTo>
-                  <a:cubicBezTo>
-                    <a:pt x="1134872" y="0"/>
-                    <a:pt x="1462278" y="327406"/>
-                    <a:pt x="1462278" y="731139"/>
-                  </a:cubicBezTo>
-                  <a:cubicBezTo>
-                    <a:pt x="1462278" y="1134872"/>
-                    <a:pt x="1134872" y="1462278"/>
-                    <a:pt x="731139" y="1462278"/>
-                  </a:cubicBezTo>
-                  <a:cubicBezTo>
-                    <a:pt x="327406" y="1462278"/>
-                    <a:pt x="0" y="1134999"/>
-                    <a:pt x="0" y="731139"/>
-                  </a:cubicBezTo>
-                  <a:close/>
-                </a:path>
-              </a:pathLst>
-            </a:custGeom>
-            <a:solidFill>
-              <a:srgbClr val="1C2B4A"/>
-            </a:solidFill>
-          </p:spPr>
-        </p:sp>
-      </p:grpSp>
-      <p:grpSp>
-        <p:nvGrpSpPr>
-          <p:cNvPr name="Group 12" id="12"/>
-          <p:cNvGrpSpPr/>
-          <p:nvPr/>
-        </p:nvGrpSpPr>
-        <p:grpSpPr>
-          <a:xfrm rot="0">
-            <a:off x="1497959" y="3006719"/>
-            <a:ext cx="570243" cy="570243"/>
-            <a:chOff x="0" y="0"/>
-            <a:chExt cx="760324" cy="760324"/>
-          </a:xfrm>
-        </p:grpSpPr>
-        <p:sp>
-          <p:nvSpPr>
-            <p:cNvPr name="Freeform 13" id="13" descr="/tmp/claude-1000/-media-hung-Work-Project-AI-Engineer-RL-contra-PPO/70c7dc7d-8f3f-4139-8f25-95b0e9e6dca5/scratchpad/build/icons/trophy.png"/>
-            <p:cNvSpPr/>
-            <p:nvPr/>
-          </p:nvSpPr>
-          <p:spPr>
-            <a:xfrm flipH="false" flipV="false" rot="0">
-              <a:off x="0" y="0"/>
-              <a:ext cx="760349" cy="760349"/>
-            </a:xfrm>
-            <a:custGeom>
-              <a:avLst/>
-              <a:gdLst/>
-              <a:ahLst/>
-              <a:cxnLst/>
-              <a:rect r="r" b="b" t="t" l="l"/>
-              <a:pathLst>
-                <a:path h="760349" w="760349">
+                <a:path h="456480" w="5211360">
                   <a:moveTo>
                     <a:pt x="0" y="0"/>
                   </a:moveTo>
                   <a:lnTo>
-                    <a:pt x="760349" y="0"/>
-                  </a:lnTo>
-                  <a:lnTo>
-                    <a:pt x="760349" y="760349"/>
-                  </a:lnTo>
-                  <a:lnTo>
-                    <a:pt x="0" y="760349"/>
-                  </a:lnTo>
-                  <a:lnTo>
-                    <a:pt x="0" y="0"/>
+                    <a:pt x="5211360" y="0"/>
+                  </a:lnTo>
+                  <a:lnTo>
+                    <a:pt x="5211360" y="456480"/>
+                  </a:lnTo>
+                  <a:lnTo>
+                    <a:pt x="0" y="456480"/>
                   </a:lnTo>
                   <a:close/>
                 </a:path>
               </a:pathLst>
             </a:custGeom>
             <a:blipFill>
-              <a:blip r:embed="rId4"/>
+              <a:blip r:embed="rId3">
+                <a:alphaModFix amt="0"/>
+              </a:blip>
               <a:stretch>
-                <a:fillRect l="0" t="0" r="3" b="3"/>
+                <a:fillRect l="0" t="-172449" r="0" b="-172448"/>
               </a:stretch>
             </a:blipFill>
           </p:spPr>
+        </p:sp>
+        <p:sp>
+          <p:nvSpPr>
+            <p:cNvPr name="TextBox 13" id="13"/>
+            <p:cNvSpPr txBox="true"/>
+            <p:nvPr/>
+          </p:nvSpPr>
+          <p:spPr>
+            <a:xfrm>
+              <a:off x="0" y="-38100"/>
+              <a:ext cx="5211356" cy="494576"/>
+            </a:xfrm>
+            <a:prstGeom prst="rect">
+              <a:avLst/>
+            </a:prstGeom>
+          </p:spPr>
+          <p:txBody>
+            <a:bodyPr anchor="ctr" rtlCol="false" tIns="0" lIns="0" bIns="0" rIns="0"/>
+            <a:lstStyle/>
+            <a:p>
+              <a:pPr algn="ctr">
+                <a:lnSpc>
+                  <a:spcPts val="1709"/>
+                </a:lnSpc>
+              </a:pPr>
+              <a:r>
+                <a:rPr lang="en-US" sz="1425" spc="-1">
+                  <a:solidFill>
+                    <a:srgbClr val="9AA6C1"/>
+                  </a:solidFill>
+                  <a:latin typeface="Calibri (MS)"/>
+                  <a:ea typeface="Calibri (MS)"/>
+                  <a:cs typeface="Calibri (MS)"/>
+                  <a:sym typeface="Calibri (MS)"/>
+                </a:rPr>
+                <a:t>~4M steps</a:t>
+              </a:r>
+            </a:p>
+          </p:txBody>
         </p:sp>
       </p:grpSp>
       <p:grpSp>
@@ -7743,10 +8167,10 @@
         </p:nvGrpSpPr>
         <p:grpSpPr>
           <a:xfrm rot="0">
-            <a:off x="2561779" y="3006719"/>
-            <a:ext cx="5485857" cy="595572"/>
+            <a:off x="9326880" y="11921576"/>
+            <a:ext cx="3908517" cy="342357"/>
             <a:chOff x="0" y="0"/>
-            <a:chExt cx="7314476" cy="794096"/>
+            <a:chExt cx="5211356" cy="456476"/>
           </a:xfrm>
         </p:grpSpPr>
         <p:sp>
@@ -7758,7 +8182,7 @@
           <p:spPr>
             <a:xfrm flipH="false" flipV="false" rot="0">
               <a:off x="0" y="0"/>
-              <a:ext cx="7314480" cy="794100"/>
+              <a:ext cx="5211360" cy="456480"/>
             </a:xfrm>
             <a:custGeom>
               <a:avLst/>
@@ -7767,18 +8191,18 @@
               <a:cxnLst/>
               <a:rect r="r" b="b" t="t" l="l"/>
               <a:pathLst>
-                <a:path h="794100" w="7314480">
+                <a:path h="456480" w="5211360">
                   <a:moveTo>
                     <a:pt x="0" y="0"/>
                   </a:moveTo>
                   <a:lnTo>
-                    <a:pt x="7314480" y="0"/>
-                  </a:lnTo>
-                  <a:lnTo>
-                    <a:pt x="7314480" y="794100"/>
-                  </a:lnTo>
-                  <a:lnTo>
-                    <a:pt x="0" y="794100"/>
+                    <a:pt x="5211360" y="0"/>
+                  </a:lnTo>
+                  <a:lnTo>
+                    <a:pt x="5211360" y="456480"/>
+                  </a:lnTo>
+                  <a:lnTo>
+                    <a:pt x="0" y="456480"/>
                   </a:lnTo>
                   <a:close/>
                 </a:path>
@@ -7789,7 +8213,7 @@
                 <a:alphaModFix amt="0"/>
               </a:blip>
               <a:stretch>
-                <a:fillRect l="0" t="-133463" r="0" b="-125491"/>
+                <a:fillRect l="0" t="-172449" r="0" b="-172448"/>
               </a:stretch>
             </a:blipFill>
           </p:spPr>
@@ -7802,8 +8226,8 @@
           </p:nvSpPr>
           <p:spPr>
             <a:xfrm>
-              <a:off x="0" y="-57150"/>
-              <a:ext cx="7314476" cy="851246"/>
+              <a:off x="0" y="-38100"/>
+              <a:ext cx="5211356" cy="494576"/>
             </a:xfrm>
             <a:prstGeom prst="rect">
               <a:avLst/>
@@ -7813,22 +8237,22 @@
             <a:bodyPr anchor="ctr" rtlCol="false" tIns="0" lIns="0" bIns="0" rIns="0"/>
             <a:lstStyle/>
             <a:p>
-              <a:pPr algn="l">
+              <a:pPr algn="ctr">
                 <a:lnSpc>
-                  <a:spcPts val="3599"/>
+                  <a:spcPts val="1709"/>
                 </a:lnSpc>
               </a:pPr>
               <a:r>
-                <a:rPr lang="en-US" b="true" sz="2999" spc="-1">
+                <a:rPr lang="en-US" sz="1425" spc="-1">
                   <a:solidFill>
-                    <a:srgbClr val="06D6A0"/>
+                    <a:srgbClr val="9AA6C1"/>
                   </a:solidFill>
-                  <a:latin typeface="Calibri (MS) Bold"/>
-                  <a:ea typeface="Calibri (MS) Bold"/>
-                  <a:cs typeface="Calibri (MS) Bold"/>
-                  <a:sym typeface="Calibri (MS) Bold"/>
+                  <a:latin typeface="Calibri (MS)"/>
+                  <a:ea typeface="Calibri (MS)"/>
+                  <a:cs typeface="Calibri (MS)"/>
+                  <a:sym typeface="Calibri (MS)"/>
                 </a:rPr>
-                <a:t>Achieved</a:t>
+                <a:t>Final best model</a:t>
               </a:r>
             </a:p>
           </p:txBody>
@@ -7842,1262 +8266,6 @@
         </p:nvGrpSpPr>
         <p:grpSpPr>
           <a:xfrm rot="0">
-            <a:off x="1234440" y="4841643"/>
-            <a:ext cx="123120" cy="123120"/>
-            <a:chOff x="0" y="0"/>
-            <a:chExt cx="164160" cy="164160"/>
-          </a:xfrm>
-        </p:grpSpPr>
-        <p:sp>
-          <p:nvSpPr>
-            <p:cNvPr name="Freeform 18" id="18"/>
-            <p:cNvSpPr/>
-            <p:nvPr/>
-          </p:nvSpPr>
-          <p:spPr>
-            <a:xfrm flipH="false" flipV="false" rot="0">
-              <a:off x="0" y="0"/>
-              <a:ext cx="164084" cy="164084"/>
-            </a:xfrm>
-            <a:custGeom>
-              <a:avLst/>
-              <a:gdLst/>
-              <a:ahLst/>
-              <a:cxnLst/>
-              <a:rect r="r" b="b" t="t" l="l"/>
-              <a:pathLst>
-                <a:path h="164084" w="164084">
-                  <a:moveTo>
-                    <a:pt x="0" y="82042"/>
-                  </a:moveTo>
-                  <a:cubicBezTo>
-                    <a:pt x="0" y="36703"/>
-                    <a:pt x="36703" y="0"/>
-                    <a:pt x="82042" y="0"/>
-                  </a:cubicBezTo>
-                  <a:cubicBezTo>
-                    <a:pt x="127381" y="0"/>
-                    <a:pt x="164084" y="36703"/>
-                    <a:pt x="164084" y="82042"/>
-                  </a:cubicBezTo>
-                  <a:cubicBezTo>
-                    <a:pt x="164084" y="127381"/>
-                    <a:pt x="127381" y="164084"/>
-                    <a:pt x="82042" y="164084"/>
-                  </a:cubicBezTo>
-                  <a:cubicBezTo>
-                    <a:pt x="36703" y="164084"/>
-                    <a:pt x="0" y="127381"/>
-                    <a:pt x="0" y="82042"/>
-                  </a:cubicBezTo>
-                  <a:close/>
-                </a:path>
-              </a:pathLst>
-            </a:custGeom>
-            <a:solidFill>
-              <a:srgbClr val="06D6A0"/>
-            </a:solidFill>
-          </p:spPr>
-        </p:sp>
-      </p:grpSp>
-      <p:sp>
-        <p:nvSpPr>
-          <p:cNvPr name="TextBox 19" id="19"/>
-          <p:cNvSpPr txBox="true"/>
-          <p:nvPr/>
-        </p:nvSpPr>
-        <p:spPr>
-          <a:xfrm rot="0">
-            <a:off x="1577340" y="4554693"/>
-            <a:ext cx="6926037" cy="842201"/>
-          </a:xfrm>
-          <a:prstGeom prst="rect">
-            <a:avLst/>
-          </a:prstGeom>
-        </p:spPr>
-        <p:txBody>
-          <a:bodyPr anchor="t" rtlCol="false" tIns="0" lIns="0" bIns="0" rIns="0">
-            <a:spAutoFit/>
-          </a:bodyPr>
-          <a:lstStyle/>
-          <a:p>
-            <a:pPr algn="l">
-              <a:lnSpc>
-                <a:spcPts val="3208"/>
-              </a:lnSpc>
-            </a:pPr>
-            <a:r>
-              <a:rPr lang="en-US" sz="2324" spc="-2">
-                <a:solidFill>
-                  <a:srgbClr val="E5E9F0"/>
-                </a:solidFill>
-                <a:latin typeface="Calibri (MS)"/>
-                <a:ea typeface="Calibri (MS)"/>
-                <a:cs typeface="Calibri (MS)"/>
-                <a:sym typeface="Calibri (MS)"/>
-              </a:rPr>
-              <a:t>Complete Gymnasium + SB3 pipeline: env, wrapper, train, eval, resume.</a:t>
-            </a:r>
-          </a:p>
-        </p:txBody>
-      </p:sp>
-      <p:grpSp>
-        <p:nvGrpSpPr>
-          <p:cNvPr name="Group 20" id="20"/>
-          <p:cNvGrpSpPr/>
-          <p:nvPr/>
-        </p:nvGrpSpPr>
-        <p:grpSpPr>
-          <a:xfrm rot="0">
-            <a:off x="1234440" y="5829310"/>
-            <a:ext cx="123120" cy="123120"/>
-            <a:chOff x="0" y="0"/>
-            <a:chExt cx="164160" cy="164160"/>
-          </a:xfrm>
-        </p:grpSpPr>
-        <p:sp>
-          <p:nvSpPr>
-            <p:cNvPr name="Freeform 21" id="21"/>
-            <p:cNvSpPr/>
-            <p:nvPr/>
-          </p:nvSpPr>
-          <p:spPr>
-            <a:xfrm flipH="false" flipV="false" rot="0">
-              <a:off x="0" y="0"/>
-              <a:ext cx="164084" cy="164084"/>
-            </a:xfrm>
-            <a:custGeom>
-              <a:avLst/>
-              <a:gdLst/>
-              <a:ahLst/>
-              <a:cxnLst/>
-              <a:rect r="r" b="b" t="t" l="l"/>
-              <a:pathLst>
-                <a:path h="164084" w="164084">
-                  <a:moveTo>
-                    <a:pt x="0" y="82042"/>
-                  </a:moveTo>
-                  <a:cubicBezTo>
-                    <a:pt x="0" y="36703"/>
-                    <a:pt x="36703" y="0"/>
-                    <a:pt x="82042" y="0"/>
-                  </a:cubicBezTo>
-                  <a:cubicBezTo>
-                    <a:pt x="127381" y="0"/>
-                    <a:pt x="164084" y="36703"/>
-                    <a:pt x="164084" y="82042"/>
-                  </a:cubicBezTo>
-                  <a:cubicBezTo>
-                    <a:pt x="164084" y="127381"/>
-                    <a:pt x="127381" y="164084"/>
-                    <a:pt x="82042" y="164084"/>
-                  </a:cubicBezTo>
-                  <a:cubicBezTo>
-                    <a:pt x="36703" y="164084"/>
-                    <a:pt x="0" y="127381"/>
-                    <a:pt x="0" y="82042"/>
-                  </a:cubicBezTo>
-                  <a:close/>
-                </a:path>
-              </a:pathLst>
-            </a:custGeom>
-            <a:solidFill>
-              <a:srgbClr val="06D6A0"/>
-            </a:solidFill>
-          </p:spPr>
-        </p:sp>
-      </p:grpSp>
-      <p:sp>
-        <p:nvSpPr>
-          <p:cNvPr name="TextBox 22" id="22"/>
-          <p:cNvSpPr txBox="true"/>
-          <p:nvPr/>
-        </p:nvSpPr>
-        <p:spPr>
-          <a:xfrm rot="0">
-            <a:off x="1577340" y="5542359"/>
-            <a:ext cx="6926037" cy="842201"/>
-          </a:xfrm>
-          <a:prstGeom prst="rect">
-            <a:avLst/>
-          </a:prstGeom>
-        </p:spPr>
-        <p:txBody>
-          <a:bodyPr anchor="t" rtlCol="false" tIns="0" lIns="0" bIns="0" rIns="0">
-            <a:spAutoFit/>
-          </a:bodyPr>
-          <a:lstStyle/>
-          <a:p>
-            <a:pPr algn="l">
-              <a:lnSpc>
-                <a:spcPts val="3208"/>
-              </a:lnSpc>
-            </a:pPr>
-            <a:r>
-              <a:rPr lang="en-US" sz="2324" spc="-2">
-                <a:solidFill>
-                  <a:srgbClr val="E5E9F0"/>
-                </a:solidFill>
-                <a:latin typeface="Calibri (MS)"/>
-                <a:ea typeface="Calibri (MS)"/>
-                <a:cs typeface="Calibri (MS)"/>
-                <a:sym typeface="Calibri (MS)"/>
-              </a:rPr>
-              <a:t>A multi-component reward function that effectively curbs backing up/standing still/farming score.</a:t>
-            </a:r>
-          </a:p>
-        </p:txBody>
-      </p:sp>
-      <p:grpSp>
-        <p:nvGrpSpPr>
-          <p:cNvPr name="Group 23" id="23"/>
-          <p:cNvGrpSpPr/>
-          <p:nvPr/>
-        </p:nvGrpSpPr>
-        <p:grpSpPr>
-          <a:xfrm rot="0">
-            <a:off x="1234440" y="6816966"/>
-            <a:ext cx="123120" cy="123120"/>
-            <a:chOff x="0" y="0"/>
-            <a:chExt cx="164160" cy="164160"/>
-          </a:xfrm>
-        </p:grpSpPr>
-        <p:sp>
-          <p:nvSpPr>
-            <p:cNvPr name="Freeform 24" id="24"/>
-            <p:cNvSpPr/>
-            <p:nvPr/>
-          </p:nvSpPr>
-          <p:spPr>
-            <a:xfrm flipH="false" flipV="false" rot="0">
-              <a:off x="0" y="0"/>
-              <a:ext cx="164084" cy="164084"/>
-            </a:xfrm>
-            <a:custGeom>
-              <a:avLst/>
-              <a:gdLst/>
-              <a:ahLst/>
-              <a:cxnLst/>
-              <a:rect r="r" b="b" t="t" l="l"/>
-              <a:pathLst>
-                <a:path h="164084" w="164084">
-                  <a:moveTo>
-                    <a:pt x="0" y="82042"/>
-                  </a:moveTo>
-                  <a:cubicBezTo>
-                    <a:pt x="0" y="36703"/>
-                    <a:pt x="36703" y="0"/>
-                    <a:pt x="82042" y="0"/>
-                  </a:cubicBezTo>
-                  <a:cubicBezTo>
-                    <a:pt x="127381" y="0"/>
-                    <a:pt x="164084" y="36703"/>
-                    <a:pt x="164084" y="82042"/>
-                  </a:cubicBezTo>
-                  <a:cubicBezTo>
-                    <a:pt x="164084" y="127381"/>
-                    <a:pt x="127381" y="164084"/>
-                    <a:pt x="82042" y="164084"/>
-                  </a:cubicBezTo>
-                  <a:cubicBezTo>
-                    <a:pt x="36703" y="164084"/>
-                    <a:pt x="0" y="127381"/>
-                    <a:pt x="0" y="82042"/>
-                  </a:cubicBezTo>
-                  <a:close/>
-                </a:path>
-              </a:pathLst>
-            </a:custGeom>
-            <a:solidFill>
-              <a:srgbClr val="06D6A0"/>
-            </a:solidFill>
-          </p:spPr>
-        </p:sp>
-      </p:grpSp>
-      <p:sp>
-        <p:nvSpPr>
-          <p:cNvPr name="TextBox 25" id="25"/>
-          <p:cNvSpPr txBox="true"/>
-          <p:nvPr/>
-        </p:nvSpPr>
-        <p:spPr>
-          <a:xfrm rot="0">
-            <a:off x="1577340" y="6529473"/>
-            <a:ext cx="6926037" cy="842201"/>
-          </a:xfrm>
-          <a:prstGeom prst="rect">
-            <a:avLst/>
-          </a:prstGeom>
-        </p:spPr>
-        <p:txBody>
-          <a:bodyPr anchor="t" rtlCol="false" tIns="0" lIns="0" bIns="0" rIns="0">
-            <a:spAutoFit/>
-          </a:bodyPr>
-          <a:lstStyle/>
-          <a:p>
-            <a:pPr algn="l">
-              <a:lnSpc>
-                <a:spcPts val="3208"/>
-              </a:lnSpc>
-            </a:pPr>
-            <a:r>
-              <a:rPr lang="en-US" sz="2324" spc="-2">
-                <a:solidFill>
-                  <a:srgbClr val="E5E9F0"/>
-                </a:solidFill>
-                <a:latin typeface="Calibri (MS)"/>
-                <a:ea typeface="Calibri (MS)"/>
-                <a:cs typeface="Calibri (MS)"/>
-                <a:sym typeface="Calibri (MS)"/>
-              </a:rPr>
-              <a:t>Robust-best evaluation picks a stable checkpoint instead of a lucky one.</a:t>
-            </a:r>
-          </a:p>
-        </p:txBody>
-      </p:sp>
-      <p:grpSp>
-        <p:nvGrpSpPr>
-          <p:cNvPr name="Group 26" id="26"/>
-          <p:cNvGrpSpPr/>
-          <p:nvPr/>
-        </p:nvGrpSpPr>
-        <p:grpSpPr>
-          <a:xfrm rot="0">
-            <a:off x="1234440" y="7804623"/>
-            <a:ext cx="123120" cy="123120"/>
-            <a:chOff x="0" y="0"/>
-            <a:chExt cx="164160" cy="164160"/>
-          </a:xfrm>
-        </p:grpSpPr>
-        <p:sp>
-          <p:nvSpPr>
-            <p:cNvPr name="Freeform 27" id="27"/>
-            <p:cNvSpPr/>
-            <p:nvPr/>
-          </p:nvSpPr>
-          <p:spPr>
-            <a:xfrm flipH="false" flipV="false" rot="0">
-              <a:off x="0" y="0"/>
-              <a:ext cx="164084" cy="164084"/>
-            </a:xfrm>
-            <a:custGeom>
-              <a:avLst/>
-              <a:gdLst/>
-              <a:ahLst/>
-              <a:cxnLst/>
-              <a:rect r="r" b="b" t="t" l="l"/>
-              <a:pathLst>
-                <a:path h="164084" w="164084">
-                  <a:moveTo>
-                    <a:pt x="0" y="82042"/>
-                  </a:moveTo>
-                  <a:cubicBezTo>
-                    <a:pt x="0" y="36703"/>
-                    <a:pt x="36703" y="0"/>
-                    <a:pt x="82042" y="0"/>
-                  </a:cubicBezTo>
-                  <a:cubicBezTo>
-                    <a:pt x="127381" y="0"/>
-                    <a:pt x="164084" y="36703"/>
-                    <a:pt x="164084" y="82042"/>
-                  </a:cubicBezTo>
-                  <a:cubicBezTo>
-                    <a:pt x="164084" y="127381"/>
-                    <a:pt x="127381" y="164084"/>
-                    <a:pt x="82042" y="164084"/>
-                  </a:cubicBezTo>
-                  <a:cubicBezTo>
-                    <a:pt x="36703" y="164084"/>
-                    <a:pt x="0" y="127381"/>
-                    <a:pt x="0" y="82042"/>
-                  </a:cubicBezTo>
-                  <a:close/>
-                </a:path>
-              </a:pathLst>
-            </a:custGeom>
-            <a:solidFill>
-              <a:srgbClr val="06D6A0"/>
-            </a:solidFill>
-          </p:spPr>
-        </p:sp>
-      </p:grpSp>
-      <p:sp>
-        <p:nvSpPr>
-          <p:cNvPr name="TextBox 28" id="28"/>
-          <p:cNvSpPr txBox="true"/>
-          <p:nvPr/>
-        </p:nvSpPr>
-        <p:spPr>
-          <a:xfrm rot="0">
-            <a:off x="1577340" y="7517140"/>
-            <a:ext cx="6926037" cy="842201"/>
-          </a:xfrm>
-          <a:prstGeom prst="rect">
-            <a:avLst/>
-          </a:prstGeom>
-        </p:spPr>
-        <p:txBody>
-          <a:bodyPr anchor="t" rtlCol="false" tIns="0" lIns="0" bIns="0" rIns="0">
-            <a:spAutoFit/>
-          </a:bodyPr>
-          <a:lstStyle/>
-          <a:p>
-            <a:pPr algn="l">
-              <a:lnSpc>
-                <a:spcPts val="3208"/>
-              </a:lnSpc>
-            </a:pPr>
-            <a:r>
-              <a:rPr lang="en-US" sz="2324" spc="-2">
-                <a:solidFill>
-                  <a:srgbClr val="E5E9F0"/>
-                </a:solidFill>
-                <a:latin typeface="Calibri (MS)"/>
-                <a:ea typeface="Calibri (MS)"/>
-                <a:cs typeface="Calibri (MS)"/>
-                <a:sym typeface="Calibri (MS)"/>
-              </a:rPr>
-              <a:t>The agent clearly improves over timesteps: ep_rew_mean rises from ~587 (0.5M) to ~933 (6.6M).</a:t>
-            </a:r>
-          </a:p>
-        </p:txBody>
-      </p:sp>
-      <p:grpSp>
-        <p:nvGrpSpPr>
-          <p:cNvPr name="Group 29" id="29"/>
-          <p:cNvGrpSpPr/>
-          <p:nvPr/>
-        </p:nvGrpSpPr>
-        <p:grpSpPr>
-          <a:xfrm rot="0">
-            <a:off x="9367923" y="2400300"/>
-            <a:ext cx="8091897" cy="6308817"/>
-            <a:chOff x="0" y="0"/>
-            <a:chExt cx="10789196" cy="8411756"/>
-          </a:xfrm>
-        </p:grpSpPr>
-        <p:sp>
-          <p:nvSpPr>
-            <p:cNvPr name="Freeform 30" id="30"/>
-            <p:cNvSpPr/>
-            <p:nvPr/>
-          </p:nvSpPr>
-          <p:spPr>
-            <a:xfrm flipH="false" flipV="false" rot="0">
-              <a:off x="0" y="0"/>
-              <a:ext cx="10789286" cy="8411845"/>
-            </a:xfrm>
-            <a:custGeom>
-              <a:avLst/>
-              <a:gdLst/>
-              <a:ahLst/>
-              <a:cxnLst/>
-              <a:rect r="r" b="b" t="t" l="l"/>
-              <a:pathLst>
-                <a:path h="8411845" w="10789286">
-                  <a:moveTo>
-                    <a:pt x="0" y="146304"/>
-                  </a:moveTo>
-                  <a:cubicBezTo>
-                    <a:pt x="0" y="65532"/>
-                    <a:pt x="65532" y="0"/>
-                    <a:pt x="146304" y="0"/>
-                  </a:cubicBezTo>
-                  <a:lnTo>
-                    <a:pt x="10642981" y="0"/>
-                  </a:lnTo>
-                  <a:cubicBezTo>
-                    <a:pt x="10723753" y="0"/>
-                    <a:pt x="10789286" y="65532"/>
-                    <a:pt x="10789286" y="146304"/>
-                  </a:cubicBezTo>
-                  <a:lnTo>
-                    <a:pt x="10789286" y="8265541"/>
-                  </a:lnTo>
-                  <a:cubicBezTo>
-                    <a:pt x="10789286" y="8346313"/>
-                    <a:pt x="10723753" y="8411845"/>
-                    <a:pt x="10642981" y="8411845"/>
-                  </a:cubicBezTo>
-                  <a:lnTo>
-                    <a:pt x="146304" y="8411845"/>
-                  </a:lnTo>
-                  <a:cubicBezTo>
-                    <a:pt x="65532" y="8411718"/>
-                    <a:pt x="0" y="8346313"/>
-                    <a:pt x="0" y="8265541"/>
-                  </a:cubicBezTo>
-                  <a:close/>
-                </a:path>
-              </a:pathLst>
-            </a:custGeom>
-            <a:solidFill>
-              <a:srgbClr val="16213E"/>
-            </a:solidFill>
-          </p:spPr>
-        </p:sp>
-      </p:grpSp>
-      <p:grpSp>
-        <p:nvGrpSpPr>
-          <p:cNvPr name="Group 31" id="31"/>
-          <p:cNvGrpSpPr/>
-          <p:nvPr/>
-        </p:nvGrpSpPr>
-        <p:grpSpPr>
-          <a:xfrm rot="0">
-            <a:off x="9779403" y="2743200"/>
-            <a:ext cx="1096737" cy="1096737"/>
-            <a:chOff x="0" y="0"/>
-            <a:chExt cx="1462316" cy="1462316"/>
-          </a:xfrm>
-        </p:grpSpPr>
-        <p:sp>
-          <p:nvSpPr>
-            <p:cNvPr name="Freeform 32" id="32"/>
-            <p:cNvSpPr/>
-            <p:nvPr/>
-          </p:nvSpPr>
-          <p:spPr>
-            <a:xfrm flipH="false" flipV="false" rot="0">
-              <a:off x="0" y="0"/>
-              <a:ext cx="1462278" cy="1462278"/>
-            </a:xfrm>
-            <a:custGeom>
-              <a:avLst/>
-              <a:gdLst/>
-              <a:ahLst/>
-              <a:cxnLst/>
-              <a:rect r="r" b="b" t="t" l="l"/>
-              <a:pathLst>
-                <a:path h="1462278" w="1462278">
-                  <a:moveTo>
-                    <a:pt x="0" y="731139"/>
-                  </a:moveTo>
-                  <a:cubicBezTo>
-                    <a:pt x="0" y="327406"/>
-                    <a:pt x="327406" y="0"/>
-                    <a:pt x="731139" y="0"/>
-                  </a:cubicBezTo>
-                  <a:cubicBezTo>
-                    <a:pt x="1134872" y="0"/>
-                    <a:pt x="1462278" y="327406"/>
-                    <a:pt x="1462278" y="731139"/>
-                  </a:cubicBezTo>
-                  <a:cubicBezTo>
-                    <a:pt x="1462278" y="1134872"/>
-                    <a:pt x="1134872" y="1462278"/>
-                    <a:pt x="731139" y="1462278"/>
-                  </a:cubicBezTo>
-                  <a:cubicBezTo>
-                    <a:pt x="327406" y="1462278"/>
-                    <a:pt x="0" y="1134999"/>
-                    <a:pt x="0" y="731139"/>
-                  </a:cubicBezTo>
-                  <a:close/>
-                </a:path>
-              </a:pathLst>
-            </a:custGeom>
-            <a:solidFill>
-              <a:srgbClr val="1C2B4A"/>
-            </a:solidFill>
-          </p:spPr>
-        </p:sp>
-      </p:grpSp>
-      <p:grpSp>
-        <p:nvGrpSpPr>
-          <p:cNvPr name="Group 33" id="33"/>
-          <p:cNvGrpSpPr/>
-          <p:nvPr/>
-        </p:nvGrpSpPr>
-        <p:grpSpPr>
-          <a:xfrm rot="0">
-            <a:off x="10042922" y="3006719"/>
-            <a:ext cx="570243" cy="570243"/>
-            <a:chOff x="0" y="0"/>
-            <a:chExt cx="760324" cy="760324"/>
-          </a:xfrm>
-        </p:grpSpPr>
-        <p:sp>
-          <p:nvSpPr>
-            <p:cNvPr name="Freeform 34" id="34" descr="/tmp/claude-1000/-media-hung-Work-Project-AI-Engineer-RL-contra-PPO/70c7dc7d-8f3f-4139-8f25-95b0e9e6dca5/scratchpad/build/icons/lightbulb.png"/>
-            <p:cNvSpPr/>
-            <p:nvPr/>
-          </p:nvSpPr>
-          <p:spPr>
-            <a:xfrm flipH="false" flipV="false" rot="0">
-              <a:off x="0" y="0"/>
-              <a:ext cx="760349" cy="760349"/>
-            </a:xfrm>
-            <a:custGeom>
-              <a:avLst/>
-              <a:gdLst/>
-              <a:ahLst/>
-              <a:cxnLst/>
-              <a:rect r="r" b="b" t="t" l="l"/>
-              <a:pathLst>
-                <a:path h="760349" w="760349">
-                  <a:moveTo>
-                    <a:pt x="0" y="0"/>
-                  </a:moveTo>
-                  <a:lnTo>
-                    <a:pt x="760349" y="0"/>
-                  </a:lnTo>
-                  <a:lnTo>
-                    <a:pt x="760349" y="760349"/>
-                  </a:lnTo>
-                  <a:lnTo>
-                    <a:pt x="0" y="760349"/>
-                  </a:lnTo>
-                  <a:lnTo>
-                    <a:pt x="0" y="0"/>
-                  </a:lnTo>
-                  <a:close/>
-                </a:path>
-              </a:pathLst>
-            </a:custGeom>
-            <a:blipFill>
-              <a:blip r:embed="rId5"/>
-              <a:stretch>
-                <a:fillRect l="0" t="0" r="3" b="3"/>
-              </a:stretch>
-            </a:blipFill>
-          </p:spPr>
-        </p:sp>
-      </p:grpSp>
-      <p:grpSp>
-        <p:nvGrpSpPr>
-          <p:cNvPr name="Group 35" id="35"/>
-          <p:cNvGrpSpPr/>
-          <p:nvPr/>
-        </p:nvGrpSpPr>
-        <p:grpSpPr>
-          <a:xfrm rot="0">
-            <a:off x="11104740" y="3006719"/>
-            <a:ext cx="5485857" cy="595572"/>
-            <a:chOff x="0" y="0"/>
-            <a:chExt cx="7314476" cy="794096"/>
-          </a:xfrm>
-        </p:grpSpPr>
-        <p:sp>
-          <p:nvSpPr>
-            <p:cNvPr name="Freeform 36" id="36"/>
-            <p:cNvSpPr/>
-            <p:nvPr/>
-          </p:nvSpPr>
-          <p:spPr>
-            <a:xfrm flipH="false" flipV="false" rot="0">
-              <a:off x="0" y="0"/>
-              <a:ext cx="7314480" cy="794100"/>
-            </a:xfrm>
-            <a:custGeom>
-              <a:avLst/>
-              <a:gdLst/>
-              <a:ahLst/>
-              <a:cxnLst/>
-              <a:rect r="r" b="b" t="t" l="l"/>
-              <a:pathLst>
-                <a:path h="794100" w="7314480">
-                  <a:moveTo>
-                    <a:pt x="0" y="0"/>
-                  </a:moveTo>
-                  <a:lnTo>
-                    <a:pt x="7314480" y="0"/>
-                  </a:lnTo>
-                  <a:lnTo>
-                    <a:pt x="7314480" y="794100"/>
-                  </a:lnTo>
-                  <a:lnTo>
-                    <a:pt x="0" y="794100"/>
-                  </a:lnTo>
-                  <a:close/>
-                </a:path>
-              </a:pathLst>
-            </a:custGeom>
-            <a:blipFill>
-              <a:blip r:embed="rId3">
-                <a:alphaModFix amt="0"/>
-              </a:blip>
-              <a:stretch>
-                <a:fillRect l="0" t="-133463" r="0" b="-125491"/>
-              </a:stretch>
-            </a:blipFill>
-          </p:spPr>
-        </p:sp>
-        <p:sp>
-          <p:nvSpPr>
-            <p:cNvPr name="TextBox 37" id="37"/>
-            <p:cNvSpPr txBox="true"/>
-            <p:nvPr/>
-          </p:nvSpPr>
-          <p:spPr>
-            <a:xfrm>
-              <a:off x="0" y="-57150"/>
-              <a:ext cx="7314476" cy="851246"/>
-            </a:xfrm>
-            <a:prstGeom prst="rect">
-              <a:avLst/>
-            </a:prstGeom>
-          </p:spPr>
-          <p:txBody>
-            <a:bodyPr anchor="ctr" rtlCol="false" tIns="0" lIns="0" bIns="0" rIns="0"/>
-            <a:lstStyle/>
-            <a:p>
-              <a:pPr algn="l">
-                <a:lnSpc>
-                  <a:spcPts val="3599"/>
-                </a:lnSpc>
-              </a:pPr>
-              <a:r>
-                <a:rPr lang="en-US" b="true" sz="2999" spc="-1">
-                  <a:solidFill>
-                    <a:srgbClr val="FFB703"/>
-                  </a:solidFill>
-                  <a:latin typeface="Calibri (MS) Bold"/>
-                  <a:ea typeface="Calibri (MS) Bold"/>
-                  <a:cs typeface="Calibri (MS) Bold"/>
-                  <a:sym typeface="Calibri (MS) Bold"/>
-                </a:rPr>
-                <a:t>Directions for improvement</a:t>
-              </a:r>
-            </a:p>
-          </p:txBody>
-        </p:sp>
-      </p:grpSp>
-      <p:grpSp>
-        <p:nvGrpSpPr>
-          <p:cNvPr name="Group 38" id="38"/>
-          <p:cNvGrpSpPr/>
-          <p:nvPr/>
-        </p:nvGrpSpPr>
-        <p:grpSpPr>
-          <a:xfrm rot="0">
-            <a:off x="9779403" y="4838338"/>
-            <a:ext cx="123120" cy="123120"/>
-            <a:chOff x="0" y="0"/>
-            <a:chExt cx="164160" cy="164160"/>
-          </a:xfrm>
-        </p:grpSpPr>
-        <p:sp>
-          <p:nvSpPr>
-            <p:cNvPr name="Freeform 39" id="39"/>
-            <p:cNvSpPr/>
-            <p:nvPr/>
-          </p:nvSpPr>
-          <p:spPr>
-            <a:xfrm flipH="false" flipV="false" rot="0">
-              <a:off x="0" y="0"/>
-              <a:ext cx="164084" cy="164084"/>
-            </a:xfrm>
-            <a:custGeom>
-              <a:avLst/>
-              <a:gdLst/>
-              <a:ahLst/>
-              <a:cxnLst/>
-              <a:rect r="r" b="b" t="t" l="l"/>
-              <a:pathLst>
-                <a:path h="164084" w="164084">
-                  <a:moveTo>
-                    <a:pt x="0" y="82042"/>
-                  </a:moveTo>
-                  <a:cubicBezTo>
-                    <a:pt x="0" y="36703"/>
-                    <a:pt x="36703" y="0"/>
-                    <a:pt x="82042" y="0"/>
-                  </a:cubicBezTo>
-                  <a:cubicBezTo>
-                    <a:pt x="127381" y="0"/>
-                    <a:pt x="164084" y="36703"/>
-                    <a:pt x="164084" y="82042"/>
-                  </a:cubicBezTo>
-                  <a:cubicBezTo>
-                    <a:pt x="164084" y="127381"/>
-                    <a:pt x="127381" y="164084"/>
-                    <a:pt x="82042" y="164084"/>
-                  </a:cubicBezTo>
-                  <a:cubicBezTo>
-                    <a:pt x="36703" y="164084"/>
-                    <a:pt x="0" y="127381"/>
-                    <a:pt x="0" y="82042"/>
-                  </a:cubicBezTo>
-                  <a:close/>
-                </a:path>
-              </a:pathLst>
-            </a:custGeom>
-            <a:solidFill>
-              <a:srgbClr val="FFB703"/>
-            </a:solidFill>
-          </p:spPr>
-        </p:sp>
-      </p:grpSp>
-      <p:sp>
-        <p:nvSpPr>
-          <p:cNvPr name="TextBox 40" id="40"/>
-          <p:cNvSpPr txBox="true"/>
-          <p:nvPr/>
-        </p:nvSpPr>
-        <p:spPr>
-          <a:xfrm rot="0">
-            <a:off x="10122303" y="4354668"/>
-            <a:ext cx="6926037" cy="1242251"/>
-          </a:xfrm>
-          <a:prstGeom prst="rect">
-            <a:avLst/>
-          </a:prstGeom>
-        </p:spPr>
-        <p:txBody>
-          <a:bodyPr anchor="t" rtlCol="false" tIns="0" lIns="0" bIns="0" rIns="0">
-            <a:spAutoFit/>
-          </a:bodyPr>
-          <a:lstStyle/>
-          <a:p>
-            <a:pPr algn="l">
-              <a:lnSpc>
-                <a:spcPts val="3208"/>
-              </a:lnSpc>
-            </a:pPr>
-            <a:r>
-              <a:rPr lang="en-US" sz="2324" spc="-2">
-                <a:solidFill>
-                  <a:srgbClr val="E5E9F0"/>
-                </a:solidFill>
-                <a:latin typeface="Calibri (MS)"/>
-                <a:ea typeface="Calibri (MS)"/>
-                <a:cs typeface="Calibri (MS)"/>
-                <a:sym typeface="Calibri (MS)"/>
-              </a:rPr>
-              <a:t>Reward tuning: rebalance the progress/score/stagnation weights to reduce ep_rew_mean fluctuation around the 5–6M mark.</a:t>
-            </a:r>
-          </a:p>
-        </p:txBody>
-      </p:sp>
-      <p:grpSp>
-        <p:nvGrpSpPr>
-          <p:cNvPr name="Group 41" id="41"/>
-          <p:cNvGrpSpPr/>
-          <p:nvPr/>
-        </p:nvGrpSpPr>
-        <p:grpSpPr>
-          <a:xfrm rot="0">
-            <a:off x="9779403" y="5908624"/>
-            <a:ext cx="123120" cy="123120"/>
-            <a:chOff x="0" y="0"/>
-            <a:chExt cx="164160" cy="164160"/>
-          </a:xfrm>
-        </p:grpSpPr>
-        <p:sp>
-          <p:nvSpPr>
-            <p:cNvPr name="Freeform 42" id="42"/>
-            <p:cNvSpPr/>
-            <p:nvPr/>
-          </p:nvSpPr>
-          <p:spPr>
-            <a:xfrm flipH="false" flipV="false" rot="0">
-              <a:off x="0" y="0"/>
-              <a:ext cx="164084" cy="164084"/>
-            </a:xfrm>
-            <a:custGeom>
-              <a:avLst/>
-              <a:gdLst/>
-              <a:ahLst/>
-              <a:cxnLst/>
-              <a:rect r="r" b="b" t="t" l="l"/>
-              <a:pathLst>
-                <a:path h="164084" w="164084">
-                  <a:moveTo>
-                    <a:pt x="0" y="82042"/>
-                  </a:moveTo>
-                  <a:cubicBezTo>
-                    <a:pt x="0" y="36703"/>
-                    <a:pt x="36703" y="0"/>
-                    <a:pt x="82042" y="0"/>
-                  </a:cubicBezTo>
-                  <a:cubicBezTo>
-                    <a:pt x="127381" y="0"/>
-                    <a:pt x="164084" y="36703"/>
-                    <a:pt x="164084" y="82042"/>
-                  </a:cubicBezTo>
-                  <a:cubicBezTo>
-                    <a:pt x="164084" y="127381"/>
-                    <a:pt x="127381" y="164084"/>
-                    <a:pt x="82042" y="164084"/>
-                  </a:cubicBezTo>
-                  <a:cubicBezTo>
-                    <a:pt x="36703" y="164084"/>
-                    <a:pt x="0" y="127381"/>
-                    <a:pt x="0" y="82042"/>
-                  </a:cubicBezTo>
-                  <a:close/>
-                </a:path>
-              </a:pathLst>
-            </a:custGeom>
-            <a:solidFill>
-              <a:srgbClr val="FFB703"/>
-            </a:solidFill>
-          </p:spPr>
-        </p:sp>
-      </p:grpSp>
-      <p:sp>
-        <p:nvSpPr>
-          <p:cNvPr name="TextBox 43" id="43"/>
-          <p:cNvSpPr txBox="true"/>
-          <p:nvPr/>
-        </p:nvSpPr>
-        <p:spPr>
-          <a:xfrm rot="0">
-            <a:off x="10121598" y="5734060"/>
-            <a:ext cx="6926037" cy="842201"/>
-          </a:xfrm>
-          <a:prstGeom prst="rect">
-            <a:avLst/>
-          </a:prstGeom>
-        </p:spPr>
-        <p:txBody>
-          <a:bodyPr anchor="t" rtlCol="false" tIns="0" lIns="0" bIns="0" rIns="0">
-            <a:spAutoFit/>
-          </a:bodyPr>
-          <a:lstStyle/>
-          <a:p>
-            <a:pPr algn="l">
-              <a:lnSpc>
-                <a:spcPts val="3208"/>
-              </a:lnSpc>
-            </a:pPr>
-            <a:r>
-              <a:rPr lang="en-US" sz="2324" spc="-2">
-                <a:solidFill>
-                  <a:srgbClr val="E5E9F0"/>
-                </a:solidFill>
-                <a:latin typeface="Calibri (MS)"/>
-                <a:ea typeface="Calibri (MS)"/>
-                <a:cs typeface="Calibri (MS)"/>
-                <a:sym typeface="Calibri (MS)"/>
-              </a:rPr>
-              <a:t>Longer training / more seeds to assess stability beyond Stage 1.</a:t>
-            </a:r>
-          </a:p>
-        </p:txBody>
-      </p:sp>
-      <p:grpSp>
-        <p:nvGrpSpPr>
-          <p:cNvPr name="Group 44" id="44"/>
-          <p:cNvGrpSpPr/>
-          <p:nvPr/>
-        </p:nvGrpSpPr>
-        <p:grpSpPr>
-          <a:xfrm rot="0">
-            <a:off x="9779403" y="6978358"/>
-            <a:ext cx="123120" cy="123120"/>
-            <a:chOff x="0" y="0"/>
-            <a:chExt cx="164160" cy="164160"/>
-          </a:xfrm>
-        </p:grpSpPr>
-        <p:sp>
-          <p:nvSpPr>
-            <p:cNvPr name="Freeform 45" id="45"/>
-            <p:cNvSpPr/>
-            <p:nvPr/>
-          </p:nvSpPr>
-          <p:spPr>
-            <a:xfrm flipH="false" flipV="false" rot="0">
-              <a:off x="0" y="0"/>
-              <a:ext cx="164084" cy="164084"/>
-            </a:xfrm>
-            <a:custGeom>
-              <a:avLst/>
-              <a:gdLst/>
-              <a:ahLst/>
-              <a:cxnLst/>
-              <a:rect r="r" b="b" t="t" l="l"/>
-              <a:pathLst>
-                <a:path h="164084" w="164084">
-                  <a:moveTo>
-                    <a:pt x="0" y="82042"/>
-                  </a:moveTo>
-                  <a:cubicBezTo>
-                    <a:pt x="0" y="36703"/>
-                    <a:pt x="36703" y="0"/>
-                    <a:pt x="82042" y="0"/>
-                  </a:cubicBezTo>
-                  <a:cubicBezTo>
-                    <a:pt x="127381" y="0"/>
-                    <a:pt x="164084" y="36703"/>
-                    <a:pt x="164084" y="82042"/>
-                  </a:cubicBezTo>
-                  <a:cubicBezTo>
-                    <a:pt x="164084" y="127381"/>
-                    <a:pt x="127381" y="164084"/>
-                    <a:pt x="82042" y="164084"/>
-                  </a:cubicBezTo>
-                  <a:cubicBezTo>
-                    <a:pt x="36703" y="164084"/>
-                    <a:pt x="0" y="127381"/>
-                    <a:pt x="0" y="82042"/>
-                  </a:cubicBezTo>
-                  <a:close/>
-                </a:path>
-              </a:pathLst>
-            </a:custGeom>
-            <a:solidFill>
-              <a:srgbClr val="FFB703"/>
-            </a:solidFill>
-          </p:spPr>
-        </p:sp>
-      </p:grpSp>
-      <p:sp>
-        <p:nvSpPr>
-          <p:cNvPr name="TextBox 46" id="46"/>
-          <p:cNvSpPr txBox="true"/>
-          <p:nvPr/>
-        </p:nvSpPr>
-        <p:spPr>
-          <a:xfrm rot="0">
-            <a:off x="10122303" y="6832777"/>
-            <a:ext cx="6926037" cy="442151"/>
-          </a:xfrm>
-          <a:prstGeom prst="rect">
-            <a:avLst/>
-          </a:prstGeom>
-        </p:spPr>
-        <p:txBody>
-          <a:bodyPr anchor="t" rtlCol="false" tIns="0" lIns="0" bIns="0" rIns="0">
-            <a:spAutoFit/>
-          </a:bodyPr>
-          <a:lstStyle/>
-          <a:p>
-            <a:pPr algn="l">
-              <a:lnSpc>
-                <a:spcPts val="3208"/>
-              </a:lnSpc>
-            </a:pPr>
-            <a:r>
-              <a:rPr lang="en-US" sz="2324" spc="-2">
-                <a:solidFill>
-                  <a:srgbClr val="E5E9F0"/>
-                </a:solidFill>
-                <a:latin typeface="Calibri (MS)"/>
-                <a:ea typeface="Calibri (MS)"/>
-                <a:cs typeface="Calibri (MS)"/>
-                <a:sym typeface="Calibri (MS)"/>
-              </a:rPr>
-              <a:t>Extend to later stages instead of just the Stage 1 boss.</a:t>
-            </a:r>
-          </a:p>
-        </p:txBody>
-      </p:sp>
-      <p:grpSp>
-        <p:nvGrpSpPr>
-          <p:cNvPr name="Group 47" id="47"/>
-          <p:cNvGrpSpPr/>
-          <p:nvPr/>
-        </p:nvGrpSpPr>
-        <p:grpSpPr>
-          <a:xfrm rot="0">
-            <a:off x="9779403" y="8048101"/>
-            <a:ext cx="123120" cy="123120"/>
-            <a:chOff x="0" y="0"/>
-            <a:chExt cx="164160" cy="164160"/>
-          </a:xfrm>
-        </p:grpSpPr>
-        <p:sp>
-          <p:nvSpPr>
-            <p:cNvPr name="Freeform 48" id="48"/>
-            <p:cNvSpPr/>
-            <p:nvPr/>
-          </p:nvSpPr>
-          <p:spPr>
-            <a:xfrm flipH="false" flipV="false" rot="0">
-              <a:off x="0" y="0"/>
-              <a:ext cx="164084" cy="164084"/>
-            </a:xfrm>
-            <a:custGeom>
-              <a:avLst/>
-              <a:gdLst/>
-              <a:ahLst/>
-              <a:cxnLst/>
-              <a:rect r="r" b="b" t="t" l="l"/>
-              <a:pathLst>
-                <a:path h="164084" w="164084">
-                  <a:moveTo>
-                    <a:pt x="0" y="82042"/>
-                  </a:moveTo>
-                  <a:cubicBezTo>
-                    <a:pt x="0" y="36703"/>
-                    <a:pt x="36703" y="0"/>
-                    <a:pt x="82042" y="0"/>
-                  </a:cubicBezTo>
-                  <a:cubicBezTo>
-                    <a:pt x="127381" y="0"/>
-                    <a:pt x="164084" y="36703"/>
-                    <a:pt x="164084" y="82042"/>
-                  </a:cubicBezTo>
-                  <a:cubicBezTo>
-                    <a:pt x="164084" y="127381"/>
-                    <a:pt x="127381" y="164084"/>
-                    <a:pt x="82042" y="164084"/>
-                  </a:cubicBezTo>
-                  <a:cubicBezTo>
-                    <a:pt x="36703" y="164084"/>
-                    <a:pt x="0" y="127381"/>
-                    <a:pt x="0" y="82042"/>
-                  </a:cubicBezTo>
-                  <a:close/>
-                </a:path>
-              </a:pathLst>
-            </a:custGeom>
-            <a:solidFill>
-              <a:srgbClr val="FFB703"/>
-            </a:solidFill>
-          </p:spPr>
-        </p:sp>
-      </p:grpSp>
-      <p:sp>
-        <p:nvSpPr>
-          <p:cNvPr name="TextBox 49" id="49"/>
-          <p:cNvSpPr txBox="true"/>
-          <p:nvPr/>
-        </p:nvSpPr>
-        <p:spPr>
-          <a:xfrm rot="0">
-            <a:off x="10122303" y="7760608"/>
-            <a:ext cx="6926037" cy="842201"/>
-          </a:xfrm>
-          <a:prstGeom prst="rect">
-            <a:avLst/>
-          </a:prstGeom>
-        </p:spPr>
-        <p:txBody>
-          <a:bodyPr anchor="t" rtlCol="false" tIns="0" lIns="0" bIns="0" rIns="0">
-            <a:spAutoFit/>
-          </a:bodyPr>
-          <a:lstStyle/>
-          <a:p>
-            <a:pPr algn="l">
-              <a:lnSpc>
-                <a:spcPts val="3208"/>
-              </a:lnSpc>
-            </a:pPr>
-            <a:r>
-              <a:rPr lang="en-US" sz="2324" spc="-2">
-                <a:solidFill>
-                  <a:srgbClr val="E5E9F0"/>
-                </a:solidFill>
-                <a:latin typeface="Calibri (MS)"/>
-                <a:ea typeface="Calibri (MS)"/>
-                <a:cs typeface="Calibri (MS)"/>
-                <a:sym typeface="Calibri (MS)"/>
-              </a:rPr>
-              <a:t>Try other policy architectures (larger frame-stack, recurrent policy) for situations that need longer memory.</a:t>
-            </a:r>
-          </a:p>
-        </p:txBody>
-      </p:sp>
-      <p:grpSp>
-        <p:nvGrpSpPr>
-          <p:cNvPr name="Group 50" id="50"/>
-          <p:cNvGrpSpPr/>
-          <p:nvPr/>
-        </p:nvGrpSpPr>
-        <p:grpSpPr>
-          <a:xfrm rot="0">
-            <a:off x="685800" y="9710823"/>
-            <a:ext cx="4114257" cy="410937"/>
-            <a:chOff x="0" y="0"/>
-            <a:chExt cx="5485676" cy="547916"/>
-          </a:xfrm>
-        </p:grpSpPr>
-        <p:sp>
-          <p:nvSpPr>
-            <p:cNvPr name="Freeform 51" id="51"/>
-            <p:cNvSpPr/>
-            <p:nvPr/>
-          </p:nvSpPr>
-          <p:spPr>
-            <a:xfrm flipH="false" flipV="false" rot="0">
-              <a:off x="0" y="0"/>
-              <a:ext cx="5485680" cy="547920"/>
-            </a:xfrm>
-            <a:custGeom>
-              <a:avLst/>
-              <a:gdLst/>
-              <a:ahLst/>
-              <a:cxnLst/>
-              <a:rect r="r" b="b" t="t" l="l"/>
-              <a:pathLst>
-                <a:path h="547920" w="5485680">
-                  <a:moveTo>
-                    <a:pt x="0" y="0"/>
-                  </a:moveTo>
-                  <a:lnTo>
-                    <a:pt x="5485680" y="0"/>
-                  </a:lnTo>
-                  <a:lnTo>
-                    <a:pt x="5485680" y="547920"/>
-                  </a:lnTo>
-                  <a:lnTo>
-                    <a:pt x="0" y="547920"/>
-                  </a:lnTo>
-                  <a:close/>
-                </a:path>
-              </a:pathLst>
-            </a:custGeom>
-            <a:blipFill>
-              <a:blip r:embed="rId3">
-                <a:alphaModFix amt="0"/>
-              </a:blip>
-              <a:stretch>
-                <a:fillRect l="0" t="-145081" r="0" b="-145080"/>
-              </a:stretch>
-            </a:blipFill>
-          </p:spPr>
-        </p:sp>
-        <p:sp>
-          <p:nvSpPr>
-            <p:cNvPr name="TextBox 52" id="52"/>
-            <p:cNvSpPr txBox="true"/>
-            <p:nvPr/>
-          </p:nvSpPr>
-          <p:spPr>
-            <a:xfrm>
-              <a:off x="0" y="-38100"/>
-              <a:ext cx="5485676" cy="586016"/>
-            </a:xfrm>
-            <a:prstGeom prst="rect">
-              <a:avLst/>
-            </a:prstGeom>
-          </p:spPr>
-          <p:txBody>
-            <a:bodyPr anchor="ctr" rtlCol="false" tIns="0" lIns="0" bIns="0" rIns="0"/>
-            <a:lstStyle/>
-            <a:p>
-              <a:pPr algn="l">
-                <a:lnSpc>
-                  <a:spcPts val="1800"/>
-                </a:lnSpc>
-              </a:pPr>
-              <a:r>
-                <a:rPr lang="en-US" sz="1500" spc="-1">
-                  <a:solidFill>
-                    <a:srgbClr val="9AA6C1"/>
-                  </a:solidFill>
-                  <a:latin typeface="Calibri (MS)"/>
-                  <a:ea typeface="Calibri (MS)"/>
-                  <a:cs typeface="Calibri (MS)"/>
-                  <a:sym typeface="Calibri (MS)"/>
-                </a:rPr>
-                <a:t>Contra-PPO</a:t>
-              </a:r>
-            </a:p>
-          </p:txBody>
-        </p:sp>
-      </p:grpSp>
-      <p:grpSp>
-        <p:nvGrpSpPr>
-          <p:cNvPr name="Group 53" id="53"/>
-          <p:cNvGrpSpPr/>
-          <p:nvPr/>
-        </p:nvGrpSpPr>
-        <p:grpSpPr>
-          <a:xfrm rot="0">
             <a:off x="16911723" y="9710823"/>
             <a:ext cx="822417" cy="410937"/>
             <a:chOff x="0" y="0"/>
@@ -9106,7 +8274,7 @@
         </p:grpSpPr>
         <p:sp>
           <p:nvSpPr>
-            <p:cNvPr name="Freeform 54" id="54"/>
+            <p:cNvPr name="Freeform 18" id="18"/>
             <p:cNvSpPr/>
             <p:nvPr/>
           </p:nvSpPr>
@@ -9151,7 +8319,7 @@
         </p:sp>
         <p:sp>
           <p:nvSpPr>
-            <p:cNvPr name="TextBox 55" id="55"/>
+            <p:cNvPr name="TextBox 19" id="19"/>
             <p:cNvSpPr txBox="true"/>
             <p:nvPr/>
           </p:nvSpPr>
@@ -9183,7 +8351,587 @@
                   <a:cs typeface="Calibri (MS)"/>
                   <a:sym typeface="Calibri (MS)"/>
                 </a:rPr>
-                <a:t>10</a:t>
+                <a:t>9</a:t>
+              </a:r>
+            </a:p>
+          </p:txBody>
+        </p:sp>
+      </p:grpSp>
+      <p:sp>
+        <p:nvSpPr>
+          <p:cNvPr name="Freeform 20" id="20"/>
+          <p:cNvSpPr/>
+          <p:nvPr/>
+        </p:nvSpPr>
+        <p:spPr>
+          <a:xfrm flipH="false" flipV="false" rot="0">
+            <a:off x="0" y="4774946"/>
+            <a:ext cx="4282277" cy="3996214"/>
+          </a:xfrm>
+          <a:custGeom>
+            <a:avLst/>
+            <a:gdLst/>
+            <a:ahLst/>
+            <a:cxnLst/>
+            <a:rect r="r" b="b" t="t" l="l"/>
+            <a:pathLst>
+              <a:path h="3996214" w="4282277">
+                <a:moveTo>
+                  <a:pt x="0" y="0"/>
+                </a:moveTo>
+                <a:lnTo>
+                  <a:pt x="4282277" y="0"/>
+                </a:lnTo>
+                <a:lnTo>
+                  <a:pt x="4282277" y="3996214"/>
+                </a:lnTo>
+                <a:lnTo>
+                  <a:pt x="0" y="3996214"/>
+                </a:lnTo>
+                <a:lnTo>
+                  <a:pt x="0" y="0"/>
+                </a:lnTo>
+                <a:close/>
+              </a:path>
+            </a:pathLst>
+          </a:custGeom>
+          <a:blipFill>
+            <a:blip r:embed="rId4"/>
+            <a:stretch>
+              <a:fillRect l="0" t="0" r="0" b="0"/>
+            </a:stretch>
+          </a:blipFill>
+        </p:spPr>
+      </p:sp>
+      <p:grpSp>
+        <p:nvGrpSpPr>
+          <p:cNvPr name="Group 21" id="21"/>
+          <p:cNvGrpSpPr/>
+          <p:nvPr/>
+        </p:nvGrpSpPr>
+        <p:grpSpPr>
+          <a:xfrm rot="0">
+            <a:off x="454665" y="2072550"/>
+            <a:ext cx="3745152" cy="2859296"/>
+            <a:chOff x="0" y="0"/>
+            <a:chExt cx="3656876" cy="2791900"/>
+          </a:xfrm>
+        </p:grpSpPr>
+        <p:sp>
+          <p:nvSpPr>
+            <p:cNvPr name="Freeform 22" id="22"/>
+            <p:cNvSpPr/>
+            <p:nvPr/>
+          </p:nvSpPr>
+          <p:spPr>
+            <a:xfrm flipH="false" flipV="false" rot="0">
+              <a:off x="0" y="0"/>
+              <a:ext cx="3656880" cy="2791904"/>
+            </a:xfrm>
+            <a:custGeom>
+              <a:avLst/>
+              <a:gdLst/>
+              <a:ahLst/>
+              <a:cxnLst/>
+              <a:rect r="r" b="b" t="t" l="l"/>
+              <a:pathLst>
+                <a:path h="2791904" w="3656880">
+                  <a:moveTo>
+                    <a:pt x="0" y="0"/>
+                  </a:moveTo>
+                  <a:lnTo>
+                    <a:pt x="3656880" y="0"/>
+                  </a:lnTo>
+                  <a:lnTo>
+                    <a:pt x="3656880" y="2791904"/>
+                  </a:lnTo>
+                  <a:lnTo>
+                    <a:pt x="0" y="2791904"/>
+                  </a:lnTo>
+                  <a:close/>
+                </a:path>
+              </a:pathLst>
+            </a:custGeom>
+            <a:blipFill>
+              <a:blip r:embed="rId3">
+                <a:alphaModFix amt="0"/>
+              </a:blip>
+              <a:stretch>
+                <a:fillRect l="0" t="-7521" r="0" b="56477"/>
+              </a:stretch>
+            </a:blipFill>
+          </p:spPr>
+        </p:sp>
+        <p:sp>
+          <p:nvSpPr>
+            <p:cNvPr name="TextBox 23" id="23"/>
+            <p:cNvSpPr txBox="true"/>
+            <p:nvPr/>
+          </p:nvSpPr>
+          <p:spPr>
+            <a:xfrm>
+              <a:off x="0" y="0"/>
+              <a:ext cx="3656876" cy="2791900"/>
+            </a:xfrm>
+            <a:prstGeom prst="rect">
+              <a:avLst/>
+            </a:prstGeom>
+          </p:spPr>
+          <p:txBody>
+            <a:bodyPr anchor="ctr" rtlCol="false" tIns="0" lIns="0" bIns="0" rIns="0"/>
+            <a:lstStyle/>
+            <a:p>
+              <a:pPr algn="ctr">
+                <a:lnSpc>
+                  <a:spcPts val="4679"/>
+                </a:lnSpc>
+              </a:pPr>
+              <a:r>
+                <a:rPr lang="en-US" b="true" sz="3899" spc="-1">
+                  <a:solidFill>
+                    <a:srgbClr val="06D6A0"/>
+                  </a:solidFill>
+                  <a:latin typeface="Cambria Bold"/>
+                  <a:ea typeface="Cambria Bold"/>
+                  <a:cs typeface="Cambria Bold"/>
+                  <a:sym typeface="Cambria Bold"/>
+                </a:rPr>
+                <a:t>1M steps</a:t>
+              </a:r>
+            </a:p>
+          </p:txBody>
+        </p:sp>
+      </p:grpSp>
+      <p:sp>
+        <p:nvSpPr>
+          <p:cNvPr name="Freeform 24" id="24"/>
+          <p:cNvSpPr/>
+          <p:nvPr/>
+        </p:nvSpPr>
+        <p:spPr>
+          <a:xfrm flipH="false" flipV="false" rot="0">
+            <a:off x="4669095" y="4774946"/>
+            <a:ext cx="4282277" cy="3996214"/>
+          </a:xfrm>
+          <a:custGeom>
+            <a:avLst/>
+            <a:gdLst/>
+            <a:ahLst/>
+            <a:cxnLst/>
+            <a:rect r="r" b="b" t="t" l="l"/>
+            <a:pathLst>
+              <a:path h="3996214" w="4282277">
+                <a:moveTo>
+                  <a:pt x="0" y="0"/>
+                </a:moveTo>
+                <a:lnTo>
+                  <a:pt x="4282277" y="0"/>
+                </a:lnTo>
+                <a:lnTo>
+                  <a:pt x="4282277" y="3996214"/>
+                </a:lnTo>
+                <a:lnTo>
+                  <a:pt x="0" y="3996214"/>
+                </a:lnTo>
+                <a:lnTo>
+                  <a:pt x="0" y="0"/>
+                </a:lnTo>
+                <a:close/>
+              </a:path>
+            </a:pathLst>
+          </a:custGeom>
+          <a:blipFill>
+            <a:blip r:embed="rId5"/>
+            <a:stretch>
+              <a:fillRect l="0" t="0" r="0" b="0"/>
+            </a:stretch>
+          </a:blipFill>
+        </p:spPr>
+      </p:sp>
+      <p:grpSp>
+        <p:nvGrpSpPr>
+          <p:cNvPr name="Group 25" id="25"/>
+          <p:cNvGrpSpPr/>
+          <p:nvPr/>
+        </p:nvGrpSpPr>
+        <p:grpSpPr>
+          <a:xfrm rot="0">
+            <a:off x="5529585" y="2072550"/>
+            <a:ext cx="3745152" cy="2859296"/>
+            <a:chOff x="0" y="0"/>
+            <a:chExt cx="3656876" cy="2791900"/>
+          </a:xfrm>
+        </p:grpSpPr>
+        <p:sp>
+          <p:nvSpPr>
+            <p:cNvPr name="Freeform 26" id="26"/>
+            <p:cNvSpPr/>
+            <p:nvPr/>
+          </p:nvSpPr>
+          <p:spPr>
+            <a:xfrm flipH="false" flipV="false" rot="0">
+              <a:off x="0" y="0"/>
+              <a:ext cx="3656880" cy="2791904"/>
+            </a:xfrm>
+            <a:custGeom>
+              <a:avLst/>
+              <a:gdLst/>
+              <a:ahLst/>
+              <a:cxnLst/>
+              <a:rect r="r" b="b" t="t" l="l"/>
+              <a:pathLst>
+                <a:path h="2791904" w="3656880">
+                  <a:moveTo>
+                    <a:pt x="0" y="0"/>
+                  </a:moveTo>
+                  <a:lnTo>
+                    <a:pt x="3656880" y="0"/>
+                  </a:lnTo>
+                  <a:lnTo>
+                    <a:pt x="3656880" y="2791904"/>
+                  </a:lnTo>
+                  <a:lnTo>
+                    <a:pt x="0" y="2791904"/>
+                  </a:lnTo>
+                  <a:close/>
+                </a:path>
+              </a:pathLst>
+            </a:custGeom>
+            <a:blipFill>
+              <a:blip r:embed="rId3">
+                <a:alphaModFix amt="0"/>
+              </a:blip>
+              <a:stretch>
+                <a:fillRect l="0" t="-7521" r="0" b="56477"/>
+              </a:stretch>
+            </a:blipFill>
+          </p:spPr>
+        </p:sp>
+        <p:sp>
+          <p:nvSpPr>
+            <p:cNvPr name="TextBox 27" id="27"/>
+            <p:cNvSpPr txBox="true"/>
+            <p:nvPr/>
+          </p:nvSpPr>
+          <p:spPr>
+            <a:xfrm>
+              <a:off x="0" y="0"/>
+              <a:ext cx="3656876" cy="2791900"/>
+            </a:xfrm>
+            <a:prstGeom prst="rect">
+              <a:avLst/>
+            </a:prstGeom>
+          </p:spPr>
+          <p:txBody>
+            <a:bodyPr anchor="ctr" rtlCol="false" tIns="0" lIns="0" bIns="0" rIns="0"/>
+            <a:lstStyle/>
+            <a:p>
+              <a:pPr algn="ctr">
+                <a:lnSpc>
+                  <a:spcPts val="4679"/>
+                </a:lnSpc>
+              </a:pPr>
+              <a:r>
+                <a:rPr lang="en-US" b="true" sz="3899" spc="-1">
+                  <a:solidFill>
+                    <a:srgbClr val="06D6A0"/>
+                  </a:solidFill>
+                  <a:latin typeface="Cambria Bold"/>
+                  <a:ea typeface="Cambria Bold"/>
+                  <a:cs typeface="Cambria Bold"/>
+                  <a:sym typeface="Cambria Bold"/>
+                </a:rPr>
+                <a:t>2M steps</a:t>
+              </a:r>
+            </a:p>
+          </p:txBody>
+        </p:sp>
+      </p:grpSp>
+      <p:sp>
+        <p:nvSpPr>
+          <p:cNvPr name="Freeform 28" id="28"/>
+          <p:cNvSpPr/>
+          <p:nvPr/>
+        </p:nvSpPr>
+        <p:spPr>
+          <a:xfrm flipH="false" flipV="false" rot="0">
+            <a:off x="9336958" y="4774946"/>
+            <a:ext cx="4283179" cy="3997056"/>
+          </a:xfrm>
+          <a:custGeom>
+            <a:avLst/>
+            <a:gdLst/>
+            <a:ahLst/>
+            <a:cxnLst/>
+            <a:rect r="r" b="b" t="t" l="l"/>
+            <a:pathLst>
+              <a:path h="3997056" w="4283179">
+                <a:moveTo>
+                  <a:pt x="0" y="0"/>
+                </a:moveTo>
+                <a:lnTo>
+                  <a:pt x="4283179" y="0"/>
+                </a:lnTo>
+                <a:lnTo>
+                  <a:pt x="4283179" y="3997056"/>
+                </a:lnTo>
+                <a:lnTo>
+                  <a:pt x="0" y="3997056"/>
+                </a:lnTo>
+                <a:lnTo>
+                  <a:pt x="0" y="0"/>
+                </a:lnTo>
+                <a:close/>
+              </a:path>
+            </a:pathLst>
+          </a:custGeom>
+          <a:blipFill>
+            <a:blip r:embed="rId6"/>
+            <a:stretch>
+              <a:fillRect l="0" t="0" r="0" b="0"/>
+            </a:stretch>
+          </a:blipFill>
+        </p:spPr>
+      </p:sp>
+      <p:grpSp>
+        <p:nvGrpSpPr>
+          <p:cNvPr name="Group 29" id="29"/>
+          <p:cNvGrpSpPr/>
+          <p:nvPr/>
+        </p:nvGrpSpPr>
+        <p:grpSpPr>
+          <a:xfrm rot="0">
+            <a:off x="10603656" y="2072550"/>
+            <a:ext cx="3745152" cy="2859296"/>
+            <a:chOff x="0" y="0"/>
+            <a:chExt cx="3656876" cy="2791900"/>
+          </a:xfrm>
+        </p:grpSpPr>
+        <p:sp>
+          <p:nvSpPr>
+            <p:cNvPr name="Freeform 30" id="30"/>
+            <p:cNvSpPr/>
+            <p:nvPr/>
+          </p:nvSpPr>
+          <p:spPr>
+            <a:xfrm flipH="false" flipV="false" rot="0">
+              <a:off x="0" y="0"/>
+              <a:ext cx="3656880" cy="2791904"/>
+            </a:xfrm>
+            <a:custGeom>
+              <a:avLst/>
+              <a:gdLst/>
+              <a:ahLst/>
+              <a:cxnLst/>
+              <a:rect r="r" b="b" t="t" l="l"/>
+              <a:pathLst>
+                <a:path h="2791904" w="3656880">
+                  <a:moveTo>
+                    <a:pt x="0" y="0"/>
+                  </a:moveTo>
+                  <a:lnTo>
+                    <a:pt x="3656880" y="0"/>
+                  </a:lnTo>
+                  <a:lnTo>
+                    <a:pt x="3656880" y="2791904"/>
+                  </a:lnTo>
+                  <a:lnTo>
+                    <a:pt x="0" y="2791904"/>
+                  </a:lnTo>
+                  <a:close/>
+                </a:path>
+              </a:pathLst>
+            </a:custGeom>
+            <a:blipFill>
+              <a:blip r:embed="rId3">
+                <a:alphaModFix amt="0"/>
+              </a:blip>
+              <a:stretch>
+                <a:fillRect l="0" t="-7521" r="0" b="56477"/>
+              </a:stretch>
+            </a:blipFill>
+          </p:spPr>
+        </p:sp>
+        <p:sp>
+          <p:nvSpPr>
+            <p:cNvPr name="TextBox 31" id="31"/>
+            <p:cNvSpPr txBox="true"/>
+            <p:nvPr/>
+          </p:nvSpPr>
+          <p:spPr>
+            <a:xfrm>
+              <a:off x="0" y="0"/>
+              <a:ext cx="3656876" cy="2791900"/>
+            </a:xfrm>
+            <a:prstGeom prst="rect">
+              <a:avLst/>
+            </a:prstGeom>
+          </p:spPr>
+          <p:txBody>
+            <a:bodyPr anchor="ctr" rtlCol="false" tIns="0" lIns="0" bIns="0" rIns="0"/>
+            <a:lstStyle/>
+            <a:p>
+              <a:pPr algn="ctr">
+                <a:lnSpc>
+                  <a:spcPts val="4679"/>
+                </a:lnSpc>
+              </a:pPr>
+              <a:r>
+                <a:rPr lang="en-US" b="true" sz="3899" spc="-1">
+                  <a:solidFill>
+                    <a:srgbClr val="06D6A0"/>
+                  </a:solidFill>
+                  <a:latin typeface="Cambria Bold"/>
+                  <a:ea typeface="Cambria Bold"/>
+                  <a:cs typeface="Cambria Bold"/>
+                  <a:sym typeface="Cambria Bold"/>
+                </a:rPr>
+                <a:t>4M steps</a:t>
+              </a:r>
+            </a:p>
+          </p:txBody>
+        </p:sp>
+      </p:grpSp>
+      <p:sp>
+        <p:nvSpPr>
+          <p:cNvPr name="Freeform 32" id="32"/>
+          <p:cNvSpPr/>
+          <p:nvPr/>
+        </p:nvSpPr>
+        <p:spPr>
+          <a:xfrm flipH="false" flipV="false" rot="0">
+            <a:off x="14005723" y="4774946"/>
+            <a:ext cx="4282277" cy="3996214"/>
+          </a:xfrm>
+          <a:custGeom>
+            <a:avLst/>
+            <a:gdLst/>
+            <a:ahLst/>
+            <a:cxnLst/>
+            <a:rect r="r" b="b" t="t" l="l"/>
+            <a:pathLst>
+              <a:path h="3996214" w="4282277">
+                <a:moveTo>
+                  <a:pt x="0" y="0"/>
+                </a:moveTo>
+                <a:lnTo>
+                  <a:pt x="4282277" y="0"/>
+                </a:lnTo>
+                <a:lnTo>
+                  <a:pt x="4282277" y="3996214"/>
+                </a:lnTo>
+                <a:lnTo>
+                  <a:pt x="0" y="3996214"/>
+                </a:lnTo>
+                <a:lnTo>
+                  <a:pt x="0" y="0"/>
+                </a:lnTo>
+                <a:close/>
+              </a:path>
+            </a:pathLst>
+          </a:custGeom>
+          <a:blipFill>
+            <a:blip r:embed="rId7"/>
+            <a:stretch>
+              <a:fillRect l="0" t="0" r="0" b="0"/>
+            </a:stretch>
+          </a:blipFill>
+        </p:spPr>
+      </p:sp>
+      <p:grpSp>
+        <p:nvGrpSpPr>
+          <p:cNvPr name="Group 33" id="33"/>
+          <p:cNvGrpSpPr/>
+          <p:nvPr/>
+        </p:nvGrpSpPr>
+        <p:grpSpPr>
+          <a:xfrm rot="0">
+            <a:off x="14274285" y="2072550"/>
+            <a:ext cx="3745152" cy="2859296"/>
+            <a:chOff x="0" y="0"/>
+            <a:chExt cx="3656876" cy="2791900"/>
+          </a:xfrm>
+        </p:grpSpPr>
+        <p:sp>
+          <p:nvSpPr>
+            <p:cNvPr name="Freeform 34" id="34"/>
+            <p:cNvSpPr/>
+            <p:nvPr/>
+          </p:nvSpPr>
+          <p:spPr>
+            <a:xfrm flipH="false" flipV="false" rot="0">
+              <a:off x="0" y="0"/>
+              <a:ext cx="3656880" cy="2791904"/>
+            </a:xfrm>
+            <a:custGeom>
+              <a:avLst/>
+              <a:gdLst/>
+              <a:ahLst/>
+              <a:cxnLst/>
+              <a:rect r="r" b="b" t="t" l="l"/>
+              <a:pathLst>
+                <a:path h="2791904" w="3656880">
+                  <a:moveTo>
+                    <a:pt x="0" y="0"/>
+                  </a:moveTo>
+                  <a:lnTo>
+                    <a:pt x="3656880" y="0"/>
+                  </a:lnTo>
+                  <a:lnTo>
+                    <a:pt x="3656880" y="2791904"/>
+                  </a:lnTo>
+                  <a:lnTo>
+                    <a:pt x="0" y="2791904"/>
+                  </a:lnTo>
+                  <a:close/>
+                </a:path>
+              </a:pathLst>
+            </a:custGeom>
+            <a:blipFill>
+              <a:blip r:embed="rId3">
+                <a:alphaModFix amt="0"/>
+              </a:blip>
+              <a:stretch>
+                <a:fillRect l="0" t="-7521" r="0" b="56477"/>
+              </a:stretch>
+            </a:blipFill>
+          </p:spPr>
+        </p:sp>
+        <p:sp>
+          <p:nvSpPr>
+            <p:cNvPr name="TextBox 35" id="35"/>
+            <p:cNvSpPr txBox="true"/>
+            <p:nvPr/>
+          </p:nvSpPr>
+          <p:spPr>
+            <a:xfrm>
+              <a:off x="0" y="0"/>
+              <a:ext cx="3656876" cy="2791900"/>
+            </a:xfrm>
+            <a:prstGeom prst="rect">
+              <a:avLst/>
+            </a:prstGeom>
+          </p:spPr>
+          <p:txBody>
+            <a:bodyPr anchor="ctr" rtlCol="false" tIns="0" lIns="0" bIns="0" rIns="0"/>
+            <a:lstStyle/>
+            <a:p>
+              <a:pPr algn="ctr">
+                <a:lnSpc>
+                  <a:spcPts val="4679"/>
+                </a:lnSpc>
+              </a:pPr>
+              <a:r>
+                <a:rPr lang="en-US" b="true" sz="3899" spc="-1">
+                  <a:solidFill>
+                    <a:srgbClr val="06D6A0"/>
+                  </a:solidFill>
+                  <a:latin typeface="Cambria Bold"/>
+                  <a:ea typeface="Cambria Bold"/>
+                  <a:cs typeface="Cambria Bold"/>
+                  <a:sym typeface="Cambria Bold"/>
+                </a:rPr>
+                <a:t>&gt;6M steps</a:t>
               </a:r>
             </a:p>
           </p:txBody>
@@ -9317,6 +9065,1895 @@
                   <a:cs typeface="Calibri (MS) Bold"/>
                   <a:sym typeface="Calibri (MS) Bold"/>
                 </a:rPr>
+                <a:t>CONCLUSION</a:t>
+              </a:r>
+            </a:p>
+          </p:txBody>
+        </p:sp>
+      </p:grpSp>
+      <p:grpSp>
+        <p:nvGrpSpPr>
+          <p:cNvPr name="Group 5" id="5"/>
+          <p:cNvGrpSpPr/>
+          <p:nvPr/>
+        </p:nvGrpSpPr>
+        <p:grpSpPr>
+          <a:xfrm rot="0">
+            <a:off x="822960" y="850497"/>
+            <a:ext cx="15910017" cy="959577"/>
+            <a:chOff x="0" y="0"/>
+            <a:chExt cx="21213356" cy="1279436"/>
+          </a:xfrm>
+        </p:grpSpPr>
+        <p:sp>
+          <p:nvSpPr>
+            <p:cNvPr name="Freeform 6" id="6"/>
+            <p:cNvSpPr/>
+            <p:nvPr/>
+          </p:nvSpPr>
+          <p:spPr>
+            <a:xfrm flipH="false" flipV="false" rot="0">
+              <a:off x="0" y="0"/>
+              <a:ext cx="21213359" cy="1279440"/>
+            </a:xfrm>
+            <a:custGeom>
+              <a:avLst/>
+              <a:gdLst/>
+              <a:ahLst/>
+              <a:cxnLst/>
+              <a:rect r="r" b="b" t="t" l="l"/>
+              <a:pathLst>
+                <a:path h="1279440" w="21213359">
+                  <a:moveTo>
+                    <a:pt x="0" y="0"/>
+                  </a:moveTo>
+                  <a:lnTo>
+                    <a:pt x="21213359" y="0"/>
+                  </a:lnTo>
+                  <a:lnTo>
+                    <a:pt x="21213359" y="1279440"/>
+                  </a:lnTo>
+                  <a:lnTo>
+                    <a:pt x="0" y="1279440"/>
+                  </a:lnTo>
+                  <a:close/>
+                </a:path>
+              </a:pathLst>
+            </a:custGeom>
+            <a:blipFill>
+              <a:blip r:embed="rId3">
+                <a:alphaModFix amt="0"/>
+              </a:blip>
+              <a:stretch>
+                <a:fillRect l="0" t="-273065" r="0" b="-273065"/>
+              </a:stretch>
+            </a:blipFill>
+          </p:spPr>
+        </p:sp>
+        <p:sp>
+          <p:nvSpPr>
+            <p:cNvPr name="TextBox 7" id="7"/>
+            <p:cNvSpPr txBox="true"/>
+            <p:nvPr/>
+          </p:nvSpPr>
+          <p:spPr>
+            <a:xfrm>
+              <a:off x="0" y="-19050"/>
+              <a:ext cx="21213356" cy="1298486"/>
+            </a:xfrm>
+            <a:prstGeom prst="rect">
+              <a:avLst/>
+            </a:prstGeom>
+          </p:spPr>
+          <p:txBody>
+            <a:bodyPr anchor="ctr" rtlCol="false" tIns="0" lIns="0" bIns="0" rIns="0"/>
+            <a:lstStyle/>
+            <a:p>
+              <a:pPr algn="l">
+                <a:lnSpc>
+                  <a:spcPts val="5400"/>
+                </a:lnSpc>
+              </a:pPr>
+              <a:r>
+                <a:rPr lang="en-US" b="true" sz="4500" spc="-1">
+                  <a:solidFill>
+                    <a:srgbClr val="E5E9F0"/>
+                  </a:solidFill>
+                  <a:latin typeface="Cambria Bold"/>
+                  <a:ea typeface="Cambria Bold"/>
+                  <a:cs typeface="Cambria Bold"/>
+                  <a:sym typeface="Cambria Bold"/>
+                </a:rPr>
+                <a:t>Results achieved &amp; directions for improvement</a:t>
+              </a:r>
+            </a:p>
+          </p:txBody>
+        </p:sp>
+      </p:grpSp>
+      <p:grpSp>
+        <p:nvGrpSpPr>
+          <p:cNvPr name="Group 8" id="8"/>
+          <p:cNvGrpSpPr/>
+          <p:nvPr/>
+        </p:nvGrpSpPr>
+        <p:grpSpPr>
+          <a:xfrm rot="0">
+            <a:off x="822960" y="2400300"/>
+            <a:ext cx="8091897" cy="6308817"/>
+            <a:chOff x="0" y="0"/>
+            <a:chExt cx="10789196" cy="8411756"/>
+          </a:xfrm>
+        </p:grpSpPr>
+        <p:sp>
+          <p:nvSpPr>
+            <p:cNvPr name="Freeform 9" id="9"/>
+            <p:cNvSpPr/>
+            <p:nvPr/>
+          </p:nvSpPr>
+          <p:spPr>
+            <a:xfrm flipH="false" flipV="false" rot="0">
+              <a:off x="0" y="0"/>
+              <a:ext cx="10789286" cy="8411845"/>
+            </a:xfrm>
+            <a:custGeom>
+              <a:avLst/>
+              <a:gdLst/>
+              <a:ahLst/>
+              <a:cxnLst/>
+              <a:rect r="r" b="b" t="t" l="l"/>
+              <a:pathLst>
+                <a:path h="8411845" w="10789286">
+                  <a:moveTo>
+                    <a:pt x="0" y="146304"/>
+                  </a:moveTo>
+                  <a:cubicBezTo>
+                    <a:pt x="0" y="65532"/>
+                    <a:pt x="65532" y="0"/>
+                    <a:pt x="146304" y="0"/>
+                  </a:cubicBezTo>
+                  <a:lnTo>
+                    <a:pt x="10642981" y="0"/>
+                  </a:lnTo>
+                  <a:cubicBezTo>
+                    <a:pt x="10723753" y="0"/>
+                    <a:pt x="10789286" y="65532"/>
+                    <a:pt x="10789286" y="146304"/>
+                  </a:cubicBezTo>
+                  <a:lnTo>
+                    <a:pt x="10789286" y="8265541"/>
+                  </a:lnTo>
+                  <a:cubicBezTo>
+                    <a:pt x="10789286" y="8346313"/>
+                    <a:pt x="10723753" y="8411845"/>
+                    <a:pt x="10642981" y="8411845"/>
+                  </a:cubicBezTo>
+                  <a:lnTo>
+                    <a:pt x="146304" y="8411845"/>
+                  </a:lnTo>
+                  <a:cubicBezTo>
+                    <a:pt x="65532" y="8411718"/>
+                    <a:pt x="0" y="8346313"/>
+                    <a:pt x="0" y="8265541"/>
+                  </a:cubicBezTo>
+                  <a:close/>
+                </a:path>
+              </a:pathLst>
+            </a:custGeom>
+            <a:solidFill>
+              <a:srgbClr val="16213E"/>
+            </a:solidFill>
+          </p:spPr>
+        </p:sp>
+      </p:grpSp>
+      <p:grpSp>
+        <p:nvGrpSpPr>
+          <p:cNvPr name="Group 10" id="10"/>
+          <p:cNvGrpSpPr/>
+          <p:nvPr/>
+        </p:nvGrpSpPr>
+        <p:grpSpPr>
+          <a:xfrm rot="0">
+            <a:off x="1234440" y="2743200"/>
+            <a:ext cx="1096737" cy="1096737"/>
+            <a:chOff x="0" y="0"/>
+            <a:chExt cx="1462316" cy="1462316"/>
+          </a:xfrm>
+        </p:grpSpPr>
+        <p:sp>
+          <p:nvSpPr>
+            <p:cNvPr name="Freeform 11" id="11"/>
+            <p:cNvSpPr/>
+            <p:nvPr/>
+          </p:nvSpPr>
+          <p:spPr>
+            <a:xfrm flipH="false" flipV="false" rot="0">
+              <a:off x="0" y="0"/>
+              <a:ext cx="1462278" cy="1462278"/>
+            </a:xfrm>
+            <a:custGeom>
+              <a:avLst/>
+              <a:gdLst/>
+              <a:ahLst/>
+              <a:cxnLst/>
+              <a:rect r="r" b="b" t="t" l="l"/>
+              <a:pathLst>
+                <a:path h="1462278" w="1462278">
+                  <a:moveTo>
+                    <a:pt x="0" y="731139"/>
+                  </a:moveTo>
+                  <a:cubicBezTo>
+                    <a:pt x="0" y="327406"/>
+                    <a:pt x="327406" y="0"/>
+                    <a:pt x="731139" y="0"/>
+                  </a:cubicBezTo>
+                  <a:cubicBezTo>
+                    <a:pt x="1134872" y="0"/>
+                    <a:pt x="1462278" y="327406"/>
+                    <a:pt x="1462278" y="731139"/>
+                  </a:cubicBezTo>
+                  <a:cubicBezTo>
+                    <a:pt x="1462278" y="1134872"/>
+                    <a:pt x="1134872" y="1462278"/>
+                    <a:pt x="731139" y="1462278"/>
+                  </a:cubicBezTo>
+                  <a:cubicBezTo>
+                    <a:pt x="327406" y="1462278"/>
+                    <a:pt x="0" y="1134999"/>
+                    <a:pt x="0" y="731139"/>
+                  </a:cubicBezTo>
+                  <a:close/>
+                </a:path>
+              </a:pathLst>
+            </a:custGeom>
+            <a:solidFill>
+              <a:srgbClr val="1C2B4A"/>
+            </a:solidFill>
+          </p:spPr>
+        </p:sp>
+      </p:grpSp>
+      <p:grpSp>
+        <p:nvGrpSpPr>
+          <p:cNvPr name="Group 12" id="12"/>
+          <p:cNvGrpSpPr/>
+          <p:nvPr/>
+        </p:nvGrpSpPr>
+        <p:grpSpPr>
+          <a:xfrm rot="0">
+            <a:off x="1497959" y="3006719"/>
+            <a:ext cx="570243" cy="570243"/>
+            <a:chOff x="0" y="0"/>
+            <a:chExt cx="760324" cy="760324"/>
+          </a:xfrm>
+        </p:grpSpPr>
+        <p:sp>
+          <p:nvSpPr>
+            <p:cNvPr name="Freeform 13" id="13" descr="/tmp/claude-1000/-media-hung-Work-Project-AI-Engineer-RL-contra-PPO/70c7dc7d-8f3f-4139-8f25-95b0e9e6dca5/scratchpad/build/icons/trophy.png"/>
+            <p:cNvSpPr/>
+            <p:nvPr/>
+          </p:nvSpPr>
+          <p:spPr>
+            <a:xfrm flipH="false" flipV="false" rot="0">
+              <a:off x="0" y="0"/>
+              <a:ext cx="760349" cy="760349"/>
+            </a:xfrm>
+            <a:custGeom>
+              <a:avLst/>
+              <a:gdLst/>
+              <a:ahLst/>
+              <a:cxnLst/>
+              <a:rect r="r" b="b" t="t" l="l"/>
+              <a:pathLst>
+                <a:path h="760349" w="760349">
+                  <a:moveTo>
+                    <a:pt x="0" y="0"/>
+                  </a:moveTo>
+                  <a:lnTo>
+                    <a:pt x="760349" y="0"/>
+                  </a:lnTo>
+                  <a:lnTo>
+                    <a:pt x="760349" y="760349"/>
+                  </a:lnTo>
+                  <a:lnTo>
+                    <a:pt x="0" y="760349"/>
+                  </a:lnTo>
+                  <a:lnTo>
+                    <a:pt x="0" y="0"/>
+                  </a:lnTo>
+                  <a:close/>
+                </a:path>
+              </a:pathLst>
+            </a:custGeom>
+            <a:blipFill>
+              <a:blip r:embed="rId4"/>
+              <a:stretch>
+                <a:fillRect l="0" t="0" r="3" b="3"/>
+              </a:stretch>
+            </a:blipFill>
+          </p:spPr>
+        </p:sp>
+      </p:grpSp>
+      <p:grpSp>
+        <p:nvGrpSpPr>
+          <p:cNvPr name="Group 14" id="14"/>
+          <p:cNvGrpSpPr/>
+          <p:nvPr/>
+        </p:nvGrpSpPr>
+        <p:grpSpPr>
+          <a:xfrm rot="0">
+            <a:off x="2561779" y="3006719"/>
+            <a:ext cx="5485857" cy="595572"/>
+            <a:chOff x="0" y="0"/>
+            <a:chExt cx="7314476" cy="794096"/>
+          </a:xfrm>
+        </p:grpSpPr>
+        <p:sp>
+          <p:nvSpPr>
+            <p:cNvPr name="Freeform 15" id="15"/>
+            <p:cNvSpPr/>
+            <p:nvPr/>
+          </p:nvSpPr>
+          <p:spPr>
+            <a:xfrm flipH="false" flipV="false" rot="0">
+              <a:off x="0" y="0"/>
+              <a:ext cx="7314480" cy="794100"/>
+            </a:xfrm>
+            <a:custGeom>
+              <a:avLst/>
+              <a:gdLst/>
+              <a:ahLst/>
+              <a:cxnLst/>
+              <a:rect r="r" b="b" t="t" l="l"/>
+              <a:pathLst>
+                <a:path h="794100" w="7314480">
+                  <a:moveTo>
+                    <a:pt x="0" y="0"/>
+                  </a:moveTo>
+                  <a:lnTo>
+                    <a:pt x="7314480" y="0"/>
+                  </a:lnTo>
+                  <a:lnTo>
+                    <a:pt x="7314480" y="794100"/>
+                  </a:lnTo>
+                  <a:lnTo>
+                    <a:pt x="0" y="794100"/>
+                  </a:lnTo>
+                  <a:close/>
+                </a:path>
+              </a:pathLst>
+            </a:custGeom>
+            <a:blipFill>
+              <a:blip r:embed="rId3">
+                <a:alphaModFix amt="0"/>
+              </a:blip>
+              <a:stretch>
+                <a:fillRect l="0" t="-133463" r="0" b="-125491"/>
+              </a:stretch>
+            </a:blipFill>
+          </p:spPr>
+        </p:sp>
+        <p:sp>
+          <p:nvSpPr>
+            <p:cNvPr name="TextBox 16" id="16"/>
+            <p:cNvSpPr txBox="true"/>
+            <p:nvPr/>
+          </p:nvSpPr>
+          <p:spPr>
+            <a:xfrm>
+              <a:off x="0" y="-57150"/>
+              <a:ext cx="7314476" cy="851246"/>
+            </a:xfrm>
+            <a:prstGeom prst="rect">
+              <a:avLst/>
+            </a:prstGeom>
+          </p:spPr>
+          <p:txBody>
+            <a:bodyPr anchor="ctr" rtlCol="false" tIns="0" lIns="0" bIns="0" rIns="0"/>
+            <a:lstStyle/>
+            <a:p>
+              <a:pPr algn="l">
+                <a:lnSpc>
+                  <a:spcPts val="3599"/>
+                </a:lnSpc>
+              </a:pPr>
+              <a:r>
+                <a:rPr lang="en-US" b="true" sz="2999" spc="-1">
+                  <a:solidFill>
+                    <a:srgbClr val="06D6A0"/>
+                  </a:solidFill>
+                  <a:latin typeface="Calibri (MS) Bold"/>
+                  <a:ea typeface="Calibri (MS) Bold"/>
+                  <a:cs typeface="Calibri (MS) Bold"/>
+                  <a:sym typeface="Calibri (MS) Bold"/>
+                </a:rPr>
+                <a:t>Achieved</a:t>
+              </a:r>
+            </a:p>
+          </p:txBody>
+        </p:sp>
+      </p:grpSp>
+      <p:grpSp>
+        <p:nvGrpSpPr>
+          <p:cNvPr name="Group 17" id="17"/>
+          <p:cNvGrpSpPr/>
+          <p:nvPr/>
+        </p:nvGrpSpPr>
+        <p:grpSpPr>
+          <a:xfrm rot="0">
+            <a:off x="1234440" y="4841643"/>
+            <a:ext cx="123120" cy="123120"/>
+            <a:chOff x="0" y="0"/>
+            <a:chExt cx="164160" cy="164160"/>
+          </a:xfrm>
+        </p:grpSpPr>
+        <p:sp>
+          <p:nvSpPr>
+            <p:cNvPr name="Freeform 18" id="18"/>
+            <p:cNvSpPr/>
+            <p:nvPr/>
+          </p:nvSpPr>
+          <p:spPr>
+            <a:xfrm flipH="false" flipV="false" rot="0">
+              <a:off x="0" y="0"/>
+              <a:ext cx="164084" cy="164084"/>
+            </a:xfrm>
+            <a:custGeom>
+              <a:avLst/>
+              <a:gdLst/>
+              <a:ahLst/>
+              <a:cxnLst/>
+              <a:rect r="r" b="b" t="t" l="l"/>
+              <a:pathLst>
+                <a:path h="164084" w="164084">
+                  <a:moveTo>
+                    <a:pt x="0" y="82042"/>
+                  </a:moveTo>
+                  <a:cubicBezTo>
+                    <a:pt x="0" y="36703"/>
+                    <a:pt x="36703" y="0"/>
+                    <a:pt x="82042" y="0"/>
+                  </a:cubicBezTo>
+                  <a:cubicBezTo>
+                    <a:pt x="127381" y="0"/>
+                    <a:pt x="164084" y="36703"/>
+                    <a:pt x="164084" y="82042"/>
+                  </a:cubicBezTo>
+                  <a:cubicBezTo>
+                    <a:pt x="164084" y="127381"/>
+                    <a:pt x="127381" y="164084"/>
+                    <a:pt x="82042" y="164084"/>
+                  </a:cubicBezTo>
+                  <a:cubicBezTo>
+                    <a:pt x="36703" y="164084"/>
+                    <a:pt x="0" y="127381"/>
+                    <a:pt x="0" y="82042"/>
+                  </a:cubicBezTo>
+                  <a:close/>
+                </a:path>
+              </a:pathLst>
+            </a:custGeom>
+            <a:solidFill>
+              <a:srgbClr val="06D6A0"/>
+            </a:solidFill>
+          </p:spPr>
+        </p:sp>
+      </p:grpSp>
+      <p:sp>
+        <p:nvSpPr>
+          <p:cNvPr name="TextBox 19" id="19"/>
+          <p:cNvSpPr txBox="true"/>
+          <p:nvPr/>
+        </p:nvSpPr>
+        <p:spPr>
+          <a:xfrm rot="0">
+            <a:off x="1577340" y="4554693"/>
+            <a:ext cx="6926037" cy="842201"/>
+          </a:xfrm>
+          <a:prstGeom prst="rect">
+            <a:avLst/>
+          </a:prstGeom>
+        </p:spPr>
+        <p:txBody>
+          <a:bodyPr anchor="t" rtlCol="false" tIns="0" lIns="0" bIns="0" rIns="0">
+            <a:spAutoFit/>
+          </a:bodyPr>
+          <a:lstStyle/>
+          <a:p>
+            <a:pPr algn="l">
+              <a:lnSpc>
+                <a:spcPts val="3208"/>
+              </a:lnSpc>
+            </a:pPr>
+            <a:r>
+              <a:rPr lang="en-US" sz="2324" spc="-2">
+                <a:solidFill>
+                  <a:srgbClr val="E5E9F0"/>
+                </a:solidFill>
+                <a:latin typeface="Calibri (MS)"/>
+                <a:ea typeface="Calibri (MS)"/>
+                <a:cs typeface="Calibri (MS)"/>
+                <a:sym typeface="Calibri (MS)"/>
+              </a:rPr>
+              <a:t>Complete Gymnasium + SB3 pipeline: env, wrapper, train, eval, resume.</a:t>
+            </a:r>
+          </a:p>
+        </p:txBody>
+      </p:sp>
+      <p:grpSp>
+        <p:nvGrpSpPr>
+          <p:cNvPr name="Group 20" id="20"/>
+          <p:cNvGrpSpPr/>
+          <p:nvPr/>
+        </p:nvGrpSpPr>
+        <p:grpSpPr>
+          <a:xfrm rot="0">
+            <a:off x="1234440" y="5829310"/>
+            <a:ext cx="123120" cy="123120"/>
+            <a:chOff x="0" y="0"/>
+            <a:chExt cx="164160" cy="164160"/>
+          </a:xfrm>
+        </p:grpSpPr>
+        <p:sp>
+          <p:nvSpPr>
+            <p:cNvPr name="Freeform 21" id="21"/>
+            <p:cNvSpPr/>
+            <p:nvPr/>
+          </p:nvSpPr>
+          <p:spPr>
+            <a:xfrm flipH="false" flipV="false" rot="0">
+              <a:off x="0" y="0"/>
+              <a:ext cx="164084" cy="164084"/>
+            </a:xfrm>
+            <a:custGeom>
+              <a:avLst/>
+              <a:gdLst/>
+              <a:ahLst/>
+              <a:cxnLst/>
+              <a:rect r="r" b="b" t="t" l="l"/>
+              <a:pathLst>
+                <a:path h="164084" w="164084">
+                  <a:moveTo>
+                    <a:pt x="0" y="82042"/>
+                  </a:moveTo>
+                  <a:cubicBezTo>
+                    <a:pt x="0" y="36703"/>
+                    <a:pt x="36703" y="0"/>
+                    <a:pt x="82042" y="0"/>
+                  </a:cubicBezTo>
+                  <a:cubicBezTo>
+                    <a:pt x="127381" y="0"/>
+                    <a:pt x="164084" y="36703"/>
+                    <a:pt x="164084" y="82042"/>
+                  </a:cubicBezTo>
+                  <a:cubicBezTo>
+                    <a:pt x="164084" y="127381"/>
+                    <a:pt x="127381" y="164084"/>
+                    <a:pt x="82042" y="164084"/>
+                  </a:cubicBezTo>
+                  <a:cubicBezTo>
+                    <a:pt x="36703" y="164084"/>
+                    <a:pt x="0" y="127381"/>
+                    <a:pt x="0" y="82042"/>
+                  </a:cubicBezTo>
+                  <a:close/>
+                </a:path>
+              </a:pathLst>
+            </a:custGeom>
+            <a:solidFill>
+              <a:srgbClr val="06D6A0"/>
+            </a:solidFill>
+          </p:spPr>
+        </p:sp>
+      </p:grpSp>
+      <p:sp>
+        <p:nvSpPr>
+          <p:cNvPr name="TextBox 22" id="22"/>
+          <p:cNvSpPr txBox="true"/>
+          <p:nvPr/>
+        </p:nvSpPr>
+        <p:spPr>
+          <a:xfrm rot="0">
+            <a:off x="1577340" y="5542359"/>
+            <a:ext cx="6926037" cy="842201"/>
+          </a:xfrm>
+          <a:prstGeom prst="rect">
+            <a:avLst/>
+          </a:prstGeom>
+        </p:spPr>
+        <p:txBody>
+          <a:bodyPr anchor="t" rtlCol="false" tIns="0" lIns="0" bIns="0" rIns="0">
+            <a:spAutoFit/>
+          </a:bodyPr>
+          <a:lstStyle/>
+          <a:p>
+            <a:pPr algn="l">
+              <a:lnSpc>
+                <a:spcPts val="3208"/>
+              </a:lnSpc>
+            </a:pPr>
+            <a:r>
+              <a:rPr lang="en-US" sz="2324" spc="-2">
+                <a:solidFill>
+                  <a:srgbClr val="E5E9F0"/>
+                </a:solidFill>
+                <a:latin typeface="Calibri (MS)"/>
+                <a:ea typeface="Calibri (MS)"/>
+                <a:cs typeface="Calibri (MS)"/>
+                <a:sym typeface="Calibri (MS)"/>
+              </a:rPr>
+              <a:t>A multi-component reward function that effectively curbs backing up/standing still/farming score.</a:t>
+            </a:r>
+          </a:p>
+        </p:txBody>
+      </p:sp>
+      <p:grpSp>
+        <p:nvGrpSpPr>
+          <p:cNvPr name="Group 23" id="23"/>
+          <p:cNvGrpSpPr/>
+          <p:nvPr/>
+        </p:nvGrpSpPr>
+        <p:grpSpPr>
+          <a:xfrm rot="0">
+            <a:off x="1234440" y="6816966"/>
+            <a:ext cx="123120" cy="123120"/>
+            <a:chOff x="0" y="0"/>
+            <a:chExt cx="164160" cy="164160"/>
+          </a:xfrm>
+        </p:grpSpPr>
+        <p:sp>
+          <p:nvSpPr>
+            <p:cNvPr name="Freeform 24" id="24"/>
+            <p:cNvSpPr/>
+            <p:nvPr/>
+          </p:nvSpPr>
+          <p:spPr>
+            <a:xfrm flipH="false" flipV="false" rot="0">
+              <a:off x="0" y="0"/>
+              <a:ext cx="164084" cy="164084"/>
+            </a:xfrm>
+            <a:custGeom>
+              <a:avLst/>
+              <a:gdLst/>
+              <a:ahLst/>
+              <a:cxnLst/>
+              <a:rect r="r" b="b" t="t" l="l"/>
+              <a:pathLst>
+                <a:path h="164084" w="164084">
+                  <a:moveTo>
+                    <a:pt x="0" y="82042"/>
+                  </a:moveTo>
+                  <a:cubicBezTo>
+                    <a:pt x="0" y="36703"/>
+                    <a:pt x="36703" y="0"/>
+                    <a:pt x="82042" y="0"/>
+                  </a:cubicBezTo>
+                  <a:cubicBezTo>
+                    <a:pt x="127381" y="0"/>
+                    <a:pt x="164084" y="36703"/>
+                    <a:pt x="164084" y="82042"/>
+                  </a:cubicBezTo>
+                  <a:cubicBezTo>
+                    <a:pt x="164084" y="127381"/>
+                    <a:pt x="127381" y="164084"/>
+                    <a:pt x="82042" y="164084"/>
+                  </a:cubicBezTo>
+                  <a:cubicBezTo>
+                    <a:pt x="36703" y="164084"/>
+                    <a:pt x="0" y="127381"/>
+                    <a:pt x="0" y="82042"/>
+                  </a:cubicBezTo>
+                  <a:close/>
+                </a:path>
+              </a:pathLst>
+            </a:custGeom>
+            <a:solidFill>
+              <a:srgbClr val="06D6A0"/>
+            </a:solidFill>
+          </p:spPr>
+        </p:sp>
+      </p:grpSp>
+      <p:sp>
+        <p:nvSpPr>
+          <p:cNvPr name="TextBox 25" id="25"/>
+          <p:cNvSpPr txBox="true"/>
+          <p:nvPr/>
+        </p:nvSpPr>
+        <p:spPr>
+          <a:xfrm rot="0">
+            <a:off x="1577340" y="6529473"/>
+            <a:ext cx="6926037" cy="842201"/>
+          </a:xfrm>
+          <a:prstGeom prst="rect">
+            <a:avLst/>
+          </a:prstGeom>
+        </p:spPr>
+        <p:txBody>
+          <a:bodyPr anchor="t" rtlCol="false" tIns="0" lIns="0" bIns="0" rIns="0">
+            <a:spAutoFit/>
+          </a:bodyPr>
+          <a:lstStyle/>
+          <a:p>
+            <a:pPr algn="l">
+              <a:lnSpc>
+                <a:spcPts val="3208"/>
+              </a:lnSpc>
+            </a:pPr>
+            <a:r>
+              <a:rPr lang="en-US" sz="2324" spc="-2">
+                <a:solidFill>
+                  <a:srgbClr val="E5E9F0"/>
+                </a:solidFill>
+                <a:latin typeface="Calibri (MS)"/>
+                <a:ea typeface="Calibri (MS)"/>
+                <a:cs typeface="Calibri (MS)"/>
+                <a:sym typeface="Calibri (MS)"/>
+              </a:rPr>
+              <a:t>Robust-best evaluation picks a stable checkpoint instead of a lucky one.</a:t>
+            </a:r>
+          </a:p>
+        </p:txBody>
+      </p:sp>
+      <p:grpSp>
+        <p:nvGrpSpPr>
+          <p:cNvPr name="Group 26" id="26"/>
+          <p:cNvGrpSpPr/>
+          <p:nvPr/>
+        </p:nvGrpSpPr>
+        <p:grpSpPr>
+          <a:xfrm rot="0">
+            <a:off x="1234440" y="7804623"/>
+            <a:ext cx="123120" cy="123120"/>
+            <a:chOff x="0" y="0"/>
+            <a:chExt cx="164160" cy="164160"/>
+          </a:xfrm>
+        </p:grpSpPr>
+        <p:sp>
+          <p:nvSpPr>
+            <p:cNvPr name="Freeform 27" id="27"/>
+            <p:cNvSpPr/>
+            <p:nvPr/>
+          </p:nvSpPr>
+          <p:spPr>
+            <a:xfrm flipH="false" flipV="false" rot="0">
+              <a:off x="0" y="0"/>
+              <a:ext cx="164084" cy="164084"/>
+            </a:xfrm>
+            <a:custGeom>
+              <a:avLst/>
+              <a:gdLst/>
+              <a:ahLst/>
+              <a:cxnLst/>
+              <a:rect r="r" b="b" t="t" l="l"/>
+              <a:pathLst>
+                <a:path h="164084" w="164084">
+                  <a:moveTo>
+                    <a:pt x="0" y="82042"/>
+                  </a:moveTo>
+                  <a:cubicBezTo>
+                    <a:pt x="0" y="36703"/>
+                    <a:pt x="36703" y="0"/>
+                    <a:pt x="82042" y="0"/>
+                  </a:cubicBezTo>
+                  <a:cubicBezTo>
+                    <a:pt x="127381" y="0"/>
+                    <a:pt x="164084" y="36703"/>
+                    <a:pt x="164084" y="82042"/>
+                  </a:cubicBezTo>
+                  <a:cubicBezTo>
+                    <a:pt x="164084" y="127381"/>
+                    <a:pt x="127381" y="164084"/>
+                    <a:pt x="82042" y="164084"/>
+                  </a:cubicBezTo>
+                  <a:cubicBezTo>
+                    <a:pt x="36703" y="164084"/>
+                    <a:pt x="0" y="127381"/>
+                    <a:pt x="0" y="82042"/>
+                  </a:cubicBezTo>
+                  <a:close/>
+                </a:path>
+              </a:pathLst>
+            </a:custGeom>
+            <a:solidFill>
+              <a:srgbClr val="06D6A0"/>
+            </a:solidFill>
+          </p:spPr>
+        </p:sp>
+      </p:grpSp>
+      <p:sp>
+        <p:nvSpPr>
+          <p:cNvPr name="TextBox 28" id="28"/>
+          <p:cNvSpPr txBox="true"/>
+          <p:nvPr/>
+        </p:nvSpPr>
+        <p:spPr>
+          <a:xfrm rot="0">
+            <a:off x="1577340" y="7517140"/>
+            <a:ext cx="6926037" cy="842201"/>
+          </a:xfrm>
+          <a:prstGeom prst="rect">
+            <a:avLst/>
+          </a:prstGeom>
+        </p:spPr>
+        <p:txBody>
+          <a:bodyPr anchor="t" rtlCol="false" tIns="0" lIns="0" bIns="0" rIns="0">
+            <a:spAutoFit/>
+          </a:bodyPr>
+          <a:lstStyle/>
+          <a:p>
+            <a:pPr algn="l">
+              <a:lnSpc>
+                <a:spcPts val="3208"/>
+              </a:lnSpc>
+            </a:pPr>
+            <a:r>
+              <a:rPr lang="en-US" sz="2324" spc="-2">
+                <a:solidFill>
+                  <a:srgbClr val="E5E9F0"/>
+                </a:solidFill>
+                <a:latin typeface="Calibri (MS)"/>
+                <a:ea typeface="Calibri (MS)"/>
+                <a:cs typeface="Calibri (MS)"/>
+                <a:sym typeface="Calibri (MS)"/>
+              </a:rPr>
+              <a:t>The agent clearly improves over timesteps: ep_rew_mean rises from ~587 (0.5M) to ~933 (6.6M).</a:t>
+            </a:r>
+          </a:p>
+        </p:txBody>
+      </p:sp>
+      <p:grpSp>
+        <p:nvGrpSpPr>
+          <p:cNvPr name="Group 29" id="29"/>
+          <p:cNvGrpSpPr/>
+          <p:nvPr/>
+        </p:nvGrpSpPr>
+        <p:grpSpPr>
+          <a:xfrm rot="0">
+            <a:off x="9367923" y="2400300"/>
+            <a:ext cx="8091897" cy="6308817"/>
+            <a:chOff x="0" y="0"/>
+            <a:chExt cx="10789196" cy="8411756"/>
+          </a:xfrm>
+        </p:grpSpPr>
+        <p:sp>
+          <p:nvSpPr>
+            <p:cNvPr name="Freeform 30" id="30"/>
+            <p:cNvSpPr/>
+            <p:nvPr/>
+          </p:nvSpPr>
+          <p:spPr>
+            <a:xfrm flipH="false" flipV="false" rot="0">
+              <a:off x="0" y="0"/>
+              <a:ext cx="10789286" cy="8411845"/>
+            </a:xfrm>
+            <a:custGeom>
+              <a:avLst/>
+              <a:gdLst/>
+              <a:ahLst/>
+              <a:cxnLst/>
+              <a:rect r="r" b="b" t="t" l="l"/>
+              <a:pathLst>
+                <a:path h="8411845" w="10789286">
+                  <a:moveTo>
+                    <a:pt x="0" y="146304"/>
+                  </a:moveTo>
+                  <a:cubicBezTo>
+                    <a:pt x="0" y="65532"/>
+                    <a:pt x="65532" y="0"/>
+                    <a:pt x="146304" y="0"/>
+                  </a:cubicBezTo>
+                  <a:lnTo>
+                    <a:pt x="10642981" y="0"/>
+                  </a:lnTo>
+                  <a:cubicBezTo>
+                    <a:pt x="10723753" y="0"/>
+                    <a:pt x="10789286" y="65532"/>
+                    <a:pt x="10789286" y="146304"/>
+                  </a:cubicBezTo>
+                  <a:lnTo>
+                    <a:pt x="10789286" y="8265541"/>
+                  </a:lnTo>
+                  <a:cubicBezTo>
+                    <a:pt x="10789286" y="8346313"/>
+                    <a:pt x="10723753" y="8411845"/>
+                    <a:pt x="10642981" y="8411845"/>
+                  </a:cubicBezTo>
+                  <a:lnTo>
+                    <a:pt x="146304" y="8411845"/>
+                  </a:lnTo>
+                  <a:cubicBezTo>
+                    <a:pt x="65532" y="8411718"/>
+                    <a:pt x="0" y="8346313"/>
+                    <a:pt x="0" y="8265541"/>
+                  </a:cubicBezTo>
+                  <a:close/>
+                </a:path>
+              </a:pathLst>
+            </a:custGeom>
+            <a:solidFill>
+              <a:srgbClr val="16213E"/>
+            </a:solidFill>
+          </p:spPr>
+        </p:sp>
+      </p:grpSp>
+      <p:grpSp>
+        <p:nvGrpSpPr>
+          <p:cNvPr name="Group 31" id="31"/>
+          <p:cNvGrpSpPr/>
+          <p:nvPr/>
+        </p:nvGrpSpPr>
+        <p:grpSpPr>
+          <a:xfrm rot="0">
+            <a:off x="9779403" y="2743200"/>
+            <a:ext cx="1096737" cy="1096737"/>
+            <a:chOff x="0" y="0"/>
+            <a:chExt cx="1462316" cy="1462316"/>
+          </a:xfrm>
+        </p:grpSpPr>
+        <p:sp>
+          <p:nvSpPr>
+            <p:cNvPr name="Freeform 32" id="32"/>
+            <p:cNvSpPr/>
+            <p:nvPr/>
+          </p:nvSpPr>
+          <p:spPr>
+            <a:xfrm flipH="false" flipV="false" rot="0">
+              <a:off x="0" y="0"/>
+              <a:ext cx="1462278" cy="1462278"/>
+            </a:xfrm>
+            <a:custGeom>
+              <a:avLst/>
+              <a:gdLst/>
+              <a:ahLst/>
+              <a:cxnLst/>
+              <a:rect r="r" b="b" t="t" l="l"/>
+              <a:pathLst>
+                <a:path h="1462278" w="1462278">
+                  <a:moveTo>
+                    <a:pt x="0" y="731139"/>
+                  </a:moveTo>
+                  <a:cubicBezTo>
+                    <a:pt x="0" y="327406"/>
+                    <a:pt x="327406" y="0"/>
+                    <a:pt x="731139" y="0"/>
+                  </a:cubicBezTo>
+                  <a:cubicBezTo>
+                    <a:pt x="1134872" y="0"/>
+                    <a:pt x="1462278" y="327406"/>
+                    <a:pt x="1462278" y="731139"/>
+                  </a:cubicBezTo>
+                  <a:cubicBezTo>
+                    <a:pt x="1462278" y="1134872"/>
+                    <a:pt x="1134872" y="1462278"/>
+                    <a:pt x="731139" y="1462278"/>
+                  </a:cubicBezTo>
+                  <a:cubicBezTo>
+                    <a:pt x="327406" y="1462278"/>
+                    <a:pt x="0" y="1134999"/>
+                    <a:pt x="0" y="731139"/>
+                  </a:cubicBezTo>
+                  <a:close/>
+                </a:path>
+              </a:pathLst>
+            </a:custGeom>
+            <a:solidFill>
+              <a:srgbClr val="1C2B4A"/>
+            </a:solidFill>
+          </p:spPr>
+        </p:sp>
+      </p:grpSp>
+      <p:grpSp>
+        <p:nvGrpSpPr>
+          <p:cNvPr name="Group 33" id="33"/>
+          <p:cNvGrpSpPr/>
+          <p:nvPr/>
+        </p:nvGrpSpPr>
+        <p:grpSpPr>
+          <a:xfrm rot="0">
+            <a:off x="10042922" y="3006719"/>
+            <a:ext cx="570243" cy="570243"/>
+            <a:chOff x="0" y="0"/>
+            <a:chExt cx="760324" cy="760324"/>
+          </a:xfrm>
+        </p:grpSpPr>
+        <p:sp>
+          <p:nvSpPr>
+            <p:cNvPr name="Freeform 34" id="34" descr="/tmp/claude-1000/-media-hung-Work-Project-AI-Engineer-RL-contra-PPO/70c7dc7d-8f3f-4139-8f25-95b0e9e6dca5/scratchpad/build/icons/lightbulb.png"/>
+            <p:cNvSpPr/>
+            <p:nvPr/>
+          </p:nvSpPr>
+          <p:spPr>
+            <a:xfrm flipH="false" flipV="false" rot="0">
+              <a:off x="0" y="0"/>
+              <a:ext cx="760349" cy="760349"/>
+            </a:xfrm>
+            <a:custGeom>
+              <a:avLst/>
+              <a:gdLst/>
+              <a:ahLst/>
+              <a:cxnLst/>
+              <a:rect r="r" b="b" t="t" l="l"/>
+              <a:pathLst>
+                <a:path h="760349" w="760349">
+                  <a:moveTo>
+                    <a:pt x="0" y="0"/>
+                  </a:moveTo>
+                  <a:lnTo>
+                    <a:pt x="760349" y="0"/>
+                  </a:lnTo>
+                  <a:lnTo>
+                    <a:pt x="760349" y="760349"/>
+                  </a:lnTo>
+                  <a:lnTo>
+                    <a:pt x="0" y="760349"/>
+                  </a:lnTo>
+                  <a:lnTo>
+                    <a:pt x="0" y="0"/>
+                  </a:lnTo>
+                  <a:close/>
+                </a:path>
+              </a:pathLst>
+            </a:custGeom>
+            <a:blipFill>
+              <a:blip r:embed="rId5"/>
+              <a:stretch>
+                <a:fillRect l="0" t="0" r="3" b="3"/>
+              </a:stretch>
+            </a:blipFill>
+          </p:spPr>
+        </p:sp>
+      </p:grpSp>
+      <p:grpSp>
+        <p:nvGrpSpPr>
+          <p:cNvPr name="Group 35" id="35"/>
+          <p:cNvGrpSpPr/>
+          <p:nvPr/>
+        </p:nvGrpSpPr>
+        <p:grpSpPr>
+          <a:xfrm rot="0">
+            <a:off x="11104740" y="3006719"/>
+            <a:ext cx="5485857" cy="595572"/>
+            <a:chOff x="0" y="0"/>
+            <a:chExt cx="7314476" cy="794096"/>
+          </a:xfrm>
+        </p:grpSpPr>
+        <p:sp>
+          <p:nvSpPr>
+            <p:cNvPr name="Freeform 36" id="36"/>
+            <p:cNvSpPr/>
+            <p:nvPr/>
+          </p:nvSpPr>
+          <p:spPr>
+            <a:xfrm flipH="false" flipV="false" rot="0">
+              <a:off x="0" y="0"/>
+              <a:ext cx="7314480" cy="794100"/>
+            </a:xfrm>
+            <a:custGeom>
+              <a:avLst/>
+              <a:gdLst/>
+              <a:ahLst/>
+              <a:cxnLst/>
+              <a:rect r="r" b="b" t="t" l="l"/>
+              <a:pathLst>
+                <a:path h="794100" w="7314480">
+                  <a:moveTo>
+                    <a:pt x="0" y="0"/>
+                  </a:moveTo>
+                  <a:lnTo>
+                    <a:pt x="7314480" y="0"/>
+                  </a:lnTo>
+                  <a:lnTo>
+                    <a:pt x="7314480" y="794100"/>
+                  </a:lnTo>
+                  <a:lnTo>
+                    <a:pt x="0" y="794100"/>
+                  </a:lnTo>
+                  <a:close/>
+                </a:path>
+              </a:pathLst>
+            </a:custGeom>
+            <a:blipFill>
+              <a:blip r:embed="rId3">
+                <a:alphaModFix amt="0"/>
+              </a:blip>
+              <a:stretch>
+                <a:fillRect l="0" t="-133463" r="0" b="-125491"/>
+              </a:stretch>
+            </a:blipFill>
+          </p:spPr>
+        </p:sp>
+        <p:sp>
+          <p:nvSpPr>
+            <p:cNvPr name="TextBox 37" id="37"/>
+            <p:cNvSpPr txBox="true"/>
+            <p:nvPr/>
+          </p:nvSpPr>
+          <p:spPr>
+            <a:xfrm>
+              <a:off x="0" y="-57150"/>
+              <a:ext cx="7314476" cy="851246"/>
+            </a:xfrm>
+            <a:prstGeom prst="rect">
+              <a:avLst/>
+            </a:prstGeom>
+          </p:spPr>
+          <p:txBody>
+            <a:bodyPr anchor="ctr" rtlCol="false" tIns="0" lIns="0" bIns="0" rIns="0"/>
+            <a:lstStyle/>
+            <a:p>
+              <a:pPr algn="l">
+                <a:lnSpc>
+                  <a:spcPts val="3599"/>
+                </a:lnSpc>
+              </a:pPr>
+              <a:r>
+                <a:rPr lang="en-US" b="true" sz="2999" spc="-1">
+                  <a:solidFill>
+                    <a:srgbClr val="FFB703"/>
+                  </a:solidFill>
+                  <a:latin typeface="Calibri (MS) Bold"/>
+                  <a:ea typeface="Calibri (MS) Bold"/>
+                  <a:cs typeface="Calibri (MS) Bold"/>
+                  <a:sym typeface="Calibri (MS) Bold"/>
+                </a:rPr>
+                <a:t>Directions for improvement</a:t>
+              </a:r>
+            </a:p>
+          </p:txBody>
+        </p:sp>
+      </p:grpSp>
+      <p:grpSp>
+        <p:nvGrpSpPr>
+          <p:cNvPr name="Group 38" id="38"/>
+          <p:cNvGrpSpPr/>
+          <p:nvPr/>
+        </p:nvGrpSpPr>
+        <p:grpSpPr>
+          <a:xfrm rot="0">
+            <a:off x="9779403" y="4838338"/>
+            <a:ext cx="123120" cy="123120"/>
+            <a:chOff x="0" y="0"/>
+            <a:chExt cx="164160" cy="164160"/>
+          </a:xfrm>
+        </p:grpSpPr>
+        <p:sp>
+          <p:nvSpPr>
+            <p:cNvPr name="Freeform 39" id="39"/>
+            <p:cNvSpPr/>
+            <p:nvPr/>
+          </p:nvSpPr>
+          <p:spPr>
+            <a:xfrm flipH="false" flipV="false" rot="0">
+              <a:off x="0" y="0"/>
+              <a:ext cx="164084" cy="164084"/>
+            </a:xfrm>
+            <a:custGeom>
+              <a:avLst/>
+              <a:gdLst/>
+              <a:ahLst/>
+              <a:cxnLst/>
+              <a:rect r="r" b="b" t="t" l="l"/>
+              <a:pathLst>
+                <a:path h="164084" w="164084">
+                  <a:moveTo>
+                    <a:pt x="0" y="82042"/>
+                  </a:moveTo>
+                  <a:cubicBezTo>
+                    <a:pt x="0" y="36703"/>
+                    <a:pt x="36703" y="0"/>
+                    <a:pt x="82042" y="0"/>
+                  </a:cubicBezTo>
+                  <a:cubicBezTo>
+                    <a:pt x="127381" y="0"/>
+                    <a:pt x="164084" y="36703"/>
+                    <a:pt x="164084" y="82042"/>
+                  </a:cubicBezTo>
+                  <a:cubicBezTo>
+                    <a:pt x="164084" y="127381"/>
+                    <a:pt x="127381" y="164084"/>
+                    <a:pt x="82042" y="164084"/>
+                  </a:cubicBezTo>
+                  <a:cubicBezTo>
+                    <a:pt x="36703" y="164084"/>
+                    <a:pt x="0" y="127381"/>
+                    <a:pt x="0" y="82042"/>
+                  </a:cubicBezTo>
+                  <a:close/>
+                </a:path>
+              </a:pathLst>
+            </a:custGeom>
+            <a:solidFill>
+              <a:srgbClr val="FFB703"/>
+            </a:solidFill>
+          </p:spPr>
+        </p:sp>
+      </p:grpSp>
+      <p:sp>
+        <p:nvSpPr>
+          <p:cNvPr name="TextBox 40" id="40"/>
+          <p:cNvSpPr txBox="true"/>
+          <p:nvPr/>
+        </p:nvSpPr>
+        <p:spPr>
+          <a:xfrm rot="0">
+            <a:off x="10122303" y="4354668"/>
+            <a:ext cx="6926037" cy="1242251"/>
+          </a:xfrm>
+          <a:prstGeom prst="rect">
+            <a:avLst/>
+          </a:prstGeom>
+        </p:spPr>
+        <p:txBody>
+          <a:bodyPr anchor="t" rtlCol="false" tIns="0" lIns="0" bIns="0" rIns="0">
+            <a:spAutoFit/>
+          </a:bodyPr>
+          <a:lstStyle/>
+          <a:p>
+            <a:pPr algn="l">
+              <a:lnSpc>
+                <a:spcPts val="3208"/>
+              </a:lnSpc>
+            </a:pPr>
+            <a:r>
+              <a:rPr lang="en-US" sz="2324" spc="-2">
+                <a:solidFill>
+                  <a:srgbClr val="E5E9F0"/>
+                </a:solidFill>
+                <a:latin typeface="Calibri (MS)"/>
+                <a:ea typeface="Calibri (MS)"/>
+                <a:cs typeface="Calibri (MS)"/>
+                <a:sym typeface="Calibri (MS)"/>
+              </a:rPr>
+              <a:t>Reward tuning: rebalance the progress/score/stagnation weights to reduce ep_rew_mean fluctuation around the 5–6M mark.</a:t>
+            </a:r>
+          </a:p>
+        </p:txBody>
+      </p:sp>
+      <p:grpSp>
+        <p:nvGrpSpPr>
+          <p:cNvPr name="Group 41" id="41"/>
+          <p:cNvGrpSpPr/>
+          <p:nvPr/>
+        </p:nvGrpSpPr>
+        <p:grpSpPr>
+          <a:xfrm rot="0">
+            <a:off x="9779403" y="5908624"/>
+            <a:ext cx="123120" cy="123120"/>
+            <a:chOff x="0" y="0"/>
+            <a:chExt cx="164160" cy="164160"/>
+          </a:xfrm>
+        </p:grpSpPr>
+        <p:sp>
+          <p:nvSpPr>
+            <p:cNvPr name="Freeform 42" id="42"/>
+            <p:cNvSpPr/>
+            <p:nvPr/>
+          </p:nvSpPr>
+          <p:spPr>
+            <a:xfrm flipH="false" flipV="false" rot="0">
+              <a:off x="0" y="0"/>
+              <a:ext cx="164084" cy="164084"/>
+            </a:xfrm>
+            <a:custGeom>
+              <a:avLst/>
+              <a:gdLst/>
+              <a:ahLst/>
+              <a:cxnLst/>
+              <a:rect r="r" b="b" t="t" l="l"/>
+              <a:pathLst>
+                <a:path h="164084" w="164084">
+                  <a:moveTo>
+                    <a:pt x="0" y="82042"/>
+                  </a:moveTo>
+                  <a:cubicBezTo>
+                    <a:pt x="0" y="36703"/>
+                    <a:pt x="36703" y="0"/>
+                    <a:pt x="82042" y="0"/>
+                  </a:cubicBezTo>
+                  <a:cubicBezTo>
+                    <a:pt x="127381" y="0"/>
+                    <a:pt x="164084" y="36703"/>
+                    <a:pt x="164084" y="82042"/>
+                  </a:cubicBezTo>
+                  <a:cubicBezTo>
+                    <a:pt x="164084" y="127381"/>
+                    <a:pt x="127381" y="164084"/>
+                    <a:pt x="82042" y="164084"/>
+                  </a:cubicBezTo>
+                  <a:cubicBezTo>
+                    <a:pt x="36703" y="164084"/>
+                    <a:pt x="0" y="127381"/>
+                    <a:pt x="0" y="82042"/>
+                  </a:cubicBezTo>
+                  <a:close/>
+                </a:path>
+              </a:pathLst>
+            </a:custGeom>
+            <a:solidFill>
+              <a:srgbClr val="FFB703"/>
+            </a:solidFill>
+          </p:spPr>
+        </p:sp>
+      </p:grpSp>
+      <p:sp>
+        <p:nvSpPr>
+          <p:cNvPr name="TextBox 43" id="43"/>
+          <p:cNvSpPr txBox="true"/>
+          <p:nvPr/>
+        </p:nvSpPr>
+        <p:spPr>
+          <a:xfrm rot="0">
+            <a:off x="10121598" y="5734060"/>
+            <a:ext cx="6926037" cy="842201"/>
+          </a:xfrm>
+          <a:prstGeom prst="rect">
+            <a:avLst/>
+          </a:prstGeom>
+        </p:spPr>
+        <p:txBody>
+          <a:bodyPr anchor="t" rtlCol="false" tIns="0" lIns="0" bIns="0" rIns="0">
+            <a:spAutoFit/>
+          </a:bodyPr>
+          <a:lstStyle/>
+          <a:p>
+            <a:pPr algn="l">
+              <a:lnSpc>
+                <a:spcPts val="3208"/>
+              </a:lnSpc>
+            </a:pPr>
+            <a:r>
+              <a:rPr lang="en-US" sz="2324" spc="-2">
+                <a:solidFill>
+                  <a:srgbClr val="E5E9F0"/>
+                </a:solidFill>
+                <a:latin typeface="Calibri (MS)"/>
+                <a:ea typeface="Calibri (MS)"/>
+                <a:cs typeface="Calibri (MS)"/>
+                <a:sym typeface="Calibri (MS)"/>
+              </a:rPr>
+              <a:t>Longer training / more seeds to assess stability beyond Stage 1.</a:t>
+            </a:r>
+          </a:p>
+        </p:txBody>
+      </p:sp>
+      <p:grpSp>
+        <p:nvGrpSpPr>
+          <p:cNvPr name="Group 44" id="44"/>
+          <p:cNvGrpSpPr/>
+          <p:nvPr/>
+        </p:nvGrpSpPr>
+        <p:grpSpPr>
+          <a:xfrm rot="0">
+            <a:off x="9779403" y="6978358"/>
+            <a:ext cx="123120" cy="123120"/>
+            <a:chOff x="0" y="0"/>
+            <a:chExt cx="164160" cy="164160"/>
+          </a:xfrm>
+        </p:grpSpPr>
+        <p:sp>
+          <p:nvSpPr>
+            <p:cNvPr name="Freeform 45" id="45"/>
+            <p:cNvSpPr/>
+            <p:nvPr/>
+          </p:nvSpPr>
+          <p:spPr>
+            <a:xfrm flipH="false" flipV="false" rot="0">
+              <a:off x="0" y="0"/>
+              <a:ext cx="164084" cy="164084"/>
+            </a:xfrm>
+            <a:custGeom>
+              <a:avLst/>
+              <a:gdLst/>
+              <a:ahLst/>
+              <a:cxnLst/>
+              <a:rect r="r" b="b" t="t" l="l"/>
+              <a:pathLst>
+                <a:path h="164084" w="164084">
+                  <a:moveTo>
+                    <a:pt x="0" y="82042"/>
+                  </a:moveTo>
+                  <a:cubicBezTo>
+                    <a:pt x="0" y="36703"/>
+                    <a:pt x="36703" y="0"/>
+                    <a:pt x="82042" y="0"/>
+                  </a:cubicBezTo>
+                  <a:cubicBezTo>
+                    <a:pt x="127381" y="0"/>
+                    <a:pt x="164084" y="36703"/>
+                    <a:pt x="164084" y="82042"/>
+                  </a:cubicBezTo>
+                  <a:cubicBezTo>
+                    <a:pt x="164084" y="127381"/>
+                    <a:pt x="127381" y="164084"/>
+                    <a:pt x="82042" y="164084"/>
+                  </a:cubicBezTo>
+                  <a:cubicBezTo>
+                    <a:pt x="36703" y="164084"/>
+                    <a:pt x="0" y="127381"/>
+                    <a:pt x="0" y="82042"/>
+                  </a:cubicBezTo>
+                  <a:close/>
+                </a:path>
+              </a:pathLst>
+            </a:custGeom>
+            <a:solidFill>
+              <a:srgbClr val="FFB703"/>
+            </a:solidFill>
+          </p:spPr>
+        </p:sp>
+      </p:grpSp>
+      <p:sp>
+        <p:nvSpPr>
+          <p:cNvPr name="TextBox 46" id="46"/>
+          <p:cNvSpPr txBox="true"/>
+          <p:nvPr/>
+        </p:nvSpPr>
+        <p:spPr>
+          <a:xfrm rot="0">
+            <a:off x="10122303" y="6832777"/>
+            <a:ext cx="6926037" cy="442151"/>
+          </a:xfrm>
+          <a:prstGeom prst="rect">
+            <a:avLst/>
+          </a:prstGeom>
+        </p:spPr>
+        <p:txBody>
+          <a:bodyPr anchor="t" rtlCol="false" tIns="0" lIns="0" bIns="0" rIns="0">
+            <a:spAutoFit/>
+          </a:bodyPr>
+          <a:lstStyle/>
+          <a:p>
+            <a:pPr algn="l">
+              <a:lnSpc>
+                <a:spcPts val="3208"/>
+              </a:lnSpc>
+            </a:pPr>
+            <a:r>
+              <a:rPr lang="en-US" sz="2324" spc="-2">
+                <a:solidFill>
+                  <a:srgbClr val="E5E9F0"/>
+                </a:solidFill>
+                <a:latin typeface="Calibri (MS)"/>
+                <a:ea typeface="Calibri (MS)"/>
+                <a:cs typeface="Calibri (MS)"/>
+                <a:sym typeface="Calibri (MS)"/>
+              </a:rPr>
+              <a:t>Extend to later stages instead of just the Stage 1 boss.</a:t>
+            </a:r>
+          </a:p>
+        </p:txBody>
+      </p:sp>
+      <p:grpSp>
+        <p:nvGrpSpPr>
+          <p:cNvPr name="Group 47" id="47"/>
+          <p:cNvGrpSpPr/>
+          <p:nvPr/>
+        </p:nvGrpSpPr>
+        <p:grpSpPr>
+          <a:xfrm rot="0">
+            <a:off x="9779403" y="8048101"/>
+            <a:ext cx="123120" cy="123120"/>
+            <a:chOff x="0" y="0"/>
+            <a:chExt cx="164160" cy="164160"/>
+          </a:xfrm>
+        </p:grpSpPr>
+        <p:sp>
+          <p:nvSpPr>
+            <p:cNvPr name="Freeform 48" id="48"/>
+            <p:cNvSpPr/>
+            <p:nvPr/>
+          </p:nvSpPr>
+          <p:spPr>
+            <a:xfrm flipH="false" flipV="false" rot="0">
+              <a:off x="0" y="0"/>
+              <a:ext cx="164084" cy="164084"/>
+            </a:xfrm>
+            <a:custGeom>
+              <a:avLst/>
+              <a:gdLst/>
+              <a:ahLst/>
+              <a:cxnLst/>
+              <a:rect r="r" b="b" t="t" l="l"/>
+              <a:pathLst>
+                <a:path h="164084" w="164084">
+                  <a:moveTo>
+                    <a:pt x="0" y="82042"/>
+                  </a:moveTo>
+                  <a:cubicBezTo>
+                    <a:pt x="0" y="36703"/>
+                    <a:pt x="36703" y="0"/>
+                    <a:pt x="82042" y="0"/>
+                  </a:cubicBezTo>
+                  <a:cubicBezTo>
+                    <a:pt x="127381" y="0"/>
+                    <a:pt x="164084" y="36703"/>
+                    <a:pt x="164084" y="82042"/>
+                  </a:cubicBezTo>
+                  <a:cubicBezTo>
+                    <a:pt x="164084" y="127381"/>
+                    <a:pt x="127381" y="164084"/>
+                    <a:pt x="82042" y="164084"/>
+                  </a:cubicBezTo>
+                  <a:cubicBezTo>
+                    <a:pt x="36703" y="164084"/>
+                    <a:pt x="0" y="127381"/>
+                    <a:pt x="0" y="82042"/>
+                  </a:cubicBezTo>
+                  <a:close/>
+                </a:path>
+              </a:pathLst>
+            </a:custGeom>
+            <a:solidFill>
+              <a:srgbClr val="FFB703"/>
+            </a:solidFill>
+          </p:spPr>
+        </p:sp>
+      </p:grpSp>
+      <p:sp>
+        <p:nvSpPr>
+          <p:cNvPr name="TextBox 49" id="49"/>
+          <p:cNvSpPr txBox="true"/>
+          <p:nvPr/>
+        </p:nvSpPr>
+        <p:spPr>
+          <a:xfrm rot="0">
+            <a:off x="10122303" y="7760608"/>
+            <a:ext cx="6926037" cy="842201"/>
+          </a:xfrm>
+          <a:prstGeom prst="rect">
+            <a:avLst/>
+          </a:prstGeom>
+        </p:spPr>
+        <p:txBody>
+          <a:bodyPr anchor="t" rtlCol="false" tIns="0" lIns="0" bIns="0" rIns="0">
+            <a:spAutoFit/>
+          </a:bodyPr>
+          <a:lstStyle/>
+          <a:p>
+            <a:pPr algn="l">
+              <a:lnSpc>
+                <a:spcPts val="3208"/>
+              </a:lnSpc>
+            </a:pPr>
+            <a:r>
+              <a:rPr lang="en-US" sz="2324" spc="-2">
+                <a:solidFill>
+                  <a:srgbClr val="E5E9F0"/>
+                </a:solidFill>
+                <a:latin typeface="Calibri (MS)"/>
+                <a:ea typeface="Calibri (MS)"/>
+                <a:cs typeface="Calibri (MS)"/>
+                <a:sym typeface="Calibri (MS)"/>
+              </a:rPr>
+              <a:t>Try other policy architectures (larger frame-stack, recurrent policy) for situations that need longer memory.</a:t>
+            </a:r>
+          </a:p>
+        </p:txBody>
+      </p:sp>
+      <p:grpSp>
+        <p:nvGrpSpPr>
+          <p:cNvPr name="Group 50" id="50"/>
+          <p:cNvGrpSpPr/>
+          <p:nvPr/>
+        </p:nvGrpSpPr>
+        <p:grpSpPr>
+          <a:xfrm rot="0">
+            <a:off x="685800" y="9710823"/>
+            <a:ext cx="4114257" cy="410937"/>
+            <a:chOff x="0" y="0"/>
+            <a:chExt cx="5485676" cy="547916"/>
+          </a:xfrm>
+        </p:grpSpPr>
+        <p:sp>
+          <p:nvSpPr>
+            <p:cNvPr name="Freeform 51" id="51"/>
+            <p:cNvSpPr/>
+            <p:nvPr/>
+          </p:nvSpPr>
+          <p:spPr>
+            <a:xfrm flipH="false" flipV="false" rot="0">
+              <a:off x="0" y="0"/>
+              <a:ext cx="5485680" cy="547920"/>
+            </a:xfrm>
+            <a:custGeom>
+              <a:avLst/>
+              <a:gdLst/>
+              <a:ahLst/>
+              <a:cxnLst/>
+              <a:rect r="r" b="b" t="t" l="l"/>
+              <a:pathLst>
+                <a:path h="547920" w="5485680">
+                  <a:moveTo>
+                    <a:pt x="0" y="0"/>
+                  </a:moveTo>
+                  <a:lnTo>
+                    <a:pt x="5485680" y="0"/>
+                  </a:lnTo>
+                  <a:lnTo>
+                    <a:pt x="5485680" y="547920"/>
+                  </a:lnTo>
+                  <a:lnTo>
+                    <a:pt x="0" y="547920"/>
+                  </a:lnTo>
+                  <a:close/>
+                </a:path>
+              </a:pathLst>
+            </a:custGeom>
+            <a:blipFill>
+              <a:blip r:embed="rId3">
+                <a:alphaModFix amt="0"/>
+              </a:blip>
+              <a:stretch>
+                <a:fillRect l="0" t="-145081" r="0" b="-145080"/>
+              </a:stretch>
+            </a:blipFill>
+          </p:spPr>
+        </p:sp>
+        <p:sp>
+          <p:nvSpPr>
+            <p:cNvPr name="TextBox 52" id="52"/>
+            <p:cNvSpPr txBox="true"/>
+            <p:nvPr/>
+          </p:nvSpPr>
+          <p:spPr>
+            <a:xfrm>
+              <a:off x="0" y="-38100"/>
+              <a:ext cx="5485676" cy="586016"/>
+            </a:xfrm>
+            <a:prstGeom prst="rect">
+              <a:avLst/>
+            </a:prstGeom>
+          </p:spPr>
+          <p:txBody>
+            <a:bodyPr anchor="ctr" rtlCol="false" tIns="0" lIns="0" bIns="0" rIns="0"/>
+            <a:lstStyle/>
+            <a:p>
+              <a:pPr algn="l">
+                <a:lnSpc>
+                  <a:spcPts val="1800"/>
+                </a:lnSpc>
+              </a:pPr>
+              <a:r>
+                <a:rPr lang="en-US" sz="1500" spc="-1">
+                  <a:solidFill>
+                    <a:srgbClr val="9AA6C1"/>
+                  </a:solidFill>
+                  <a:latin typeface="Calibri (MS)"/>
+                  <a:ea typeface="Calibri (MS)"/>
+                  <a:cs typeface="Calibri (MS)"/>
+                  <a:sym typeface="Calibri (MS)"/>
+                </a:rPr>
+                <a:t>Contra-PPO</a:t>
+              </a:r>
+            </a:p>
+          </p:txBody>
+        </p:sp>
+      </p:grpSp>
+      <p:grpSp>
+        <p:nvGrpSpPr>
+          <p:cNvPr name="Group 53" id="53"/>
+          <p:cNvGrpSpPr/>
+          <p:nvPr/>
+        </p:nvGrpSpPr>
+        <p:grpSpPr>
+          <a:xfrm rot="0">
+            <a:off x="16911723" y="9710823"/>
+            <a:ext cx="822417" cy="410937"/>
+            <a:chOff x="0" y="0"/>
+            <a:chExt cx="1096556" cy="547916"/>
+          </a:xfrm>
+        </p:grpSpPr>
+        <p:sp>
+          <p:nvSpPr>
+            <p:cNvPr name="Freeform 54" id="54"/>
+            <p:cNvSpPr/>
+            <p:nvPr/>
+          </p:nvSpPr>
+          <p:spPr>
+            <a:xfrm flipH="false" flipV="false" rot="0">
+              <a:off x="0" y="0"/>
+              <a:ext cx="1096560" cy="547920"/>
+            </a:xfrm>
+            <a:custGeom>
+              <a:avLst/>
+              <a:gdLst/>
+              <a:ahLst/>
+              <a:cxnLst/>
+              <a:rect r="r" b="b" t="t" l="l"/>
+              <a:pathLst>
+                <a:path h="547920" w="1096560">
+                  <a:moveTo>
+                    <a:pt x="0" y="0"/>
+                  </a:moveTo>
+                  <a:lnTo>
+                    <a:pt x="1096560" y="0"/>
+                  </a:lnTo>
+                  <a:lnTo>
+                    <a:pt x="1096560" y="547920"/>
+                  </a:lnTo>
+                  <a:lnTo>
+                    <a:pt x="0" y="547920"/>
+                  </a:lnTo>
+                  <a:close/>
+                </a:path>
+              </a:pathLst>
+            </a:custGeom>
+            <a:blipFill>
+              <a:blip r:embed="rId3">
+                <a:alphaModFix amt="0"/>
+              </a:blip>
+              <a:stretch>
+                <a:fillRect l="-14109" t="0" r="-14109" b="0"/>
+              </a:stretch>
+            </a:blipFill>
+          </p:spPr>
+        </p:sp>
+        <p:sp>
+          <p:nvSpPr>
+            <p:cNvPr name="TextBox 55" id="55"/>
+            <p:cNvSpPr txBox="true"/>
+            <p:nvPr/>
+          </p:nvSpPr>
+          <p:spPr>
+            <a:xfrm>
+              <a:off x="0" y="-38100"/>
+              <a:ext cx="1096556" cy="586016"/>
+            </a:xfrm>
+            <a:prstGeom prst="rect">
+              <a:avLst/>
+            </a:prstGeom>
+          </p:spPr>
+          <p:txBody>
+            <a:bodyPr anchor="ctr" rtlCol="false" tIns="0" lIns="0" bIns="0" rIns="0"/>
+            <a:lstStyle/>
+            <a:p>
+              <a:pPr algn="r">
+                <a:lnSpc>
+                  <a:spcPts val="1800"/>
+                </a:lnSpc>
+              </a:pPr>
+              <a:r>
+                <a:rPr lang="en-US" sz="1500" spc="-1">
+                  <a:solidFill>
+                    <a:srgbClr val="9AA6C1"/>
+                  </a:solidFill>
+                  <a:latin typeface="Calibri (MS)"/>
+                  <a:ea typeface="Calibri (MS)"/>
+                  <a:cs typeface="Calibri (MS)"/>
+                  <a:sym typeface="Calibri (MS)"/>
+                </a:rPr>
+                <a:t>10</a:t>
+              </a:r>
+            </a:p>
+          </p:txBody>
+        </p:sp>
+      </p:grpSp>
+    </p:spTree>
+  </p:cSld>
+  <p:clrMapOvr>
+    <a:masterClrMapping/>
+  </p:clrMapOvr>
+  <p:transition spd="fast">
+    <p:fade/>
+  </p:transition>
+</p:sld>
+</file>
+
+<file path=ppt/slides/slide12.xml><?xml version="1.0" encoding="utf-8"?>
+<p:sld xmlns:p="http://schemas.openxmlformats.org/presentationml/2006/main" xmlns:a="http://schemas.openxmlformats.org/drawingml/2006/main" xmlns:r="http://schemas.openxmlformats.org/officeDocument/2006/relationships">
+  <p:cSld>
+    <p:bg>
+      <p:bgPr>
+        <a:solidFill>
+          <a:srgbClr val="0B132B"/>
+        </a:solidFill>
+      </p:bgPr>
+    </p:bg>
+    <p:spTree>
+      <p:nvGrpSpPr>
+        <p:cNvPr id="1" name=""/>
+        <p:cNvGrpSpPr/>
+        <p:nvPr/>
+      </p:nvGrpSpPr>
+      <p:grpSpPr>
+        <a:xfrm>
+          <a:off x="0" y="0"/>
+          <a:ext cx="0" cy="0"/>
+          <a:chOff x="0" y="0"/>
+          <a:chExt cx="0" cy="0"/>
+        </a:xfrm>
+      </p:grpSpPr>
+      <p:grpSp>
+        <p:nvGrpSpPr>
+          <p:cNvPr name="Group 2" id="2"/>
+          <p:cNvGrpSpPr/>
+          <p:nvPr/>
+        </p:nvGrpSpPr>
+        <p:grpSpPr>
+          <a:xfrm rot="0">
+            <a:off x="822960" y="480060"/>
+            <a:ext cx="10972257" cy="410937"/>
+            <a:chOff x="0" y="0"/>
+            <a:chExt cx="14629676" cy="547916"/>
+          </a:xfrm>
+        </p:grpSpPr>
+        <p:sp>
+          <p:nvSpPr>
+            <p:cNvPr name="Freeform 3" id="3"/>
+            <p:cNvSpPr/>
+            <p:nvPr/>
+          </p:nvSpPr>
+          <p:spPr>
+            <a:xfrm flipH="false" flipV="false" rot="0">
+              <a:off x="0" y="0"/>
+              <a:ext cx="14629681" cy="547920"/>
+            </a:xfrm>
+            <a:custGeom>
+              <a:avLst/>
+              <a:gdLst/>
+              <a:ahLst/>
+              <a:cxnLst/>
+              <a:rect r="r" b="b" t="t" l="l"/>
+              <a:pathLst>
+                <a:path h="547920" w="14629681">
+                  <a:moveTo>
+                    <a:pt x="0" y="0"/>
+                  </a:moveTo>
+                  <a:lnTo>
+                    <a:pt x="14629681" y="0"/>
+                  </a:lnTo>
+                  <a:lnTo>
+                    <a:pt x="14629681" y="547920"/>
+                  </a:lnTo>
+                  <a:lnTo>
+                    <a:pt x="0" y="547920"/>
+                  </a:lnTo>
+                  <a:close/>
+                </a:path>
+              </a:pathLst>
+            </a:custGeom>
+            <a:blipFill>
+              <a:blip r:embed="rId3">
+                <a:alphaModFix amt="0"/>
+              </a:blip>
+              <a:stretch>
+                <a:fillRect l="0" t="-470258" r="0" b="-470257"/>
+              </a:stretch>
+            </a:blipFill>
+          </p:spPr>
+        </p:sp>
+        <p:sp>
+          <p:nvSpPr>
+            <p:cNvPr name="TextBox 4" id="4"/>
+            <p:cNvSpPr txBox="true"/>
+            <p:nvPr/>
+          </p:nvSpPr>
+          <p:spPr>
+            <a:xfrm>
+              <a:off x="0" y="-38100"/>
+              <a:ext cx="14629676" cy="586016"/>
+            </a:xfrm>
+            <a:prstGeom prst="rect">
+              <a:avLst/>
+            </a:prstGeom>
+          </p:spPr>
+          <p:txBody>
+            <a:bodyPr anchor="ctr" rtlCol="false" tIns="0" lIns="0" bIns="0" rIns="0"/>
+            <a:lstStyle/>
+            <a:p>
+              <a:pPr algn="l">
+                <a:lnSpc>
+                  <a:spcPts val="2160"/>
+                </a:lnSpc>
+              </a:pPr>
+              <a:r>
+                <a:rPr lang="en-US" b="true" sz="1800" spc="298">
+                  <a:solidFill>
+                    <a:srgbClr val="FFB703"/>
+                  </a:solidFill>
+                  <a:latin typeface="Calibri (MS) Bold"/>
+                  <a:ea typeface="Calibri (MS) Bold"/>
+                  <a:cs typeface="Calibri (MS) Bold"/>
+                  <a:sym typeface="Calibri (MS) Bold"/>
+                </a:rPr>
                 <a:t>REFERENCES</a:t>
               </a:r>
             </a:p>
@@ -11228,6 +12865,533 @@
   <p:transition spd="fast">
     <p:fade/>
   </p:transition>
+</p:sld>
+</file>
+
+<file path=ppt/slides/slide13.xml><?xml version="1.0" encoding="utf-8"?>
+<p:sld xmlns:p="http://schemas.openxmlformats.org/presentationml/2006/main" xmlns:a="http://schemas.openxmlformats.org/drawingml/2006/main" xmlns:r="http://schemas.openxmlformats.org/officeDocument/2006/relationships">
+  <p:cSld>
+    <p:bg>
+      <p:bgPr>
+        <a:solidFill>
+          <a:srgbClr val="0B132B"/>
+        </a:solidFill>
+      </p:bgPr>
+    </p:bg>
+    <p:spTree>
+      <p:nvGrpSpPr>
+        <p:cNvPr id="1" name=""/>
+        <p:cNvGrpSpPr/>
+        <p:nvPr/>
+      </p:nvGrpSpPr>
+      <p:grpSpPr>
+        <a:xfrm>
+          <a:off x="0" y="0"/>
+          <a:ext cx="0" cy="0"/>
+          <a:chOff x="0" y="0"/>
+          <a:chExt cx="0" cy="0"/>
+        </a:xfrm>
+      </p:grpSpPr>
+      <p:grpSp>
+        <p:nvGrpSpPr>
+          <p:cNvPr name="Group 2" id="2"/>
+          <p:cNvGrpSpPr/>
+          <p:nvPr/>
+        </p:nvGrpSpPr>
+        <p:grpSpPr>
+          <a:xfrm rot="0">
+            <a:off x="822960" y="480060"/>
+            <a:ext cx="10972257" cy="410937"/>
+            <a:chOff x="0" y="0"/>
+            <a:chExt cx="14629676" cy="547916"/>
+          </a:xfrm>
+        </p:grpSpPr>
+        <p:sp>
+          <p:nvSpPr>
+            <p:cNvPr name="Freeform 3" id="3"/>
+            <p:cNvSpPr/>
+            <p:nvPr/>
+          </p:nvSpPr>
+          <p:spPr>
+            <a:xfrm flipH="false" flipV="false" rot="0">
+              <a:off x="0" y="0"/>
+              <a:ext cx="14629681" cy="547920"/>
+            </a:xfrm>
+            <a:custGeom>
+              <a:avLst/>
+              <a:gdLst/>
+              <a:ahLst/>
+              <a:cxnLst/>
+              <a:rect r="r" b="b" t="t" l="l"/>
+              <a:pathLst>
+                <a:path h="547920" w="14629681">
+                  <a:moveTo>
+                    <a:pt x="0" y="0"/>
+                  </a:moveTo>
+                  <a:lnTo>
+                    <a:pt x="14629681" y="0"/>
+                  </a:lnTo>
+                  <a:lnTo>
+                    <a:pt x="14629681" y="547920"/>
+                  </a:lnTo>
+                  <a:lnTo>
+                    <a:pt x="0" y="547920"/>
+                  </a:lnTo>
+                  <a:close/>
+                </a:path>
+              </a:pathLst>
+            </a:custGeom>
+            <a:blipFill>
+              <a:blip r:embed="rId3">
+                <a:alphaModFix amt="0"/>
+              </a:blip>
+              <a:stretch>
+                <a:fillRect l="0" t="-470258" r="0" b="-470257"/>
+              </a:stretch>
+            </a:blipFill>
+          </p:spPr>
+        </p:sp>
+        <p:sp>
+          <p:nvSpPr>
+            <p:cNvPr name="TextBox 4" id="4"/>
+            <p:cNvSpPr txBox="true"/>
+            <p:nvPr/>
+          </p:nvSpPr>
+          <p:spPr>
+            <a:xfrm>
+              <a:off x="0" y="-38100"/>
+              <a:ext cx="14629676" cy="586016"/>
+            </a:xfrm>
+            <a:prstGeom prst="rect">
+              <a:avLst/>
+            </a:prstGeom>
+          </p:spPr>
+          <p:txBody>
+            <a:bodyPr anchor="ctr" rtlCol="false" tIns="0" lIns="0" bIns="0" rIns="0"/>
+            <a:lstStyle/>
+            <a:p>
+              <a:pPr algn="l">
+                <a:lnSpc>
+                  <a:spcPts val="2160"/>
+                </a:lnSpc>
+              </a:pPr>
+              <a:r>
+                <a:rPr lang="en-US" b="true" sz="1800" spc="298">
+                  <a:solidFill>
+                    <a:srgbClr val="FFB703"/>
+                  </a:solidFill>
+                  <a:latin typeface="Calibri (MS) Bold"/>
+                  <a:ea typeface="Calibri (MS) Bold"/>
+                  <a:cs typeface="Calibri (MS) Bold"/>
+                  <a:sym typeface="Calibri (MS) Bold"/>
+                </a:rPr>
+                <a:t>REFERENCES</a:t>
+              </a:r>
+            </a:p>
+          </p:txBody>
+        </p:sp>
+      </p:grpSp>
+      <p:grpSp>
+        <p:nvGrpSpPr>
+          <p:cNvPr name="Group 5" id="5"/>
+          <p:cNvGrpSpPr/>
+          <p:nvPr/>
+        </p:nvGrpSpPr>
+        <p:grpSpPr>
+          <a:xfrm rot="0">
+            <a:off x="822960" y="850497"/>
+            <a:ext cx="15910017" cy="959577"/>
+            <a:chOff x="0" y="0"/>
+            <a:chExt cx="21213356" cy="1279436"/>
+          </a:xfrm>
+        </p:grpSpPr>
+        <p:sp>
+          <p:nvSpPr>
+            <p:cNvPr name="Freeform 6" id="6"/>
+            <p:cNvSpPr/>
+            <p:nvPr/>
+          </p:nvSpPr>
+          <p:spPr>
+            <a:xfrm flipH="false" flipV="false" rot="0">
+              <a:off x="0" y="0"/>
+              <a:ext cx="21213359" cy="1279440"/>
+            </a:xfrm>
+            <a:custGeom>
+              <a:avLst/>
+              <a:gdLst/>
+              <a:ahLst/>
+              <a:cxnLst/>
+              <a:rect r="r" b="b" t="t" l="l"/>
+              <a:pathLst>
+                <a:path h="1279440" w="21213359">
+                  <a:moveTo>
+                    <a:pt x="0" y="0"/>
+                  </a:moveTo>
+                  <a:lnTo>
+                    <a:pt x="21213359" y="0"/>
+                  </a:lnTo>
+                  <a:lnTo>
+                    <a:pt x="21213359" y="1279440"/>
+                  </a:lnTo>
+                  <a:lnTo>
+                    <a:pt x="0" y="1279440"/>
+                  </a:lnTo>
+                  <a:close/>
+                </a:path>
+              </a:pathLst>
+            </a:custGeom>
+            <a:blipFill>
+              <a:blip r:embed="rId3">
+                <a:alphaModFix amt="0"/>
+              </a:blip>
+              <a:stretch>
+                <a:fillRect l="0" t="-273065" r="0" b="-273065"/>
+              </a:stretch>
+            </a:blipFill>
+          </p:spPr>
+        </p:sp>
+        <p:sp>
+          <p:nvSpPr>
+            <p:cNvPr name="TextBox 7" id="7"/>
+            <p:cNvSpPr txBox="true"/>
+            <p:nvPr/>
+          </p:nvSpPr>
+          <p:spPr>
+            <a:xfrm>
+              <a:off x="0" y="-19050"/>
+              <a:ext cx="21213356" cy="1298486"/>
+            </a:xfrm>
+            <a:prstGeom prst="rect">
+              <a:avLst/>
+            </a:prstGeom>
+          </p:spPr>
+          <p:txBody>
+            <a:bodyPr anchor="ctr" rtlCol="false" tIns="0" lIns="0" bIns="0" rIns="0"/>
+            <a:lstStyle/>
+            <a:p>
+              <a:pPr algn="l">
+                <a:lnSpc>
+                  <a:spcPts val="5400"/>
+                </a:lnSpc>
+              </a:pPr>
+              <a:r>
+                <a:rPr lang="en-US" b="true" sz="4500" spc="-1">
+                  <a:solidFill>
+                    <a:srgbClr val="E5E9F0"/>
+                  </a:solidFill>
+                  <a:latin typeface="Cambria Bold"/>
+                  <a:ea typeface="Cambria Bold"/>
+                  <a:cs typeface="Cambria Bold"/>
+                  <a:sym typeface="Cambria Bold"/>
+                </a:rPr>
+                <a:t>References</a:t>
+              </a:r>
+            </a:p>
+          </p:txBody>
+        </p:sp>
+      </p:grpSp>
+      <p:grpSp>
+        <p:nvGrpSpPr>
+          <p:cNvPr name="Group 8" id="8"/>
+          <p:cNvGrpSpPr/>
+          <p:nvPr/>
+        </p:nvGrpSpPr>
+        <p:grpSpPr>
+          <a:xfrm rot="0">
+            <a:off x="685800" y="9710823"/>
+            <a:ext cx="4114257" cy="410937"/>
+            <a:chOff x="0" y="0"/>
+            <a:chExt cx="5485676" cy="547916"/>
+          </a:xfrm>
+        </p:grpSpPr>
+        <p:sp>
+          <p:nvSpPr>
+            <p:cNvPr name="Freeform 9" id="9"/>
+            <p:cNvSpPr/>
+            <p:nvPr/>
+          </p:nvSpPr>
+          <p:spPr>
+            <a:xfrm flipH="false" flipV="false" rot="0">
+              <a:off x="0" y="0"/>
+              <a:ext cx="5485680" cy="547920"/>
+            </a:xfrm>
+            <a:custGeom>
+              <a:avLst/>
+              <a:gdLst/>
+              <a:ahLst/>
+              <a:cxnLst/>
+              <a:rect r="r" b="b" t="t" l="l"/>
+              <a:pathLst>
+                <a:path h="547920" w="5485680">
+                  <a:moveTo>
+                    <a:pt x="0" y="0"/>
+                  </a:moveTo>
+                  <a:lnTo>
+                    <a:pt x="5485680" y="0"/>
+                  </a:lnTo>
+                  <a:lnTo>
+                    <a:pt x="5485680" y="547920"/>
+                  </a:lnTo>
+                  <a:lnTo>
+                    <a:pt x="0" y="547920"/>
+                  </a:lnTo>
+                  <a:close/>
+                </a:path>
+              </a:pathLst>
+            </a:custGeom>
+            <a:blipFill>
+              <a:blip r:embed="rId3">
+                <a:alphaModFix amt="0"/>
+              </a:blip>
+              <a:stretch>
+                <a:fillRect l="0" t="-145081" r="0" b="-145080"/>
+              </a:stretch>
+            </a:blipFill>
+          </p:spPr>
+        </p:sp>
+        <p:sp>
+          <p:nvSpPr>
+            <p:cNvPr name="TextBox 10" id="10"/>
+            <p:cNvSpPr txBox="true"/>
+            <p:nvPr/>
+          </p:nvSpPr>
+          <p:spPr>
+            <a:xfrm>
+              <a:off x="0" y="-38100"/>
+              <a:ext cx="5485676" cy="586016"/>
+            </a:xfrm>
+            <a:prstGeom prst="rect">
+              <a:avLst/>
+            </a:prstGeom>
+          </p:spPr>
+          <p:txBody>
+            <a:bodyPr anchor="ctr" rtlCol="false" tIns="0" lIns="0" bIns="0" rIns="0"/>
+            <a:lstStyle/>
+            <a:p>
+              <a:pPr algn="l">
+                <a:lnSpc>
+                  <a:spcPts val="1800"/>
+                </a:lnSpc>
+              </a:pPr>
+              <a:r>
+                <a:rPr lang="en-US" sz="1500" spc="-1">
+                  <a:solidFill>
+                    <a:srgbClr val="9AA6C1"/>
+                  </a:solidFill>
+                  <a:latin typeface="Calibri (MS)"/>
+                  <a:ea typeface="Calibri (MS)"/>
+                  <a:cs typeface="Calibri (MS)"/>
+                  <a:sym typeface="Calibri (MS)"/>
+                </a:rPr>
+                <a:t>Contra-PPO</a:t>
+              </a:r>
+            </a:p>
+          </p:txBody>
+        </p:sp>
+      </p:grpSp>
+      <p:grpSp>
+        <p:nvGrpSpPr>
+          <p:cNvPr name="Group 11" id="11"/>
+          <p:cNvGrpSpPr/>
+          <p:nvPr/>
+        </p:nvGrpSpPr>
+        <p:grpSpPr>
+          <a:xfrm rot="0">
+            <a:off x="16911723" y="9710823"/>
+            <a:ext cx="822417" cy="410937"/>
+            <a:chOff x="0" y="0"/>
+            <a:chExt cx="1096556" cy="547916"/>
+          </a:xfrm>
+        </p:grpSpPr>
+        <p:sp>
+          <p:nvSpPr>
+            <p:cNvPr name="Freeform 12" id="12"/>
+            <p:cNvSpPr/>
+            <p:nvPr/>
+          </p:nvSpPr>
+          <p:spPr>
+            <a:xfrm flipH="false" flipV="false" rot="0">
+              <a:off x="0" y="0"/>
+              <a:ext cx="1096560" cy="547920"/>
+            </a:xfrm>
+            <a:custGeom>
+              <a:avLst/>
+              <a:gdLst/>
+              <a:ahLst/>
+              <a:cxnLst/>
+              <a:rect r="r" b="b" t="t" l="l"/>
+              <a:pathLst>
+                <a:path h="547920" w="1096560">
+                  <a:moveTo>
+                    <a:pt x="0" y="0"/>
+                  </a:moveTo>
+                  <a:lnTo>
+                    <a:pt x="1096560" y="0"/>
+                  </a:lnTo>
+                  <a:lnTo>
+                    <a:pt x="1096560" y="547920"/>
+                  </a:lnTo>
+                  <a:lnTo>
+                    <a:pt x="0" y="547920"/>
+                  </a:lnTo>
+                  <a:close/>
+                </a:path>
+              </a:pathLst>
+            </a:custGeom>
+            <a:blipFill>
+              <a:blip r:embed="rId3">
+                <a:alphaModFix amt="0"/>
+              </a:blip>
+              <a:stretch>
+                <a:fillRect l="-14109" t="0" r="-14109" b="0"/>
+              </a:stretch>
+            </a:blipFill>
+          </p:spPr>
+        </p:sp>
+        <p:sp>
+          <p:nvSpPr>
+            <p:cNvPr name="TextBox 13" id="13"/>
+            <p:cNvSpPr txBox="true"/>
+            <p:nvPr/>
+          </p:nvSpPr>
+          <p:spPr>
+            <a:xfrm>
+              <a:off x="0" y="-38100"/>
+              <a:ext cx="1096556" cy="586016"/>
+            </a:xfrm>
+            <a:prstGeom prst="rect">
+              <a:avLst/>
+            </a:prstGeom>
+          </p:spPr>
+          <p:txBody>
+            <a:bodyPr anchor="ctr" rtlCol="false" tIns="0" lIns="0" bIns="0" rIns="0"/>
+            <a:lstStyle/>
+            <a:p>
+              <a:pPr algn="r">
+                <a:lnSpc>
+                  <a:spcPts val="1800"/>
+                </a:lnSpc>
+              </a:pPr>
+              <a:r>
+                <a:rPr lang="en-US" sz="1500" spc="-1">
+                  <a:solidFill>
+                    <a:srgbClr val="9AA6C1"/>
+                  </a:solidFill>
+                  <a:latin typeface="Calibri (MS)"/>
+                  <a:ea typeface="Calibri (MS)"/>
+                  <a:cs typeface="Calibri (MS)"/>
+                  <a:sym typeface="Calibri (MS)"/>
+                </a:rPr>
+                <a:t>11</a:t>
+              </a:r>
+            </a:p>
+          </p:txBody>
+        </p:sp>
+      </p:grpSp>
+      <p:grpSp>
+        <p:nvGrpSpPr>
+          <p:cNvPr name="Group 14" id="14"/>
+          <p:cNvGrpSpPr/>
+          <p:nvPr/>
+        </p:nvGrpSpPr>
+        <p:grpSpPr>
+          <a:xfrm rot="0">
+            <a:off x="1412915" y="3195750"/>
+            <a:ext cx="15910017" cy="5129397"/>
+            <a:chOff x="0" y="0"/>
+            <a:chExt cx="21213356" cy="6839196"/>
+          </a:xfrm>
+        </p:grpSpPr>
+        <p:sp>
+          <p:nvSpPr>
+            <p:cNvPr name="Freeform 15" id="15"/>
+            <p:cNvSpPr/>
+            <p:nvPr/>
+          </p:nvSpPr>
+          <p:spPr>
+            <a:xfrm flipH="false" flipV="false" rot="0">
+              <a:off x="0" y="0"/>
+              <a:ext cx="21213359" cy="6839200"/>
+            </a:xfrm>
+            <a:custGeom>
+              <a:avLst/>
+              <a:gdLst/>
+              <a:ahLst/>
+              <a:cxnLst/>
+              <a:rect r="r" b="b" t="t" l="l"/>
+              <a:pathLst>
+                <a:path h="6839200" w="21213359">
+                  <a:moveTo>
+                    <a:pt x="0" y="0"/>
+                  </a:moveTo>
+                  <a:lnTo>
+                    <a:pt x="21213359" y="0"/>
+                  </a:lnTo>
+                  <a:lnTo>
+                    <a:pt x="21213359" y="6839200"/>
+                  </a:lnTo>
+                  <a:lnTo>
+                    <a:pt x="0" y="6839200"/>
+                  </a:lnTo>
+                  <a:close/>
+                </a:path>
+              </a:pathLst>
+            </a:custGeom>
+            <a:blipFill>
+              <a:blip r:embed="rId3">
+                <a:alphaModFix amt="0"/>
+              </a:blip>
+              <a:stretch>
+                <a:fillRect l="0" t="-51083" r="0" b="30208"/>
+              </a:stretch>
+            </a:blipFill>
+          </p:spPr>
+        </p:sp>
+        <p:sp>
+          <p:nvSpPr>
+            <p:cNvPr name="TextBox 16" id="16"/>
+            <p:cNvSpPr txBox="true"/>
+            <p:nvPr/>
+          </p:nvSpPr>
+          <p:spPr>
+            <a:xfrm>
+              <a:off x="0" y="-9525"/>
+              <a:ext cx="21213356" cy="6848721"/>
+            </a:xfrm>
+            <a:prstGeom prst="rect">
+              <a:avLst/>
+            </a:prstGeom>
+          </p:spPr>
+          <p:txBody>
+            <a:bodyPr anchor="ctr" rtlCol="false" tIns="0" lIns="0" bIns="0" rIns="0"/>
+            <a:lstStyle/>
+            <a:p>
+              <a:pPr algn="l">
+                <a:lnSpc>
+                  <a:spcPts val="8399"/>
+                </a:lnSpc>
+              </a:pPr>
+              <a:r>
+                <a:rPr lang="en-US" b="true" sz="6999" spc="-2">
+                  <a:solidFill>
+                    <a:srgbClr val="E5E9F0"/>
+                  </a:solidFill>
+                  <a:latin typeface="Cambria Bold"/>
+                  <a:ea typeface="Cambria Bold"/>
+                  <a:cs typeface="Cambria Bold"/>
+                  <a:sym typeface="Cambria Bold"/>
+                </a:rPr>
+                <a:t>Thank you for watching presentation</a:t>
+              </a:r>
+            </a:p>
+          </p:txBody>
+        </p:sp>
+      </p:grpSp>
+    </p:spTree>
+  </p:cSld>
+  <p:clrMapOvr>
+    <a:masterClrMapping/>
+  </p:clrMapOvr>
 </p:sld>
 </file>
 
@@ -32954,8 +35118,8 @@
         </p:blipFill>
         <p:spPr>
           <a:xfrm rot="0">
-            <a:off x="-164538" y="1412802"/>
-            <a:ext cx="11849976" cy="6569316"/>
+            <a:off x="-332293" y="1211775"/>
+            <a:ext cx="10918220" cy="6052775"/>
           </a:xfrm>
           <a:prstGeom prst="rect">
             <a:avLst/>
@@ -32970,881 +35134,835 @@
         </p:nvGrpSpPr>
         <p:grpSpPr>
           <a:xfrm rot="0">
-            <a:off x="11109960" y="2400300"/>
-            <a:ext cx="6349860" cy="1302477"/>
+            <a:off x="10780988" y="3063175"/>
+            <a:ext cx="7959282" cy="5899041"/>
             <a:chOff x="0" y="0"/>
-            <a:chExt cx="8466480" cy="1736636"/>
+            <a:chExt cx="10612377" cy="7865388"/>
           </a:xfrm>
         </p:grpSpPr>
-        <p:sp>
-          <p:nvSpPr>
-            <p:cNvPr name="Freeform 10" id="10"/>
-            <p:cNvSpPr/>
-            <p:nvPr/>
-          </p:nvSpPr>
-          <p:spPr>
-            <a:xfrm flipH="false" flipV="false" rot="0">
+        <p:grpSp>
+          <p:nvGrpSpPr>
+            <p:cNvPr name="Group 10" id="10"/>
+            <p:cNvGrpSpPr/>
+            <p:nvPr/>
+          </p:nvGrpSpPr>
+          <p:grpSpPr>
+            <a:xfrm rot="0">
               <a:off x="0" y="0"/>
-              <a:ext cx="8466582" cy="1736725"/>
-            </a:xfrm>
-            <a:custGeom>
-              <a:avLst/>
-              <a:gdLst/>
-              <a:ahLst/>
-              <a:cxnLst/>
-              <a:rect r="r" b="b" t="t" l="l"/>
-              <a:pathLst>
-                <a:path h="1736725" w="8466582">
-                  <a:moveTo>
-                    <a:pt x="0" y="146304"/>
-                  </a:moveTo>
-                  <a:cubicBezTo>
-                    <a:pt x="0" y="65532"/>
-                    <a:pt x="65532" y="0"/>
-                    <a:pt x="146304" y="0"/>
-                  </a:cubicBezTo>
-                  <a:lnTo>
-                    <a:pt x="8320278" y="0"/>
-                  </a:lnTo>
-                  <a:cubicBezTo>
-                    <a:pt x="8401050" y="0"/>
-                    <a:pt x="8466582" y="65532"/>
-                    <a:pt x="8466582" y="146304"/>
-                  </a:cubicBezTo>
-                  <a:lnTo>
-                    <a:pt x="8466582" y="1590421"/>
-                  </a:lnTo>
-                  <a:cubicBezTo>
-                    <a:pt x="8466582" y="1671193"/>
-                    <a:pt x="8401050" y="1736725"/>
-                    <a:pt x="8320278" y="1736725"/>
-                  </a:cubicBezTo>
-                  <a:lnTo>
-                    <a:pt x="146304" y="1736725"/>
-                  </a:lnTo>
-                  <a:cubicBezTo>
-                    <a:pt x="65532" y="1736598"/>
-                    <a:pt x="0" y="1671193"/>
-                    <a:pt x="0" y="1590421"/>
-                  </a:cubicBezTo>
-                  <a:close/>
-                </a:path>
-              </a:pathLst>
-            </a:custGeom>
-            <a:solidFill>
-              <a:srgbClr val="16213E"/>
-            </a:solidFill>
-          </p:spPr>
-        </p:sp>
+              <a:ext cx="5417647" cy="2371411"/>
+              <a:chOff x="0" y="0"/>
+              <a:chExt cx="3967462" cy="1736636"/>
+            </a:xfrm>
+          </p:grpSpPr>
+          <p:sp>
+            <p:nvSpPr>
+              <p:cNvPr name="Freeform 11" id="11"/>
+              <p:cNvSpPr/>
+              <p:nvPr/>
+            </p:nvSpPr>
+            <p:spPr>
+              <a:xfrm flipH="false" flipV="false" rot="0">
+                <a:off x="0" y="0"/>
+                <a:ext cx="3967564" cy="1736725"/>
+              </a:xfrm>
+              <a:custGeom>
+                <a:avLst/>
+                <a:gdLst/>
+                <a:ahLst/>
+                <a:cxnLst/>
+                <a:rect r="r" b="b" t="t" l="l"/>
+                <a:pathLst>
+                  <a:path h="1736725" w="3967564">
+                    <a:moveTo>
+                      <a:pt x="0" y="146304"/>
+                    </a:moveTo>
+                    <a:cubicBezTo>
+                      <a:pt x="0" y="65532"/>
+                      <a:pt x="30709" y="0"/>
+                      <a:pt x="68559" y="0"/>
+                    </a:cubicBezTo>
+                    <a:lnTo>
+                      <a:pt x="3898950" y="0"/>
+                    </a:lnTo>
+                    <a:cubicBezTo>
+                      <a:pt x="3936800" y="0"/>
+                      <a:pt x="3967564" y="65532"/>
+                      <a:pt x="3967564" y="146304"/>
+                    </a:cubicBezTo>
+                    <a:lnTo>
+                      <a:pt x="3967564" y="1590421"/>
+                    </a:lnTo>
+                    <a:cubicBezTo>
+                      <a:pt x="3967564" y="1671193"/>
+                      <a:pt x="3936800" y="1736725"/>
+                      <a:pt x="3898950" y="1736725"/>
+                    </a:cubicBezTo>
+                    <a:lnTo>
+                      <a:pt x="68559" y="1736725"/>
+                    </a:lnTo>
+                    <a:cubicBezTo>
+                      <a:pt x="30709" y="1736598"/>
+                      <a:pt x="0" y="1671193"/>
+                      <a:pt x="0" y="1590421"/>
+                    </a:cubicBezTo>
+                    <a:close/>
+                  </a:path>
+                </a:pathLst>
+              </a:custGeom>
+              <a:solidFill>
+                <a:srgbClr val="16213E"/>
+              </a:solidFill>
+            </p:spPr>
+          </p:sp>
+        </p:grpSp>
+        <p:grpSp>
+          <p:nvGrpSpPr>
+            <p:cNvPr name="Group 12" id="12"/>
+            <p:cNvGrpSpPr/>
+            <p:nvPr/>
+          </p:nvGrpSpPr>
+          <p:grpSpPr>
+            <a:xfrm rot="0">
+              <a:off x="624316" y="199590"/>
+              <a:ext cx="4993536" cy="1372506"/>
+              <a:chOff x="0" y="0"/>
+              <a:chExt cx="3656876" cy="1005116"/>
+            </a:xfrm>
+          </p:grpSpPr>
+          <p:sp>
+            <p:nvSpPr>
+              <p:cNvPr name="Freeform 13" id="13"/>
+              <p:cNvSpPr/>
+              <p:nvPr/>
+            </p:nvSpPr>
+            <p:spPr>
+              <a:xfrm flipH="false" flipV="false" rot="0">
+                <a:off x="0" y="0"/>
+                <a:ext cx="3656880" cy="1005120"/>
+              </a:xfrm>
+              <a:custGeom>
+                <a:avLst/>
+                <a:gdLst/>
+                <a:ahLst/>
+                <a:cxnLst/>
+                <a:rect r="r" b="b" t="t" l="l"/>
+                <a:pathLst>
+                  <a:path h="1005120" w="3656880">
+                    <a:moveTo>
+                      <a:pt x="0" y="0"/>
+                    </a:moveTo>
+                    <a:lnTo>
+                      <a:pt x="3656880" y="0"/>
+                    </a:lnTo>
+                    <a:lnTo>
+                      <a:pt x="3656880" y="1005120"/>
+                    </a:lnTo>
+                    <a:lnTo>
+                      <a:pt x="0" y="1005120"/>
+                    </a:lnTo>
+                    <a:close/>
+                  </a:path>
+                </a:pathLst>
+              </a:custGeom>
+              <a:blipFill>
+                <a:blip r:embed="rId3">
+                  <a:alphaModFix amt="0"/>
+                </a:blip>
+                <a:stretch>
+                  <a:fillRect l="0" t="-20891" r="0" b="-20891"/>
+                </a:stretch>
+              </a:blipFill>
+            </p:spPr>
+          </p:sp>
+          <p:sp>
+            <p:nvSpPr>
+              <p:cNvPr name="TextBox 14" id="14"/>
+              <p:cNvSpPr txBox="true"/>
+              <p:nvPr/>
+            </p:nvSpPr>
+            <p:spPr>
+              <a:xfrm>
+                <a:off x="0" y="0"/>
+                <a:ext cx="3656876" cy="1005116"/>
+              </a:xfrm>
+              <a:prstGeom prst="rect">
+                <a:avLst/>
+              </a:prstGeom>
+            </p:spPr>
+            <p:txBody>
+              <a:bodyPr anchor="ctr" rtlCol="false" tIns="0" lIns="0" bIns="0" rIns="0"/>
+              <a:lstStyle/>
+              <a:p>
+                <a:pPr algn="l">
+                  <a:lnSpc>
+                    <a:spcPts val="4679"/>
+                  </a:lnSpc>
+                </a:pPr>
+                <a:r>
+                  <a:rPr lang="en-US" b="true" sz="3899" spc="-1">
+                    <a:solidFill>
+                      <a:srgbClr val="06D6A0"/>
+                    </a:solidFill>
+                    <a:latin typeface="Cambria Bold"/>
+                    <a:ea typeface="Cambria Bold"/>
+                    <a:cs typeface="Cambria Bold"/>
+                    <a:sym typeface="Cambria Bold"/>
+                  </a:rPr>
+                  <a:t>1.56K</a:t>
+                </a:r>
+              </a:p>
+            </p:txBody>
+          </p:sp>
+        </p:grpSp>
+        <p:grpSp>
+          <p:nvGrpSpPr>
+            <p:cNvPr name="Group 15" id="15"/>
+            <p:cNvGrpSpPr/>
+            <p:nvPr/>
+          </p:nvGrpSpPr>
+          <p:grpSpPr>
+            <a:xfrm rot="0">
+              <a:off x="624316" y="1548493"/>
+              <a:ext cx="9988061" cy="748190"/>
+              <a:chOff x="0" y="0"/>
+              <a:chExt cx="7314476" cy="547916"/>
+            </a:xfrm>
+          </p:grpSpPr>
+          <p:sp>
+            <p:nvSpPr>
+              <p:cNvPr name="Freeform 16" id="16"/>
+              <p:cNvSpPr/>
+              <p:nvPr/>
+            </p:nvSpPr>
+            <p:spPr>
+              <a:xfrm flipH="false" flipV="false" rot="0">
+                <a:off x="0" y="0"/>
+                <a:ext cx="7314480" cy="547920"/>
+              </a:xfrm>
+              <a:custGeom>
+                <a:avLst/>
+                <a:gdLst/>
+                <a:ahLst/>
+                <a:cxnLst/>
+                <a:rect r="r" b="b" t="t" l="l"/>
+                <a:pathLst>
+                  <a:path h="547920" w="7314480">
+                    <a:moveTo>
+                      <a:pt x="0" y="0"/>
+                    </a:moveTo>
+                    <a:lnTo>
+                      <a:pt x="7314480" y="0"/>
+                    </a:lnTo>
+                    <a:lnTo>
+                      <a:pt x="7314480" y="547920"/>
+                    </a:lnTo>
+                    <a:lnTo>
+                      <a:pt x="0" y="547920"/>
+                    </a:lnTo>
+                    <a:close/>
+                  </a:path>
+                </a:pathLst>
+              </a:custGeom>
+              <a:blipFill>
+                <a:blip r:embed="rId3">
+                  <a:alphaModFix amt="0"/>
+                </a:blip>
+                <a:stretch>
+                  <a:fillRect l="0" t="-210116" r="0" b="-210115"/>
+                </a:stretch>
+              </a:blipFill>
+            </p:spPr>
+          </p:sp>
+          <p:sp>
+            <p:nvSpPr>
+              <p:cNvPr name="TextBox 17" id="17"/>
+              <p:cNvSpPr txBox="true"/>
+              <p:nvPr/>
+            </p:nvSpPr>
+            <p:spPr>
+              <a:xfrm>
+                <a:off x="0" y="-19050"/>
+                <a:ext cx="7314476" cy="566966"/>
+              </a:xfrm>
+              <a:prstGeom prst="rect">
+                <a:avLst/>
+              </a:prstGeom>
+            </p:spPr>
+            <p:txBody>
+              <a:bodyPr anchor="ctr" rtlCol="false" tIns="0" lIns="0" bIns="0" rIns="0"/>
+              <a:lstStyle/>
+              <a:p>
+                <a:pPr algn="l">
+                  <a:lnSpc>
+                    <a:spcPts val="1890"/>
+                  </a:lnSpc>
+                </a:pPr>
+                <a:r>
+                  <a:rPr lang="en-US" sz="1575" spc="-1">
+                    <a:solidFill>
+                      <a:srgbClr val="9AA6C1"/>
+                    </a:solidFill>
+                    <a:latin typeface="Calibri (MS)"/>
+                    <a:ea typeface="Calibri (MS)"/>
+                    <a:cs typeface="Calibri (MS)"/>
+                    <a:sym typeface="Calibri (MS)"/>
+                  </a:rPr>
+                  <a:t>logged episodes (rollout)</a:t>
+                </a:r>
+              </a:p>
+            </p:txBody>
+          </p:sp>
+        </p:grpSp>
+        <p:grpSp>
+          <p:nvGrpSpPr>
+            <p:cNvPr name="Group 18" id="18"/>
+            <p:cNvGrpSpPr/>
+            <p:nvPr/>
+          </p:nvGrpSpPr>
+          <p:grpSpPr>
+            <a:xfrm rot="0">
+              <a:off x="0" y="2746989"/>
+              <a:ext cx="5417647" cy="2371411"/>
+              <a:chOff x="0" y="0"/>
+              <a:chExt cx="3967462" cy="1736636"/>
+            </a:xfrm>
+          </p:grpSpPr>
+          <p:sp>
+            <p:nvSpPr>
+              <p:cNvPr name="Freeform 19" id="19"/>
+              <p:cNvSpPr/>
+              <p:nvPr/>
+            </p:nvSpPr>
+            <p:spPr>
+              <a:xfrm flipH="false" flipV="false" rot="0">
+                <a:off x="0" y="0"/>
+                <a:ext cx="3967564" cy="1736725"/>
+              </a:xfrm>
+              <a:custGeom>
+                <a:avLst/>
+                <a:gdLst/>
+                <a:ahLst/>
+                <a:cxnLst/>
+                <a:rect r="r" b="b" t="t" l="l"/>
+                <a:pathLst>
+                  <a:path h="1736725" w="3967564">
+                    <a:moveTo>
+                      <a:pt x="0" y="146304"/>
+                    </a:moveTo>
+                    <a:cubicBezTo>
+                      <a:pt x="0" y="65532"/>
+                      <a:pt x="30709" y="0"/>
+                      <a:pt x="68559" y="0"/>
+                    </a:cubicBezTo>
+                    <a:lnTo>
+                      <a:pt x="3898950" y="0"/>
+                    </a:lnTo>
+                    <a:cubicBezTo>
+                      <a:pt x="3936800" y="0"/>
+                      <a:pt x="3967564" y="65532"/>
+                      <a:pt x="3967564" y="146304"/>
+                    </a:cubicBezTo>
+                    <a:lnTo>
+                      <a:pt x="3967564" y="1590421"/>
+                    </a:lnTo>
+                    <a:cubicBezTo>
+                      <a:pt x="3967564" y="1671193"/>
+                      <a:pt x="3936800" y="1736725"/>
+                      <a:pt x="3898950" y="1736725"/>
+                    </a:cubicBezTo>
+                    <a:lnTo>
+                      <a:pt x="68559" y="1736725"/>
+                    </a:lnTo>
+                    <a:cubicBezTo>
+                      <a:pt x="30709" y="1736598"/>
+                      <a:pt x="0" y="1671193"/>
+                      <a:pt x="0" y="1590421"/>
+                    </a:cubicBezTo>
+                    <a:close/>
+                  </a:path>
+                </a:pathLst>
+              </a:custGeom>
+              <a:solidFill>
+                <a:srgbClr val="16213E"/>
+              </a:solidFill>
+            </p:spPr>
+          </p:sp>
+        </p:grpSp>
+        <p:grpSp>
+          <p:nvGrpSpPr>
+            <p:cNvPr name="Group 20" id="20"/>
+            <p:cNvGrpSpPr/>
+            <p:nvPr/>
+          </p:nvGrpSpPr>
+          <p:grpSpPr>
+            <a:xfrm rot="0">
+              <a:off x="624316" y="2946579"/>
+              <a:ext cx="4993536" cy="1372506"/>
+              <a:chOff x="0" y="0"/>
+              <a:chExt cx="3656876" cy="1005116"/>
+            </a:xfrm>
+          </p:grpSpPr>
+          <p:sp>
+            <p:nvSpPr>
+              <p:cNvPr name="Freeform 21" id="21"/>
+              <p:cNvSpPr/>
+              <p:nvPr/>
+            </p:nvSpPr>
+            <p:spPr>
+              <a:xfrm flipH="false" flipV="false" rot="0">
+                <a:off x="0" y="0"/>
+                <a:ext cx="3656880" cy="1005120"/>
+              </a:xfrm>
+              <a:custGeom>
+                <a:avLst/>
+                <a:gdLst/>
+                <a:ahLst/>
+                <a:cxnLst/>
+                <a:rect r="r" b="b" t="t" l="l"/>
+                <a:pathLst>
+                  <a:path h="1005120" w="3656880">
+                    <a:moveTo>
+                      <a:pt x="0" y="0"/>
+                    </a:moveTo>
+                    <a:lnTo>
+                      <a:pt x="3656880" y="0"/>
+                    </a:lnTo>
+                    <a:lnTo>
+                      <a:pt x="3656880" y="1005120"/>
+                    </a:lnTo>
+                    <a:lnTo>
+                      <a:pt x="0" y="1005120"/>
+                    </a:lnTo>
+                    <a:close/>
+                  </a:path>
+                </a:pathLst>
+              </a:custGeom>
+              <a:blipFill>
+                <a:blip r:embed="rId3">
+                  <a:alphaModFix amt="0"/>
+                </a:blip>
+                <a:stretch>
+                  <a:fillRect l="0" t="-20891" r="0" b="-20891"/>
+                </a:stretch>
+              </a:blipFill>
+            </p:spPr>
+          </p:sp>
+          <p:sp>
+            <p:nvSpPr>
+              <p:cNvPr name="TextBox 22" id="22"/>
+              <p:cNvSpPr txBox="true"/>
+              <p:nvPr/>
+            </p:nvSpPr>
+            <p:spPr>
+              <a:xfrm>
+                <a:off x="0" y="0"/>
+                <a:ext cx="3656876" cy="1005116"/>
+              </a:xfrm>
+              <a:prstGeom prst="rect">
+                <a:avLst/>
+              </a:prstGeom>
+            </p:spPr>
+            <p:txBody>
+              <a:bodyPr anchor="ctr" rtlCol="false" tIns="0" lIns="0" bIns="0" rIns="0"/>
+              <a:lstStyle/>
+              <a:p>
+                <a:pPr algn="l">
+                  <a:lnSpc>
+                    <a:spcPts val="4679"/>
+                  </a:lnSpc>
+                </a:pPr>
+                <a:r>
+                  <a:rPr lang="en-US" b="true" sz="3899" spc="-1">
+                    <a:solidFill>
+                      <a:srgbClr val="06D6A0"/>
+                    </a:solidFill>
+                    <a:latin typeface="Cambria Bold"/>
+                    <a:ea typeface="Cambria Bold"/>
+                    <a:cs typeface="Cambria Bold"/>
+                    <a:sym typeface="Cambria Bold"/>
+                  </a:rPr>
+                  <a:t>6.62M</a:t>
+                </a:r>
+              </a:p>
+            </p:txBody>
+          </p:sp>
+        </p:grpSp>
+        <p:grpSp>
+          <p:nvGrpSpPr>
+            <p:cNvPr name="Group 23" id="23"/>
+            <p:cNvGrpSpPr/>
+            <p:nvPr/>
+          </p:nvGrpSpPr>
+          <p:grpSpPr>
+            <a:xfrm rot="0">
+              <a:off x="624316" y="4295482"/>
+              <a:ext cx="9613472" cy="699043"/>
+              <a:chOff x="0" y="0"/>
+              <a:chExt cx="7314476" cy="531871"/>
+            </a:xfrm>
+          </p:grpSpPr>
+          <p:sp>
+            <p:nvSpPr>
+              <p:cNvPr name="Freeform 24" id="24"/>
+              <p:cNvSpPr/>
+              <p:nvPr/>
+            </p:nvSpPr>
+            <p:spPr>
+              <a:xfrm flipH="false" flipV="false" rot="0">
+                <a:off x="0" y="0"/>
+                <a:ext cx="7314480" cy="531875"/>
+              </a:xfrm>
+              <a:custGeom>
+                <a:avLst/>
+                <a:gdLst/>
+                <a:ahLst/>
+                <a:cxnLst/>
+                <a:rect r="r" b="b" t="t" l="l"/>
+                <a:pathLst>
+                  <a:path h="531875" w="7314480">
+                    <a:moveTo>
+                      <a:pt x="0" y="0"/>
+                    </a:moveTo>
+                    <a:lnTo>
+                      <a:pt x="7314480" y="0"/>
+                    </a:lnTo>
+                    <a:lnTo>
+                      <a:pt x="7314480" y="531875"/>
+                    </a:lnTo>
+                    <a:lnTo>
+                      <a:pt x="0" y="531875"/>
+                    </a:lnTo>
+                    <a:close/>
+                  </a:path>
+                </a:pathLst>
+              </a:custGeom>
+              <a:blipFill>
+                <a:blip r:embed="rId3">
+                  <a:alphaModFix amt="0"/>
+                </a:blip>
+                <a:stretch>
+                  <a:fillRect l="0" t="-216454" r="0" b="-219470"/>
+                </a:stretch>
+              </a:blipFill>
+            </p:spPr>
+          </p:sp>
+          <p:sp>
+            <p:nvSpPr>
+              <p:cNvPr name="TextBox 25" id="25"/>
+              <p:cNvSpPr txBox="true"/>
+              <p:nvPr/>
+            </p:nvSpPr>
+            <p:spPr>
+              <a:xfrm>
+                <a:off x="0" y="-19050"/>
+                <a:ext cx="7314476" cy="550921"/>
+              </a:xfrm>
+              <a:prstGeom prst="rect">
+                <a:avLst/>
+              </a:prstGeom>
+            </p:spPr>
+            <p:txBody>
+              <a:bodyPr anchor="ctr" rtlCol="false" tIns="0" lIns="0" bIns="0" rIns="0"/>
+              <a:lstStyle/>
+              <a:p>
+                <a:pPr algn="l">
+                  <a:lnSpc>
+                    <a:spcPts val="1890"/>
+                  </a:lnSpc>
+                </a:pPr>
+                <a:r>
+                  <a:rPr lang="en-US" sz="1575" spc="-1">
+                    <a:solidFill>
+                      <a:srgbClr val="9AA6C1"/>
+                    </a:solidFill>
+                    <a:latin typeface="Calibri (MS)"/>
+                    <a:ea typeface="Calibri (MS)"/>
+                    <a:cs typeface="Calibri (MS)"/>
+                    <a:sym typeface="Calibri (MS)"/>
+                  </a:rPr>
+                  <a:t>training timesteps</a:t>
+                </a:r>
+              </a:p>
+            </p:txBody>
+          </p:sp>
+        </p:grpSp>
+        <p:grpSp>
+          <p:nvGrpSpPr>
+            <p:cNvPr name="Group 26" id="26"/>
+            <p:cNvGrpSpPr/>
+            <p:nvPr/>
+          </p:nvGrpSpPr>
+          <p:grpSpPr>
+            <a:xfrm rot="0">
+              <a:off x="0" y="5493977"/>
+              <a:ext cx="5417647" cy="2371411"/>
+              <a:chOff x="0" y="0"/>
+              <a:chExt cx="3967462" cy="1736636"/>
+            </a:xfrm>
+          </p:grpSpPr>
+          <p:sp>
+            <p:nvSpPr>
+              <p:cNvPr name="Freeform 27" id="27"/>
+              <p:cNvSpPr/>
+              <p:nvPr/>
+            </p:nvSpPr>
+            <p:spPr>
+              <a:xfrm flipH="false" flipV="false" rot="0">
+                <a:off x="0" y="0"/>
+                <a:ext cx="3967564" cy="1736725"/>
+              </a:xfrm>
+              <a:custGeom>
+                <a:avLst/>
+                <a:gdLst/>
+                <a:ahLst/>
+                <a:cxnLst/>
+                <a:rect r="r" b="b" t="t" l="l"/>
+                <a:pathLst>
+                  <a:path h="1736725" w="3967564">
+                    <a:moveTo>
+                      <a:pt x="0" y="146304"/>
+                    </a:moveTo>
+                    <a:cubicBezTo>
+                      <a:pt x="0" y="65532"/>
+                      <a:pt x="30709" y="0"/>
+                      <a:pt x="68559" y="0"/>
+                    </a:cubicBezTo>
+                    <a:lnTo>
+                      <a:pt x="3898950" y="0"/>
+                    </a:lnTo>
+                    <a:cubicBezTo>
+                      <a:pt x="3936800" y="0"/>
+                      <a:pt x="3967564" y="65532"/>
+                      <a:pt x="3967564" y="146304"/>
+                    </a:cubicBezTo>
+                    <a:lnTo>
+                      <a:pt x="3967564" y="1590421"/>
+                    </a:lnTo>
+                    <a:cubicBezTo>
+                      <a:pt x="3967564" y="1671193"/>
+                      <a:pt x="3936800" y="1736725"/>
+                      <a:pt x="3898950" y="1736725"/>
+                    </a:cubicBezTo>
+                    <a:lnTo>
+                      <a:pt x="68559" y="1736725"/>
+                    </a:lnTo>
+                    <a:cubicBezTo>
+                      <a:pt x="30709" y="1736598"/>
+                      <a:pt x="0" y="1671193"/>
+                      <a:pt x="0" y="1590421"/>
+                    </a:cubicBezTo>
+                    <a:close/>
+                  </a:path>
+                </a:pathLst>
+              </a:custGeom>
+              <a:solidFill>
+                <a:srgbClr val="16213E"/>
+              </a:solidFill>
+            </p:spPr>
+          </p:sp>
+        </p:grpSp>
+        <p:grpSp>
+          <p:nvGrpSpPr>
+            <p:cNvPr name="Group 28" id="28"/>
+            <p:cNvGrpSpPr/>
+            <p:nvPr/>
+          </p:nvGrpSpPr>
+          <p:grpSpPr>
+            <a:xfrm rot="0">
+              <a:off x="624316" y="5693567"/>
+              <a:ext cx="4993536" cy="1372506"/>
+              <a:chOff x="0" y="0"/>
+              <a:chExt cx="3656876" cy="1005116"/>
+            </a:xfrm>
+          </p:grpSpPr>
+          <p:sp>
+            <p:nvSpPr>
+              <p:cNvPr name="Freeform 29" id="29"/>
+              <p:cNvSpPr/>
+              <p:nvPr/>
+            </p:nvSpPr>
+            <p:spPr>
+              <a:xfrm flipH="false" flipV="false" rot="0">
+                <a:off x="0" y="0"/>
+                <a:ext cx="3656880" cy="1005120"/>
+              </a:xfrm>
+              <a:custGeom>
+                <a:avLst/>
+                <a:gdLst/>
+                <a:ahLst/>
+                <a:cxnLst/>
+                <a:rect r="r" b="b" t="t" l="l"/>
+                <a:pathLst>
+                  <a:path h="1005120" w="3656880">
+                    <a:moveTo>
+                      <a:pt x="0" y="0"/>
+                    </a:moveTo>
+                    <a:lnTo>
+                      <a:pt x="3656880" y="0"/>
+                    </a:lnTo>
+                    <a:lnTo>
+                      <a:pt x="3656880" y="1005120"/>
+                    </a:lnTo>
+                    <a:lnTo>
+                      <a:pt x="0" y="1005120"/>
+                    </a:lnTo>
+                    <a:close/>
+                  </a:path>
+                </a:pathLst>
+              </a:custGeom>
+              <a:blipFill>
+                <a:blip r:embed="rId3">
+                  <a:alphaModFix amt="0"/>
+                </a:blip>
+                <a:stretch>
+                  <a:fillRect l="0" t="-20891" r="0" b="-20891"/>
+                </a:stretch>
+              </a:blipFill>
+            </p:spPr>
+          </p:sp>
+          <p:sp>
+            <p:nvSpPr>
+              <p:cNvPr name="TextBox 30" id="30"/>
+              <p:cNvSpPr txBox="true"/>
+              <p:nvPr/>
+            </p:nvSpPr>
+            <p:spPr>
+              <a:xfrm>
+                <a:off x="0" y="0"/>
+                <a:ext cx="3656876" cy="1005116"/>
+              </a:xfrm>
+              <a:prstGeom prst="rect">
+                <a:avLst/>
+              </a:prstGeom>
+            </p:spPr>
+            <p:txBody>
+              <a:bodyPr anchor="ctr" rtlCol="false" tIns="0" lIns="0" bIns="0" rIns="0"/>
+              <a:lstStyle/>
+              <a:p>
+                <a:pPr algn="l">
+                  <a:lnSpc>
+                    <a:spcPts val="4679"/>
+                  </a:lnSpc>
+                </a:pPr>
+                <a:r>
+                  <a:rPr lang="en-US" b="true" sz="3899" spc="-1">
+                    <a:solidFill>
+                      <a:srgbClr val="06D6A0"/>
+                    </a:solidFill>
+                    <a:latin typeface="Cambria Bold"/>
+                    <a:ea typeface="Cambria Bold"/>
+                    <a:cs typeface="Cambria Bold"/>
+                    <a:sym typeface="Cambria Bold"/>
+                  </a:rPr>
+                  <a:t>+933</a:t>
+                </a:r>
+              </a:p>
+            </p:txBody>
+          </p:sp>
+        </p:grpSp>
+        <p:grpSp>
+          <p:nvGrpSpPr>
+            <p:cNvPr name="Group 31" id="31"/>
+            <p:cNvGrpSpPr/>
+            <p:nvPr/>
+          </p:nvGrpSpPr>
+          <p:grpSpPr>
+            <a:xfrm rot="0">
+              <a:off x="624316" y="7042471"/>
+              <a:ext cx="9988061" cy="748190"/>
+              <a:chOff x="0" y="0"/>
+              <a:chExt cx="7314476" cy="547916"/>
+            </a:xfrm>
+          </p:grpSpPr>
+          <p:sp>
+            <p:nvSpPr>
+              <p:cNvPr name="Freeform 32" id="32"/>
+              <p:cNvSpPr/>
+              <p:nvPr/>
+            </p:nvSpPr>
+            <p:spPr>
+              <a:xfrm flipH="false" flipV="false" rot="0">
+                <a:off x="0" y="0"/>
+                <a:ext cx="7314480" cy="547920"/>
+              </a:xfrm>
+              <a:custGeom>
+                <a:avLst/>
+                <a:gdLst/>
+                <a:ahLst/>
+                <a:cxnLst/>
+                <a:rect r="r" b="b" t="t" l="l"/>
+                <a:pathLst>
+                  <a:path h="547920" w="7314480">
+                    <a:moveTo>
+                      <a:pt x="0" y="0"/>
+                    </a:moveTo>
+                    <a:lnTo>
+                      <a:pt x="7314480" y="0"/>
+                    </a:lnTo>
+                    <a:lnTo>
+                      <a:pt x="7314480" y="547920"/>
+                    </a:lnTo>
+                    <a:lnTo>
+                      <a:pt x="0" y="547920"/>
+                    </a:lnTo>
+                    <a:close/>
+                  </a:path>
+                </a:pathLst>
+              </a:custGeom>
+              <a:blipFill>
+                <a:blip r:embed="rId3">
+                  <a:alphaModFix amt="0"/>
+                </a:blip>
+                <a:stretch>
+                  <a:fillRect l="0" t="-210116" r="0" b="-210115"/>
+                </a:stretch>
+              </a:blipFill>
+            </p:spPr>
+          </p:sp>
+          <p:sp>
+            <p:nvSpPr>
+              <p:cNvPr name="TextBox 33" id="33"/>
+              <p:cNvSpPr txBox="true"/>
+              <p:nvPr/>
+            </p:nvSpPr>
+            <p:spPr>
+              <a:xfrm>
+                <a:off x="0" y="-19050"/>
+                <a:ext cx="7314476" cy="566966"/>
+              </a:xfrm>
+              <a:prstGeom prst="rect">
+                <a:avLst/>
+              </a:prstGeom>
+            </p:spPr>
+            <p:txBody>
+              <a:bodyPr anchor="ctr" rtlCol="false" tIns="0" lIns="0" bIns="0" rIns="0"/>
+              <a:lstStyle/>
+              <a:p>
+                <a:pPr algn="l">
+                  <a:lnSpc>
+                    <a:spcPts val="1890"/>
+                  </a:lnSpc>
+                </a:pPr>
+                <a:r>
+                  <a:rPr lang="en-US" sz="1575" spc="-1">
+                    <a:solidFill>
+                      <a:srgbClr val="9AA6C1"/>
+                    </a:solidFill>
+                    <a:latin typeface="Calibri (MS)"/>
+                    <a:ea typeface="Calibri (MS)"/>
+                    <a:cs typeface="Calibri (MS)"/>
+                    <a:sym typeface="Calibri (MS)"/>
+                  </a:rPr>
+                  <a:t>ep_rew_mean at end of log</a:t>
+                </a:r>
+              </a:p>
+            </p:txBody>
+          </p:sp>
+        </p:grpSp>
       </p:grpSp>
       <p:grpSp>
         <p:nvGrpSpPr>
-          <p:cNvPr name="Group 11" id="11"/>
-          <p:cNvGrpSpPr/>
-          <p:nvPr/>
-        </p:nvGrpSpPr>
-        <p:grpSpPr>
-          <a:xfrm rot="0">
-            <a:off x="11452860" y="2509923"/>
-            <a:ext cx="2742657" cy="753837"/>
-            <a:chOff x="0" y="0"/>
-            <a:chExt cx="3656876" cy="1005116"/>
-          </a:xfrm>
-        </p:grpSpPr>
-        <p:sp>
-          <p:nvSpPr>
-            <p:cNvPr name="Freeform 12" id="12"/>
-            <p:cNvSpPr/>
-            <p:nvPr/>
-          </p:nvSpPr>
-          <p:spPr>
-            <a:xfrm flipH="false" flipV="false" rot="0">
-              <a:off x="0" y="0"/>
-              <a:ext cx="3656880" cy="1005120"/>
-            </a:xfrm>
-            <a:custGeom>
-              <a:avLst/>
-              <a:gdLst/>
-              <a:ahLst/>
-              <a:cxnLst/>
-              <a:rect r="r" b="b" t="t" l="l"/>
-              <a:pathLst>
-                <a:path h="1005120" w="3656880">
-                  <a:moveTo>
-                    <a:pt x="0" y="0"/>
-                  </a:moveTo>
-                  <a:lnTo>
-                    <a:pt x="3656880" y="0"/>
-                  </a:lnTo>
-                  <a:lnTo>
-                    <a:pt x="3656880" y="1005120"/>
-                  </a:lnTo>
-                  <a:lnTo>
-                    <a:pt x="0" y="1005120"/>
-                  </a:lnTo>
-                  <a:close/>
-                </a:path>
-              </a:pathLst>
-            </a:custGeom>
-            <a:blipFill>
-              <a:blip r:embed="rId3">
-                <a:alphaModFix amt="0"/>
-              </a:blip>
-              <a:stretch>
-                <a:fillRect l="0" t="-20891" r="0" b="-20891"/>
-              </a:stretch>
-            </a:blipFill>
-          </p:spPr>
-        </p:sp>
-        <p:sp>
-          <p:nvSpPr>
-            <p:cNvPr name="TextBox 13" id="13"/>
-            <p:cNvSpPr txBox="true"/>
-            <p:nvPr/>
-          </p:nvSpPr>
-          <p:spPr>
-            <a:xfrm>
-              <a:off x="0" y="0"/>
-              <a:ext cx="3656876" cy="1005116"/>
-            </a:xfrm>
-            <a:prstGeom prst="rect">
-              <a:avLst/>
-            </a:prstGeom>
-          </p:spPr>
-          <p:txBody>
-            <a:bodyPr anchor="ctr" rtlCol="false" tIns="0" lIns="0" bIns="0" rIns="0"/>
-            <a:lstStyle/>
-            <a:p>
-              <a:pPr algn="l">
-                <a:lnSpc>
-                  <a:spcPts val="4680"/>
-                </a:lnSpc>
-              </a:pPr>
-              <a:r>
-                <a:rPr lang="en-US" b="true" sz="3900" spc="-1">
-                  <a:solidFill>
-                    <a:srgbClr val="06D6A0"/>
-                  </a:solidFill>
-                  <a:latin typeface="Cambria Bold"/>
-                  <a:ea typeface="Cambria Bold"/>
-                  <a:cs typeface="Cambria Bold"/>
-                  <a:sym typeface="Cambria Bold"/>
-                </a:rPr>
-                <a:t>1.56K</a:t>
-              </a:r>
-            </a:p>
-          </p:txBody>
-        </p:sp>
-      </p:grpSp>
-      <p:grpSp>
-        <p:nvGrpSpPr>
-          <p:cNvPr name="Group 14" id="14"/>
-          <p:cNvGrpSpPr/>
-          <p:nvPr/>
-        </p:nvGrpSpPr>
-        <p:grpSpPr>
-          <a:xfrm rot="0">
-            <a:off x="11452860" y="3250797"/>
-            <a:ext cx="5485857" cy="410937"/>
-            <a:chOff x="0" y="0"/>
-            <a:chExt cx="7314476" cy="547916"/>
-          </a:xfrm>
-        </p:grpSpPr>
-        <p:sp>
-          <p:nvSpPr>
-            <p:cNvPr name="Freeform 15" id="15"/>
-            <p:cNvSpPr/>
-            <p:nvPr/>
-          </p:nvSpPr>
-          <p:spPr>
-            <a:xfrm flipH="false" flipV="false" rot="0">
-              <a:off x="0" y="0"/>
-              <a:ext cx="7314480" cy="547920"/>
-            </a:xfrm>
-            <a:custGeom>
-              <a:avLst/>
-              <a:gdLst/>
-              <a:ahLst/>
-              <a:cxnLst/>
-              <a:rect r="r" b="b" t="t" l="l"/>
-              <a:pathLst>
-                <a:path h="547920" w="7314480">
-                  <a:moveTo>
-                    <a:pt x="0" y="0"/>
-                  </a:moveTo>
-                  <a:lnTo>
-                    <a:pt x="7314480" y="0"/>
-                  </a:lnTo>
-                  <a:lnTo>
-                    <a:pt x="7314480" y="547920"/>
-                  </a:lnTo>
-                  <a:lnTo>
-                    <a:pt x="0" y="547920"/>
-                  </a:lnTo>
-                  <a:close/>
-                </a:path>
-              </a:pathLst>
-            </a:custGeom>
-            <a:blipFill>
-              <a:blip r:embed="rId3">
-                <a:alphaModFix amt="0"/>
-              </a:blip>
-              <a:stretch>
-                <a:fillRect l="0" t="-210116" r="0" b="-210115"/>
-              </a:stretch>
-            </a:blipFill>
-          </p:spPr>
-        </p:sp>
-        <p:sp>
-          <p:nvSpPr>
-            <p:cNvPr name="TextBox 16" id="16"/>
-            <p:cNvSpPr txBox="true"/>
-            <p:nvPr/>
-          </p:nvSpPr>
-          <p:spPr>
-            <a:xfrm>
-              <a:off x="0" y="-19050"/>
-              <a:ext cx="7314476" cy="566966"/>
-            </a:xfrm>
-            <a:prstGeom prst="rect">
-              <a:avLst/>
-            </a:prstGeom>
-          </p:spPr>
-          <p:txBody>
-            <a:bodyPr anchor="ctr" rtlCol="false" tIns="0" lIns="0" bIns="0" rIns="0"/>
-            <a:lstStyle/>
-            <a:p>
-              <a:pPr algn="l">
-                <a:lnSpc>
-                  <a:spcPts val="1889"/>
-                </a:lnSpc>
-              </a:pPr>
-              <a:r>
-                <a:rPr lang="en-US" sz="1575" spc="-1">
-                  <a:solidFill>
-                    <a:srgbClr val="9AA6C1"/>
-                  </a:solidFill>
-                  <a:latin typeface="Calibri (MS)"/>
-                  <a:ea typeface="Calibri (MS)"/>
-                  <a:cs typeface="Calibri (MS)"/>
-                  <a:sym typeface="Calibri (MS)"/>
-                </a:rPr>
-                <a:t>logged episodes (rollout)</a:t>
-              </a:r>
-            </a:p>
-          </p:txBody>
-        </p:sp>
-      </p:grpSp>
-      <p:grpSp>
-        <p:nvGrpSpPr>
-          <p:cNvPr name="Group 17" id="17"/>
-          <p:cNvGrpSpPr/>
-          <p:nvPr/>
-        </p:nvGrpSpPr>
-        <p:grpSpPr>
-          <a:xfrm rot="0">
-            <a:off x="11109960" y="3909060"/>
-            <a:ext cx="6349860" cy="1302477"/>
-            <a:chOff x="0" y="0"/>
-            <a:chExt cx="8466480" cy="1736636"/>
-          </a:xfrm>
-        </p:grpSpPr>
-        <p:sp>
-          <p:nvSpPr>
-            <p:cNvPr name="Freeform 18" id="18"/>
-            <p:cNvSpPr/>
-            <p:nvPr/>
-          </p:nvSpPr>
-          <p:spPr>
-            <a:xfrm flipH="false" flipV="false" rot="0">
-              <a:off x="0" y="0"/>
-              <a:ext cx="8466582" cy="1736725"/>
-            </a:xfrm>
-            <a:custGeom>
-              <a:avLst/>
-              <a:gdLst/>
-              <a:ahLst/>
-              <a:cxnLst/>
-              <a:rect r="r" b="b" t="t" l="l"/>
-              <a:pathLst>
-                <a:path h="1736725" w="8466582">
-                  <a:moveTo>
-                    <a:pt x="0" y="146304"/>
-                  </a:moveTo>
-                  <a:cubicBezTo>
-                    <a:pt x="0" y="65532"/>
-                    <a:pt x="65532" y="0"/>
-                    <a:pt x="146304" y="0"/>
-                  </a:cubicBezTo>
-                  <a:lnTo>
-                    <a:pt x="8320278" y="0"/>
-                  </a:lnTo>
-                  <a:cubicBezTo>
-                    <a:pt x="8401050" y="0"/>
-                    <a:pt x="8466582" y="65532"/>
-                    <a:pt x="8466582" y="146304"/>
-                  </a:cubicBezTo>
-                  <a:lnTo>
-                    <a:pt x="8466582" y="1590421"/>
-                  </a:lnTo>
-                  <a:cubicBezTo>
-                    <a:pt x="8466582" y="1671193"/>
-                    <a:pt x="8401050" y="1736725"/>
-                    <a:pt x="8320278" y="1736725"/>
-                  </a:cubicBezTo>
-                  <a:lnTo>
-                    <a:pt x="146304" y="1736725"/>
-                  </a:lnTo>
-                  <a:cubicBezTo>
-                    <a:pt x="65532" y="1736598"/>
-                    <a:pt x="0" y="1671193"/>
-                    <a:pt x="0" y="1590421"/>
-                  </a:cubicBezTo>
-                  <a:close/>
-                </a:path>
-              </a:pathLst>
-            </a:custGeom>
-            <a:solidFill>
-              <a:srgbClr val="16213E"/>
-            </a:solidFill>
-          </p:spPr>
-        </p:sp>
-      </p:grpSp>
-      <p:grpSp>
-        <p:nvGrpSpPr>
-          <p:cNvPr name="Group 19" id="19"/>
-          <p:cNvGrpSpPr/>
-          <p:nvPr/>
-        </p:nvGrpSpPr>
-        <p:grpSpPr>
-          <a:xfrm rot="0">
-            <a:off x="11452860" y="4018683"/>
-            <a:ext cx="2742657" cy="753837"/>
-            <a:chOff x="0" y="0"/>
-            <a:chExt cx="3656876" cy="1005116"/>
-          </a:xfrm>
-        </p:grpSpPr>
-        <p:sp>
-          <p:nvSpPr>
-            <p:cNvPr name="Freeform 20" id="20"/>
-            <p:cNvSpPr/>
-            <p:nvPr/>
-          </p:nvSpPr>
-          <p:spPr>
-            <a:xfrm flipH="false" flipV="false" rot="0">
-              <a:off x="0" y="0"/>
-              <a:ext cx="3656880" cy="1005120"/>
-            </a:xfrm>
-            <a:custGeom>
-              <a:avLst/>
-              <a:gdLst/>
-              <a:ahLst/>
-              <a:cxnLst/>
-              <a:rect r="r" b="b" t="t" l="l"/>
-              <a:pathLst>
-                <a:path h="1005120" w="3656880">
-                  <a:moveTo>
-                    <a:pt x="0" y="0"/>
-                  </a:moveTo>
-                  <a:lnTo>
-                    <a:pt x="3656880" y="0"/>
-                  </a:lnTo>
-                  <a:lnTo>
-                    <a:pt x="3656880" y="1005120"/>
-                  </a:lnTo>
-                  <a:lnTo>
-                    <a:pt x="0" y="1005120"/>
-                  </a:lnTo>
-                  <a:close/>
-                </a:path>
-              </a:pathLst>
-            </a:custGeom>
-            <a:blipFill>
-              <a:blip r:embed="rId3">
-                <a:alphaModFix amt="0"/>
-              </a:blip>
-              <a:stretch>
-                <a:fillRect l="0" t="-20891" r="0" b="-20891"/>
-              </a:stretch>
-            </a:blipFill>
-          </p:spPr>
-        </p:sp>
-        <p:sp>
-          <p:nvSpPr>
-            <p:cNvPr name="TextBox 21" id="21"/>
-            <p:cNvSpPr txBox="true"/>
-            <p:nvPr/>
-          </p:nvSpPr>
-          <p:spPr>
-            <a:xfrm>
-              <a:off x="0" y="0"/>
-              <a:ext cx="3656876" cy="1005116"/>
-            </a:xfrm>
-            <a:prstGeom prst="rect">
-              <a:avLst/>
-            </a:prstGeom>
-          </p:spPr>
-          <p:txBody>
-            <a:bodyPr anchor="ctr" rtlCol="false" tIns="0" lIns="0" bIns="0" rIns="0"/>
-            <a:lstStyle/>
-            <a:p>
-              <a:pPr algn="l">
-                <a:lnSpc>
-                  <a:spcPts val="4680"/>
-                </a:lnSpc>
-              </a:pPr>
-              <a:r>
-                <a:rPr lang="en-US" b="true" sz="3900" spc="-1">
-                  <a:solidFill>
-                    <a:srgbClr val="06D6A0"/>
-                  </a:solidFill>
-                  <a:latin typeface="Cambria Bold"/>
-                  <a:ea typeface="Cambria Bold"/>
-                  <a:cs typeface="Cambria Bold"/>
-                  <a:sym typeface="Cambria Bold"/>
-                </a:rPr>
-                <a:t>6.62M</a:t>
-              </a:r>
-            </a:p>
-          </p:txBody>
-        </p:sp>
-      </p:grpSp>
-      <p:grpSp>
-        <p:nvGrpSpPr>
-          <p:cNvPr name="Group 22" id="22"/>
-          <p:cNvGrpSpPr/>
-          <p:nvPr/>
-        </p:nvGrpSpPr>
-        <p:grpSpPr>
-          <a:xfrm rot="0">
-            <a:off x="11452860" y="4759557"/>
-            <a:ext cx="5485857" cy="410937"/>
-            <a:chOff x="0" y="0"/>
-            <a:chExt cx="7314476" cy="547916"/>
-          </a:xfrm>
-        </p:grpSpPr>
-        <p:sp>
-          <p:nvSpPr>
-            <p:cNvPr name="Freeform 23" id="23"/>
-            <p:cNvSpPr/>
-            <p:nvPr/>
-          </p:nvSpPr>
-          <p:spPr>
-            <a:xfrm flipH="false" flipV="false" rot="0">
-              <a:off x="0" y="0"/>
-              <a:ext cx="7314480" cy="547920"/>
-            </a:xfrm>
-            <a:custGeom>
-              <a:avLst/>
-              <a:gdLst/>
-              <a:ahLst/>
-              <a:cxnLst/>
-              <a:rect r="r" b="b" t="t" l="l"/>
-              <a:pathLst>
-                <a:path h="547920" w="7314480">
-                  <a:moveTo>
-                    <a:pt x="0" y="0"/>
-                  </a:moveTo>
-                  <a:lnTo>
-                    <a:pt x="7314480" y="0"/>
-                  </a:lnTo>
-                  <a:lnTo>
-                    <a:pt x="7314480" y="547920"/>
-                  </a:lnTo>
-                  <a:lnTo>
-                    <a:pt x="0" y="547920"/>
-                  </a:lnTo>
-                  <a:close/>
-                </a:path>
-              </a:pathLst>
-            </a:custGeom>
-            <a:blipFill>
-              <a:blip r:embed="rId3">
-                <a:alphaModFix amt="0"/>
-              </a:blip>
-              <a:stretch>
-                <a:fillRect l="0" t="-210116" r="0" b="-210115"/>
-              </a:stretch>
-            </a:blipFill>
-          </p:spPr>
-        </p:sp>
-        <p:sp>
-          <p:nvSpPr>
-            <p:cNvPr name="TextBox 24" id="24"/>
-            <p:cNvSpPr txBox="true"/>
-            <p:nvPr/>
-          </p:nvSpPr>
-          <p:spPr>
-            <a:xfrm>
-              <a:off x="0" y="-19050"/>
-              <a:ext cx="7314476" cy="566966"/>
-            </a:xfrm>
-            <a:prstGeom prst="rect">
-              <a:avLst/>
-            </a:prstGeom>
-          </p:spPr>
-          <p:txBody>
-            <a:bodyPr anchor="ctr" rtlCol="false" tIns="0" lIns="0" bIns="0" rIns="0"/>
-            <a:lstStyle/>
-            <a:p>
-              <a:pPr algn="l">
-                <a:lnSpc>
-                  <a:spcPts val="1889"/>
-                </a:lnSpc>
-              </a:pPr>
-              <a:r>
-                <a:rPr lang="en-US" sz="1575" spc="-1">
-                  <a:solidFill>
-                    <a:srgbClr val="9AA6C1"/>
-                  </a:solidFill>
-                  <a:latin typeface="Calibri (MS)"/>
-                  <a:ea typeface="Calibri (MS)"/>
-                  <a:cs typeface="Calibri (MS)"/>
-                  <a:sym typeface="Calibri (MS)"/>
-                </a:rPr>
-                <a:t>training timesteps</a:t>
-              </a:r>
-            </a:p>
-          </p:txBody>
-        </p:sp>
-      </p:grpSp>
-      <p:grpSp>
-        <p:nvGrpSpPr>
-          <p:cNvPr name="Group 25" id="25"/>
-          <p:cNvGrpSpPr/>
-          <p:nvPr/>
-        </p:nvGrpSpPr>
-        <p:grpSpPr>
-          <a:xfrm rot="0">
-            <a:off x="11109960" y="5417820"/>
-            <a:ext cx="6349860" cy="1302477"/>
-            <a:chOff x="0" y="0"/>
-            <a:chExt cx="8466480" cy="1736636"/>
-          </a:xfrm>
-        </p:grpSpPr>
-        <p:sp>
-          <p:nvSpPr>
-            <p:cNvPr name="Freeform 26" id="26"/>
-            <p:cNvSpPr/>
-            <p:nvPr/>
-          </p:nvSpPr>
-          <p:spPr>
-            <a:xfrm flipH="false" flipV="false" rot="0">
-              <a:off x="0" y="0"/>
-              <a:ext cx="8466582" cy="1736725"/>
-            </a:xfrm>
-            <a:custGeom>
-              <a:avLst/>
-              <a:gdLst/>
-              <a:ahLst/>
-              <a:cxnLst/>
-              <a:rect r="r" b="b" t="t" l="l"/>
-              <a:pathLst>
-                <a:path h="1736725" w="8466582">
-                  <a:moveTo>
-                    <a:pt x="0" y="146304"/>
-                  </a:moveTo>
-                  <a:cubicBezTo>
-                    <a:pt x="0" y="65532"/>
-                    <a:pt x="65532" y="0"/>
-                    <a:pt x="146304" y="0"/>
-                  </a:cubicBezTo>
-                  <a:lnTo>
-                    <a:pt x="8320278" y="0"/>
-                  </a:lnTo>
-                  <a:cubicBezTo>
-                    <a:pt x="8401050" y="0"/>
-                    <a:pt x="8466582" y="65532"/>
-                    <a:pt x="8466582" y="146304"/>
-                  </a:cubicBezTo>
-                  <a:lnTo>
-                    <a:pt x="8466582" y="1590421"/>
-                  </a:lnTo>
-                  <a:cubicBezTo>
-                    <a:pt x="8466582" y="1671193"/>
-                    <a:pt x="8401050" y="1736725"/>
-                    <a:pt x="8320278" y="1736725"/>
-                  </a:cubicBezTo>
-                  <a:lnTo>
-                    <a:pt x="146304" y="1736725"/>
-                  </a:lnTo>
-                  <a:cubicBezTo>
-                    <a:pt x="65532" y="1736598"/>
-                    <a:pt x="0" y="1671193"/>
-                    <a:pt x="0" y="1590421"/>
-                  </a:cubicBezTo>
-                  <a:close/>
-                </a:path>
-              </a:pathLst>
-            </a:custGeom>
-            <a:solidFill>
-              <a:srgbClr val="16213E"/>
-            </a:solidFill>
-          </p:spPr>
-        </p:sp>
-      </p:grpSp>
-      <p:grpSp>
-        <p:nvGrpSpPr>
-          <p:cNvPr name="Group 27" id="27"/>
-          <p:cNvGrpSpPr/>
-          <p:nvPr/>
-        </p:nvGrpSpPr>
-        <p:grpSpPr>
-          <a:xfrm rot="0">
-            <a:off x="11452860" y="5527443"/>
-            <a:ext cx="2742657" cy="753837"/>
-            <a:chOff x="0" y="0"/>
-            <a:chExt cx="3656876" cy="1005116"/>
-          </a:xfrm>
-        </p:grpSpPr>
-        <p:sp>
-          <p:nvSpPr>
-            <p:cNvPr name="Freeform 28" id="28"/>
-            <p:cNvSpPr/>
-            <p:nvPr/>
-          </p:nvSpPr>
-          <p:spPr>
-            <a:xfrm flipH="false" flipV="false" rot="0">
-              <a:off x="0" y="0"/>
-              <a:ext cx="3656880" cy="1005120"/>
-            </a:xfrm>
-            <a:custGeom>
-              <a:avLst/>
-              <a:gdLst/>
-              <a:ahLst/>
-              <a:cxnLst/>
-              <a:rect r="r" b="b" t="t" l="l"/>
-              <a:pathLst>
-                <a:path h="1005120" w="3656880">
-                  <a:moveTo>
-                    <a:pt x="0" y="0"/>
-                  </a:moveTo>
-                  <a:lnTo>
-                    <a:pt x="3656880" y="0"/>
-                  </a:lnTo>
-                  <a:lnTo>
-                    <a:pt x="3656880" y="1005120"/>
-                  </a:lnTo>
-                  <a:lnTo>
-                    <a:pt x="0" y="1005120"/>
-                  </a:lnTo>
-                  <a:close/>
-                </a:path>
-              </a:pathLst>
-            </a:custGeom>
-            <a:blipFill>
-              <a:blip r:embed="rId3">
-                <a:alphaModFix amt="0"/>
-              </a:blip>
-              <a:stretch>
-                <a:fillRect l="0" t="-20891" r="0" b="-20891"/>
-              </a:stretch>
-            </a:blipFill>
-          </p:spPr>
-        </p:sp>
-        <p:sp>
-          <p:nvSpPr>
-            <p:cNvPr name="TextBox 29" id="29"/>
-            <p:cNvSpPr txBox="true"/>
-            <p:nvPr/>
-          </p:nvSpPr>
-          <p:spPr>
-            <a:xfrm>
-              <a:off x="0" y="0"/>
-              <a:ext cx="3656876" cy="1005116"/>
-            </a:xfrm>
-            <a:prstGeom prst="rect">
-              <a:avLst/>
-            </a:prstGeom>
-          </p:spPr>
-          <p:txBody>
-            <a:bodyPr anchor="ctr" rtlCol="false" tIns="0" lIns="0" bIns="0" rIns="0"/>
-            <a:lstStyle/>
-            <a:p>
-              <a:pPr algn="l">
-                <a:lnSpc>
-                  <a:spcPts val="4680"/>
-                </a:lnSpc>
-              </a:pPr>
-              <a:r>
-                <a:rPr lang="en-US" b="true" sz="3900" spc="-1">
-                  <a:solidFill>
-                    <a:srgbClr val="06D6A0"/>
-                  </a:solidFill>
-                  <a:latin typeface="Cambria Bold"/>
-                  <a:ea typeface="Cambria Bold"/>
-                  <a:cs typeface="Cambria Bold"/>
-                  <a:sym typeface="Cambria Bold"/>
-                </a:rPr>
-                <a:t>+933</a:t>
-              </a:r>
-            </a:p>
-          </p:txBody>
-        </p:sp>
-      </p:grpSp>
-      <p:grpSp>
-        <p:nvGrpSpPr>
-          <p:cNvPr name="Group 30" id="30"/>
-          <p:cNvGrpSpPr/>
-          <p:nvPr/>
-        </p:nvGrpSpPr>
-        <p:grpSpPr>
-          <a:xfrm rot="0">
-            <a:off x="11452860" y="6268317"/>
-            <a:ext cx="5485857" cy="410937"/>
-            <a:chOff x="0" y="0"/>
-            <a:chExt cx="7314476" cy="547916"/>
-          </a:xfrm>
-        </p:grpSpPr>
-        <p:sp>
-          <p:nvSpPr>
-            <p:cNvPr name="Freeform 31" id="31"/>
-            <p:cNvSpPr/>
-            <p:nvPr/>
-          </p:nvSpPr>
-          <p:spPr>
-            <a:xfrm flipH="false" flipV="false" rot="0">
-              <a:off x="0" y="0"/>
-              <a:ext cx="7314480" cy="547920"/>
-            </a:xfrm>
-            <a:custGeom>
-              <a:avLst/>
-              <a:gdLst/>
-              <a:ahLst/>
-              <a:cxnLst/>
-              <a:rect r="r" b="b" t="t" l="l"/>
-              <a:pathLst>
-                <a:path h="547920" w="7314480">
-                  <a:moveTo>
-                    <a:pt x="0" y="0"/>
-                  </a:moveTo>
-                  <a:lnTo>
-                    <a:pt x="7314480" y="0"/>
-                  </a:lnTo>
-                  <a:lnTo>
-                    <a:pt x="7314480" y="547920"/>
-                  </a:lnTo>
-                  <a:lnTo>
-                    <a:pt x="0" y="547920"/>
-                  </a:lnTo>
-                  <a:close/>
-                </a:path>
-              </a:pathLst>
-            </a:custGeom>
-            <a:blipFill>
-              <a:blip r:embed="rId3">
-                <a:alphaModFix amt="0"/>
-              </a:blip>
-              <a:stretch>
-                <a:fillRect l="0" t="-210116" r="0" b="-210115"/>
-              </a:stretch>
-            </a:blipFill>
-          </p:spPr>
-        </p:sp>
-        <p:sp>
-          <p:nvSpPr>
-            <p:cNvPr name="TextBox 32" id="32"/>
-            <p:cNvSpPr txBox="true"/>
-            <p:nvPr/>
-          </p:nvSpPr>
-          <p:spPr>
-            <a:xfrm>
-              <a:off x="0" y="-19050"/>
-              <a:ext cx="7314476" cy="566966"/>
-            </a:xfrm>
-            <a:prstGeom prst="rect">
-              <a:avLst/>
-            </a:prstGeom>
-          </p:spPr>
-          <p:txBody>
-            <a:bodyPr anchor="ctr" rtlCol="false" tIns="0" lIns="0" bIns="0" rIns="0"/>
-            <a:lstStyle/>
-            <a:p>
-              <a:pPr algn="l">
-                <a:lnSpc>
-                  <a:spcPts val="1889"/>
-                </a:lnSpc>
-              </a:pPr>
-              <a:r>
-                <a:rPr lang="en-US" sz="1575" spc="-1">
-                  <a:solidFill>
-                    <a:srgbClr val="9AA6C1"/>
-                  </a:solidFill>
-                  <a:latin typeface="Calibri (MS)"/>
-                  <a:ea typeface="Calibri (MS)"/>
-                  <a:cs typeface="Calibri (MS)"/>
-                  <a:sym typeface="Calibri (MS)"/>
-                </a:rPr>
-                <a:t>ep_rew_mean at end of log</a:t>
-              </a:r>
-            </a:p>
-          </p:txBody>
-        </p:sp>
-      </p:grpSp>
-      <p:grpSp>
-        <p:nvGrpSpPr>
-          <p:cNvPr name="Group 33" id="33"/>
-          <p:cNvGrpSpPr/>
-          <p:nvPr/>
-        </p:nvGrpSpPr>
-        <p:grpSpPr>
-          <a:xfrm rot="0">
-            <a:off x="1234983" y="6943858"/>
-            <a:ext cx="3565617" cy="3343142"/>
-            <a:chOff x="0" y="0"/>
-            <a:chExt cx="4754156" cy="4457522"/>
-          </a:xfrm>
-        </p:grpSpPr>
-        <p:sp>
-          <p:nvSpPr>
-            <p:cNvPr name="Freeform 34" id="34" descr="/tmp/claude-1000/-media-hung-Work-Project-AI-Engineer-RL-contra-PPO/70c7dc7d-8f3f-4139-8f25-95b0e9e6dca5/scratchpad/frames/1m_frame.png"/>
-            <p:cNvSpPr/>
-            <p:nvPr/>
-          </p:nvSpPr>
-          <p:spPr>
-            <a:xfrm flipH="false" flipV="false" rot="0">
-              <a:off x="0" y="0"/>
-              <a:ext cx="4754118" cy="4457573"/>
-            </a:xfrm>
-            <a:custGeom>
-              <a:avLst/>
-              <a:gdLst/>
-              <a:ahLst/>
-              <a:cxnLst/>
-              <a:rect r="r" b="b" t="t" l="l"/>
-              <a:pathLst>
-                <a:path h="4457573" w="4754118">
-                  <a:moveTo>
-                    <a:pt x="0" y="0"/>
-                  </a:moveTo>
-                  <a:lnTo>
-                    <a:pt x="4754118" y="0"/>
-                  </a:lnTo>
-                  <a:lnTo>
-                    <a:pt x="4754118" y="4457573"/>
-                  </a:lnTo>
-                  <a:lnTo>
-                    <a:pt x="0" y="4457573"/>
-                  </a:lnTo>
-                  <a:lnTo>
-                    <a:pt x="0" y="0"/>
-                  </a:lnTo>
-                  <a:close/>
-                </a:path>
-              </a:pathLst>
-            </a:custGeom>
-            <a:blipFill>
-              <a:blip r:embed="rId5"/>
-              <a:stretch>
-                <a:fillRect l="-5" t="0" r="-6" b="1"/>
-              </a:stretch>
-            </a:blipFill>
-          </p:spPr>
-        </p:sp>
-      </p:grpSp>
-      <p:grpSp>
-        <p:nvGrpSpPr>
-          <p:cNvPr name="Group 35" id="35"/>
+          <p:cNvPr name="Group 34" id="34"/>
           <p:cNvGrpSpPr/>
           <p:nvPr/>
         </p:nvGrpSpPr>
@@ -33858,7 +35976,7 @@
         </p:grpSpPr>
         <p:sp>
           <p:nvSpPr>
-            <p:cNvPr name="Freeform 36" id="36"/>
+            <p:cNvPr name="Freeform 35" id="35"/>
             <p:cNvSpPr/>
             <p:nvPr/>
           </p:nvSpPr>
@@ -33903,7 +36021,7 @@
         </p:sp>
         <p:sp>
           <p:nvSpPr>
-            <p:cNvPr name="TextBox 37" id="37"/>
+            <p:cNvPr name="TextBox 36" id="36"/>
             <p:cNvSpPr txBox="true"/>
             <p:nvPr/>
           </p:nvSpPr>
@@ -33943,68 +36061,7 @@
       </p:grpSp>
       <p:grpSp>
         <p:nvGrpSpPr>
-          <p:cNvPr name="Group 38" id="38"/>
-          <p:cNvGrpSpPr/>
-          <p:nvPr/>
-        </p:nvGrpSpPr>
-        <p:grpSpPr>
-          <a:xfrm rot="0">
-            <a:off x="5349783" y="7200900"/>
-            <a:ext cx="3291840" cy="3086100"/>
-            <a:chOff x="0" y="0"/>
-            <a:chExt cx="4389120" cy="4114800"/>
-          </a:xfrm>
-        </p:grpSpPr>
-        <p:sp>
-          <p:nvSpPr>
-            <p:cNvPr name="Freeform 39" id="39" descr="/tmp/claude-1000/-media-hung-Work-Project-AI-Engineer-RL-contra-PPO/70c7dc7d-8f3f-4139-8f25-95b0e9e6dca5/scratchpad/frames/4m_frame.png"/>
-            <p:cNvSpPr/>
-            <p:nvPr/>
-          </p:nvSpPr>
-          <p:spPr>
-            <a:xfrm flipH="false" flipV="false" rot="0">
-              <a:off x="0" y="0"/>
-              <a:ext cx="4389120" cy="4114800"/>
-            </a:xfrm>
-            <a:custGeom>
-              <a:avLst/>
-              <a:gdLst/>
-              <a:ahLst/>
-              <a:cxnLst/>
-              <a:rect r="r" b="b" t="t" l="l"/>
-              <a:pathLst>
-                <a:path h="4114800" w="4389120">
-                  <a:moveTo>
-                    <a:pt x="0" y="0"/>
-                  </a:moveTo>
-                  <a:lnTo>
-                    <a:pt x="4389120" y="0"/>
-                  </a:lnTo>
-                  <a:lnTo>
-                    <a:pt x="4389120" y="4114800"/>
-                  </a:lnTo>
-                  <a:lnTo>
-                    <a:pt x="0" y="4114800"/>
-                  </a:lnTo>
-                  <a:lnTo>
-                    <a:pt x="0" y="0"/>
-                  </a:lnTo>
-                  <a:close/>
-                </a:path>
-              </a:pathLst>
-            </a:custGeom>
-            <a:blipFill>
-              <a:blip r:embed="rId6"/>
-              <a:stretch>
-                <a:fillRect l="0" t="0" r="0" b="0"/>
-              </a:stretch>
-            </a:blipFill>
-          </p:spPr>
-        </p:sp>
-      </p:grpSp>
-      <p:grpSp>
-        <p:nvGrpSpPr>
-          <p:cNvPr name="Group 40" id="40"/>
+          <p:cNvPr name="Group 37" id="37"/>
           <p:cNvGrpSpPr/>
           <p:nvPr/>
         </p:nvGrpSpPr>
@@ -34018,7 +36075,7 @@
         </p:grpSpPr>
         <p:sp>
           <p:nvSpPr>
-            <p:cNvPr name="Freeform 41" id="41"/>
+            <p:cNvPr name="Freeform 38" id="38"/>
             <p:cNvSpPr/>
             <p:nvPr/>
           </p:nvSpPr>
@@ -34063,7 +36120,7 @@
         </p:sp>
         <p:sp>
           <p:nvSpPr>
-            <p:cNvPr name="TextBox 42" id="42"/>
+            <p:cNvPr name="TextBox 39" id="39"/>
             <p:cNvSpPr txBox="true"/>
             <p:nvPr/>
           </p:nvSpPr>
@@ -34103,68 +36160,7 @@
       </p:grpSp>
       <p:grpSp>
         <p:nvGrpSpPr>
-          <p:cNvPr name="Group 43" id="43"/>
-          <p:cNvGrpSpPr/>
-          <p:nvPr/>
-        </p:nvGrpSpPr>
-        <p:grpSpPr>
-          <a:xfrm rot="0">
-            <a:off x="9601200" y="7072379"/>
-            <a:ext cx="3429000" cy="3214621"/>
-            <a:chOff x="0" y="0"/>
-            <a:chExt cx="4572000" cy="4286161"/>
-          </a:xfrm>
-        </p:grpSpPr>
-        <p:sp>
-          <p:nvSpPr>
-            <p:cNvPr name="Freeform 44" id="44" descr="/tmp/claude-1000/-media-hung-Work-Project-AI-Engineer-RL-contra-PPO/70c7dc7d-8f3f-4139-8f25-95b0e9e6dca5/scratchpad/frames/final_frame.png"/>
-            <p:cNvSpPr/>
-            <p:nvPr/>
-          </p:nvSpPr>
-          <p:spPr>
-            <a:xfrm flipH="false" flipV="false" rot="0">
-              <a:off x="0" y="0"/>
-              <a:ext cx="4572000" cy="4286123"/>
-            </a:xfrm>
-            <a:custGeom>
-              <a:avLst/>
-              <a:gdLst/>
-              <a:ahLst/>
-              <a:cxnLst/>
-              <a:rect r="r" b="b" t="t" l="l"/>
-              <a:pathLst>
-                <a:path h="4286123" w="4572000">
-                  <a:moveTo>
-                    <a:pt x="0" y="0"/>
-                  </a:moveTo>
-                  <a:lnTo>
-                    <a:pt x="4572000" y="0"/>
-                  </a:lnTo>
-                  <a:lnTo>
-                    <a:pt x="4572000" y="4286123"/>
-                  </a:lnTo>
-                  <a:lnTo>
-                    <a:pt x="0" y="4286123"/>
-                  </a:lnTo>
-                  <a:lnTo>
-                    <a:pt x="0" y="0"/>
-                  </a:lnTo>
-                  <a:close/>
-                </a:path>
-              </a:pathLst>
-            </a:custGeom>
-            <a:blipFill>
-              <a:blip r:embed="rId7"/>
-              <a:stretch>
-                <a:fillRect l="0" t="-1" r="0" b="-1"/>
-              </a:stretch>
-            </a:blipFill>
-          </p:spPr>
-        </p:sp>
-      </p:grpSp>
-      <p:grpSp>
-        <p:nvGrpSpPr>
-          <p:cNvPr name="Group 45" id="45"/>
+          <p:cNvPr name="Group 40" id="40"/>
           <p:cNvGrpSpPr/>
           <p:nvPr/>
         </p:nvGrpSpPr>
@@ -34178,7 +36174,7 @@
         </p:grpSpPr>
         <p:sp>
           <p:nvSpPr>
-            <p:cNvPr name="Freeform 46" id="46"/>
+            <p:cNvPr name="Freeform 41" id="41"/>
             <p:cNvSpPr/>
             <p:nvPr/>
           </p:nvSpPr>
@@ -34223,7 +36219,7 @@
         </p:sp>
         <p:sp>
           <p:nvSpPr>
-            <p:cNvPr name="TextBox 47" id="47"/>
+            <p:cNvPr name="TextBox 42" id="42"/>
             <p:cNvSpPr txBox="true"/>
             <p:nvPr/>
           </p:nvSpPr>
@@ -34263,106 +36259,7 @@
       </p:grpSp>
       <p:grpSp>
         <p:nvGrpSpPr>
-          <p:cNvPr name="Group 48" id="48"/>
-          <p:cNvGrpSpPr/>
-          <p:nvPr/>
-        </p:nvGrpSpPr>
-        <p:grpSpPr>
-          <a:xfrm rot="0">
-            <a:off x="13582650" y="7987122"/>
-            <a:ext cx="3977097" cy="1919700"/>
-            <a:chOff x="0" y="0"/>
-            <a:chExt cx="5302796" cy="2559600"/>
-          </a:xfrm>
-        </p:grpSpPr>
-        <p:sp>
-          <p:nvSpPr>
-            <p:cNvPr name="Freeform 49" id="49"/>
-            <p:cNvSpPr/>
-            <p:nvPr/>
-          </p:nvSpPr>
-          <p:spPr>
-            <a:xfrm flipH="false" flipV="false" rot="0">
-              <a:off x="0" y="0"/>
-              <a:ext cx="5302800" cy="2559604"/>
-            </a:xfrm>
-            <a:custGeom>
-              <a:avLst/>
-              <a:gdLst/>
-              <a:ahLst/>
-              <a:cxnLst/>
-              <a:rect r="r" b="b" t="t" l="l"/>
-              <a:pathLst>
-                <a:path h="2559604" w="5302800">
-                  <a:moveTo>
-                    <a:pt x="0" y="0"/>
-                  </a:moveTo>
-                  <a:lnTo>
-                    <a:pt x="5302800" y="0"/>
-                  </a:lnTo>
-                  <a:lnTo>
-                    <a:pt x="5302800" y="2559604"/>
-                  </a:lnTo>
-                  <a:lnTo>
-                    <a:pt x="0" y="2559604"/>
-                  </a:lnTo>
-                  <a:close/>
-                </a:path>
-              </a:pathLst>
-            </a:custGeom>
-            <a:blipFill>
-              <a:blip r:embed="rId3">
-                <a:alphaModFix amt="0"/>
-              </a:blip>
-              <a:stretch>
-                <a:fillRect l="-11930" t="0" r="-11930" b="0"/>
-              </a:stretch>
-            </a:blipFill>
-          </p:spPr>
-        </p:sp>
-        <p:sp>
-          <p:nvSpPr>
-            <p:cNvPr name="TextBox 50" id="50"/>
-            <p:cNvSpPr txBox="true"/>
-            <p:nvPr/>
-          </p:nvSpPr>
-          <p:spPr>
-            <a:xfrm>
-              <a:off x="0" y="-76200"/>
-              <a:ext cx="5302796" cy="2635800"/>
-            </a:xfrm>
-            <a:prstGeom prst="rect">
-              <a:avLst/>
-            </a:prstGeom>
-          </p:spPr>
-          <p:txBody>
-            <a:bodyPr anchor="ctr" rtlCol="false" tIns="0" lIns="0" bIns="0" rIns="0"/>
-            <a:lstStyle/>
-            <a:p>
-              <a:pPr algn="l">
-                <a:lnSpc>
-                  <a:spcPts val="2414"/>
-                </a:lnSpc>
-              </a:pPr>
-              <a:r>
-                <a:rPr lang="en-US" sz="1749" i="true" spc="-1">
-                  <a:solidFill>
-                    <a:srgbClr val="9AA6C1"/>
-                  </a:solidFill>
-                  <a:latin typeface="Calibri (MS) Italics"/>
-                  <a:ea typeface="Calibri (MS) Italics"/>
-                  <a:cs typeface="Calibri (MS) Italics"/>
-                  <a:sym typeface="Calibri (MS) Italics"/>
-                </a:rPr>
-                <a:t>Frame taken from video/*.mp4 (synchronized evaluation, see training_progress_comparison.gif)</a:t>
-              </a:r>
-            </a:p>
-          </p:txBody>
-        </p:sp>
-      </p:grpSp>
-      <p:grpSp>
-        <p:nvGrpSpPr>
-          <p:cNvPr name="Group 51" id="51"/>
+          <p:cNvPr name="Group 43" id="43"/>
           <p:cNvGrpSpPr/>
           <p:nvPr/>
         </p:nvGrpSpPr>
@@ -34376,7 +36273,7 @@
         </p:grpSpPr>
         <p:sp>
           <p:nvSpPr>
-            <p:cNvPr name="Freeform 52" id="52"/>
+            <p:cNvPr name="Freeform 44" id="44"/>
             <p:cNvSpPr/>
             <p:nvPr/>
           </p:nvSpPr>
@@ -34421,7 +36318,7 @@
         </p:sp>
         <p:sp>
           <p:nvSpPr>
-            <p:cNvPr name="TextBox 53" id="53"/>
+            <p:cNvPr name="TextBox 45" id="45"/>
             <p:cNvSpPr txBox="true"/>
             <p:nvPr/>
           </p:nvSpPr>
@@ -34459,6 +36356,30 @@
           </p:txBody>
         </p:sp>
       </p:grpSp>
+      <p:pic>
+        <p:nvPicPr>
+          <p:cNvPr name="Picture 46" id="46"/>
+          <p:cNvPicPr>
+            <a:picLocks noChangeAspect="true"/>
+          </p:cNvPicPr>
+          <p:nvPr/>
+        </p:nvPicPr>
+        <p:blipFill>
+          <a:blip r:embed="rId5"/>
+          <a:stretch>
+            <a:fillRect/>
+          </a:stretch>
+        </p:blipFill>
+        <p:spPr>
+          <a:xfrm rot="0">
+            <a:off x="17644" y="5391112"/>
+            <a:ext cx="10536472" cy="5393750"/>
+          </a:xfrm>
+          <a:prstGeom prst="rect">
+            <a:avLst/>
+          </a:prstGeom>
+        </p:spPr>
+      </p:pic>
     </p:spTree>
   </p:cSld>
   <p:clrMapOvr>
